--- a/ATM项目演示.pptx
+++ b/ATM项目演示.pptx
@@ -30,9 +30,11 @@
     <p:sldId id="278" r:id="rId24"/>
     <p:sldId id="279" r:id="rId25"/>
     <p:sldId id="280" r:id="rId26"/>
+    <p:sldId id="281" r:id="rId27"/>
+    <p:sldId id="282" r:id="rId28"/>
   </p:sldIdLst>
   <p:notesMasterIdLst>
-    <p:notesMasterId r:id="rId27"/>
+    <p:notesMasterId r:id="rId29"/>
   </p:notesMasterIdLst>
   <p:sldSz cx="9144000" cy="5143500"/>
   <p:notesSz cx="5143500" cy="9144000"/>
@@ -2046,6 +2048,182 @@
             <a:fld id="{F7021451-1387-4CA6-816F-3879F97B5CBC}" type="slidenum">
               <a:rPr lang="en-US"/>
               <a:t>25</a:t>
+            </a:fld>
+            <a:endParaRPr lang="en-US"/>
+          </a:p>
+        </p:txBody>
+      </p:sp>
+    </p:spTree>
+    <p:extLst>
+      <p:ext uri="{BB962C8B-B14F-4D97-AF65-F5344CB8AC3E}">
+        <p14:creationId xmlns:p14="http://schemas.microsoft.com/office/powerpoint/2010/main" val="1024086991"/>
+      </p:ext>
+    </p:extLst>
+  </p:cSld>
+  <p:clrMapOvr>
+    <a:masterClrMapping/>
+  </p:clrMapOvr>
+</p:notes>
+</file>
+
+<file path=ppt/notesSlides/notesSlide26.xml><?xml version="1.0" encoding="utf-8"?>
+<p:notes xmlns:a="http://schemas.openxmlformats.org/drawingml/2006/main" xmlns:r="http://schemas.openxmlformats.org/officeDocument/2006/relationships" xmlns:p="http://schemas.openxmlformats.org/presentationml/2006/main">
+  <p:cSld>
+    <p:spTree>
+      <p:nvGrpSpPr>
+        <p:cNvPr id="1" name=""/>
+        <p:cNvGrpSpPr/>
+        <p:nvPr/>
+      </p:nvGrpSpPr>
+      <p:grpSpPr>
+        <a:xfrm>
+          <a:off x="0" y="0"/>
+          <a:ext cx="0" cy="0"/>
+          <a:chOff x="0" y="0"/>
+          <a:chExt cx="0" cy="0"/>
+        </a:xfrm>
+      </p:grpSpPr>
+      <p:sp>
+        <p:nvSpPr>
+          <p:cNvPr id="2" name="Slide Image Placeholder 1"/>
+          <p:cNvSpPr>
+            <a:spLocks noGrp="1" noRot="1" noChangeAspect="1"/>
+          </p:cNvSpPr>
+          <p:nvPr>
+            <p:ph type="sldImg"/>
+          </p:nvPr>
+        </p:nvSpPr>
+        <p:spPr/>
+      </p:sp>
+      <p:sp>
+        <p:nvSpPr>
+          <p:cNvPr id="3" name="Notes Placeholder 2"/>
+          <p:cNvSpPr>
+            <a:spLocks noGrp="1"/>
+          </p:cNvSpPr>
+          <p:nvPr>
+            <p:ph type="body" idx="1"/>
+          </p:nvPr>
+        </p:nvSpPr>
+        <p:spPr/>
+        <p:txBody>
+          <a:bodyPr/>
+          <a:lstStyle/>
+          <a:p>
+            <a:r>
+              <a:rPr lang="en-US" dirty="0"/>
+              <a:t/>
+            </a:r>
+            <a:endParaRPr lang="en-US" dirty="0"/>
+          </a:p>
+        </p:txBody>
+      </p:sp>
+      <p:sp>
+        <p:nvSpPr>
+          <p:cNvPr id="4" name="Slide Number Placeholder 3"/>
+          <p:cNvSpPr>
+            <a:spLocks noGrp="1"/>
+          </p:cNvSpPr>
+          <p:nvPr>
+            <p:ph type="sldNum" sz="quarter" idx="10"/>
+          </p:nvPr>
+        </p:nvSpPr>
+        <p:spPr/>
+        <p:txBody>
+          <a:bodyPr/>
+          <a:lstStyle/>
+          <a:p>
+            <a:fld id="{F7021451-1387-4CA6-816F-3879F97B5CBC}" type="slidenum">
+              <a:rPr lang="en-US"/>
+              <a:t>26</a:t>
+            </a:fld>
+            <a:endParaRPr lang="en-US"/>
+          </a:p>
+        </p:txBody>
+      </p:sp>
+    </p:spTree>
+    <p:extLst>
+      <p:ext uri="{BB962C8B-B14F-4D97-AF65-F5344CB8AC3E}">
+        <p14:creationId xmlns:p14="http://schemas.microsoft.com/office/powerpoint/2010/main" val="1024086991"/>
+      </p:ext>
+    </p:extLst>
+  </p:cSld>
+  <p:clrMapOvr>
+    <a:masterClrMapping/>
+  </p:clrMapOvr>
+</p:notes>
+</file>
+
+<file path=ppt/notesSlides/notesSlide27.xml><?xml version="1.0" encoding="utf-8"?>
+<p:notes xmlns:a="http://schemas.openxmlformats.org/drawingml/2006/main" xmlns:r="http://schemas.openxmlformats.org/officeDocument/2006/relationships" xmlns:p="http://schemas.openxmlformats.org/presentationml/2006/main">
+  <p:cSld>
+    <p:spTree>
+      <p:nvGrpSpPr>
+        <p:cNvPr id="1" name=""/>
+        <p:cNvGrpSpPr/>
+        <p:nvPr/>
+      </p:nvGrpSpPr>
+      <p:grpSpPr>
+        <a:xfrm>
+          <a:off x="0" y="0"/>
+          <a:ext cx="0" cy="0"/>
+          <a:chOff x="0" y="0"/>
+          <a:chExt cx="0" cy="0"/>
+        </a:xfrm>
+      </p:grpSpPr>
+      <p:sp>
+        <p:nvSpPr>
+          <p:cNvPr id="2" name="Slide Image Placeholder 1"/>
+          <p:cNvSpPr>
+            <a:spLocks noGrp="1" noRot="1" noChangeAspect="1"/>
+          </p:cNvSpPr>
+          <p:nvPr>
+            <p:ph type="sldImg"/>
+          </p:nvPr>
+        </p:nvSpPr>
+        <p:spPr/>
+      </p:sp>
+      <p:sp>
+        <p:nvSpPr>
+          <p:cNvPr id="3" name="Notes Placeholder 2"/>
+          <p:cNvSpPr>
+            <a:spLocks noGrp="1"/>
+          </p:cNvSpPr>
+          <p:nvPr>
+            <p:ph type="body" idx="1"/>
+          </p:nvPr>
+        </p:nvSpPr>
+        <p:spPr/>
+        <p:txBody>
+          <a:bodyPr/>
+          <a:lstStyle/>
+          <a:p>
+            <a:r>
+              <a:rPr lang="en-US" dirty="0"/>
+              <a:t/>
+            </a:r>
+            <a:endParaRPr lang="en-US" dirty="0"/>
+          </a:p>
+        </p:txBody>
+      </p:sp>
+      <p:sp>
+        <p:nvSpPr>
+          <p:cNvPr id="4" name="Slide Number Placeholder 3"/>
+          <p:cNvSpPr>
+            <a:spLocks noGrp="1"/>
+          </p:cNvSpPr>
+          <p:nvPr>
+            <p:ph type="sldNum" sz="quarter" idx="10"/>
+          </p:nvPr>
+        </p:nvSpPr>
+        <p:spPr/>
+        <p:txBody>
+          <a:bodyPr/>
+          <a:lstStyle/>
+          <a:p>
+            <a:fld id="{F7021451-1387-4CA6-816F-3879F97B5CBC}" type="slidenum">
+              <a:rPr lang="en-US"/>
+              <a:t>27</a:t>
             </a:fld>
             <a:endParaRPr lang="en-US"/>
           </a:p>
@@ -19556,7 +19734,7 @@
                 <a:ea typeface="Calibri" pitchFamily="34" charset="-122"/>
                 <a:cs typeface="Calibri" pitchFamily="34" charset="-120"/>
               </a:rPr>
-              <a:t>全部 17 个测试用例通过，通过率 100%</a:t>
+              <a:t>全部 29 个测试用例通过，通过率 100%</a:t>
             </a:r>
             <a:endParaRPr lang="en-US" sz="1100" dirty="0"/>
           </a:p>
@@ -22544,7 +22722,7 @@
                 <a:ea typeface="Calibri" pitchFamily="34" charset="-122"/>
                 <a:cs typeface="Calibri" pitchFamily="34" charset="-120"/>
               </a:rPr>
-              <a:t>22行</a:t>
+              <a:t>11行</a:t>
             </a:r>
             <a:endParaRPr lang="en-US" sz="900" dirty="0"/>
           </a:p>
@@ -22681,7 +22859,7 @@
                 <a:ea typeface="Calibri" pitchFamily="34" charset="-122"/>
                 <a:cs typeface="Calibri" pitchFamily="34" charset="-120"/>
               </a:rPr>
-              <a:t>95行</a:t>
+              <a:t>~200行</a:t>
             </a:r>
             <a:endParaRPr lang="en-US" sz="900" dirty="0"/>
           </a:p>
@@ -22818,7 +22996,7 @@
                 <a:ea typeface="Calibri" pitchFamily="34" charset="-122"/>
                 <a:cs typeface="Calibri" pitchFamily="34" charset="-120"/>
               </a:rPr>
-              <a:t>113行</a:t>
+              <a:t>~230行</a:t>
             </a:r>
             <a:endParaRPr lang="en-US" sz="900" dirty="0"/>
           </a:p>
@@ -22857,7 +23035,7 @@
                 <a:ea typeface="Calibri" pitchFamily="34" charset="-122"/>
                 <a:cs typeface="Calibri" pitchFamily="34" charset="-120"/>
               </a:rPr>
-              <a:t>视图层（Tkinter）</a:t>
+              <a:t>视图层（Tkinter 9 帧）</a:t>
             </a:r>
             <a:endParaRPr lang="en-US" sz="1000" dirty="0"/>
           </a:p>
@@ -22955,7 +23133,7 @@
                 <a:ea typeface="Calibri" pitchFamily="34" charset="-122"/>
                 <a:cs typeface="Calibri" pitchFamily="34" charset="-120"/>
               </a:rPr>
-              <a:t>82行</a:t>
+              <a:t>~130行</a:t>
             </a:r>
             <a:endParaRPr lang="en-US" sz="900" dirty="0"/>
           </a:p>
@@ -23053,7 +23231,7 @@
                 <a:ea typeface="Consolas" pitchFamily="34" charset="-122"/>
                 <a:cs typeface="Consolas" pitchFamily="34" charset="-120"/>
               </a:rPr>
-              <a:t>data.json</a:t>
+              <a:t>lang.py</a:t>
             </a:r>
             <a:endParaRPr lang="en-US" sz="1000" dirty="0"/>
           </a:p>
@@ -23092,7 +23270,7 @@
                 <a:ea typeface="Calibri" pitchFamily="34" charset="-122"/>
                 <a:cs typeface="Calibri" pitchFamily="34" charset="-120"/>
               </a:rPr>
-              <a:t>6行</a:t>
+              <a:t>~130行</a:t>
             </a:r>
             <a:endParaRPr lang="en-US" sz="900" dirty="0"/>
           </a:p>
@@ -23131,7 +23309,7 @@
                 <a:ea typeface="Calibri" pitchFamily="34" charset="-122"/>
                 <a:cs typeface="Calibri" pitchFamily="34" charset="-120"/>
               </a:rPr>
-              <a:t>数据持久化</a:t>
+              <a:t>多语言中英文字典</a:t>
             </a:r>
             <a:endParaRPr lang="en-US" sz="1000" dirty="0"/>
           </a:p>
@@ -23190,7 +23368,7 @@
                 <a:ea typeface="Consolas" pitchFamily="34" charset="-122"/>
                 <a:cs typeface="Consolas" pitchFamily="34" charset="-120"/>
               </a:rPr>
-              <a:t>index.html</a:t>
+              <a:t>data.json</a:t>
             </a:r>
             <a:endParaRPr lang="en-US" sz="1000" dirty="0"/>
           </a:p>
@@ -23229,7 +23407,7 @@
                 <a:ea typeface="Calibri" pitchFamily="34" charset="-122"/>
                 <a:cs typeface="Calibri" pitchFamily="34" charset="-120"/>
               </a:rPr>
-              <a:t>~770行</a:t>
+              <a:t>多用户</a:t>
             </a:r>
             <a:endParaRPr lang="en-US" sz="900" dirty="0"/>
           </a:p>
@@ -23268,7 +23446,7 @@
                 <a:ea typeface="Calibri" pitchFamily="34" charset="-122"/>
                 <a:cs typeface="Calibri" pitchFamily="34" charset="-120"/>
               </a:rPr>
-              <a:t>Web 前端</a:t>
+              <a:t>JSON 数据持久化</a:t>
             </a:r>
             <a:endParaRPr lang="en-US" sz="1000" dirty="0"/>
           </a:p>
@@ -23327,7 +23505,7 @@
                 <a:ea typeface="Consolas" pitchFamily="34" charset="-122"/>
                 <a:cs typeface="Consolas" pitchFamily="34" charset="-120"/>
               </a:rPr>
-              <a:t>make-ppt.js</a:t>
+              <a:t>index.html</a:t>
             </a:r>
             <a:endParaRPr lang="en-US" sz="1000" dirty="0"/>
           </a:p>
@@ -23366,7 +23544,7 @@
                 <a:ea typeface="Calibri" pitchFamily="34" charset="-122"/>
                 <a:cs typeface="Calibri" pitchFamily="34" charset="-120"/>
               </a:rPr>
-              <a:t>JS 脚本</a:t>
+              <a:t>~1500行</a:t>
             </a:r>
             <a:endParaRPr lang="en-US" sz="900" dirty="0"/>
           </a:p>
@@ -23405,6 +23583,143 @@
                 <a:ea typeface="Calibri" pitchFamily="34" charset="-122"/>
                 <a:cs typeface="Calibri" pitchFamily="34" charset="-120"/>
               </a:rPr>
+              <a:t>Web 前端（全功能）</a:t>
+            </a:r>
+            <a:endParaRPr lang="en-US" sz="1000" dirty="0"/>
+          </a:p>
+        </p:txBody>
+      </p:sp>
+      <p:sp>
+        <p:nvSpPr>
+          <p:cNvPr id="32" name="Shape 30"/>
+          <p:cNvSpPr/>
+          <p:nvPr/>
+        </p:nvSpPr>
+        <p:spPr>
+          <a:xfrm>
+            <a:off x="548640" y="3584448"/>
+            <a:ext cx="4572000" cy="3658"/>
+          </a:xfrm>
+          <a:prstGeom prst="rect">
+            <a:avLst/>
+          </a:prstGeom>
+          <a:solidFill>
+            <a:srgbClr val="E5E7EB"/>
+          </a:solidFill>
+          <a:ln/>
+        </p:spPr>
+      </p:sp>
+      <p:sp>
+        <p:nvSpPr>
+          <p:cNvPr id="33" name="Text 31"/>
+          <p:cNvSpPr/>
+          <p:nvPr/>
+        </p:nvSpPr>
+        <p:spPr>
+          <a:xfrm>
+            <a:off x="548640" y="3611880"/>
+            <a:ext cx="1463040" cy="274320"/>
+          </a:xfrm>
+          <a:prstGeom prst="rect">
+            <a:avLst/>
+          </a:prstGeom>
+          <a:noFill/>
+          <a:ln/>
+        </p:spPr>
+        <p:txBody>
+          <a:bodyPr wrap="square" lIns="0" tIns="0" rIns="0" bIns="0" rtlCol="0" anchor="ctr"/>
+          <a:lstStyle/>
+          <a:p>
+            <a:pPr indent="0" marL="0">
+              <a:buNone/>
+            </a:pPr>
+            <a:r>
+              <a:rPr lang="en-US" sz="1000" dirty="0">
+                <a:solidFill>
+                  <a:srgbClr val="1A1F36"/>
+                </a:solidFill>
+                <a:latin typeface="Consolas" pitchFamily="34" charset="0"/>
+                <a:ea typeface="Consolas" pitchFamily="34" charset="-122"/>
+                <a:cs typeface="Consolas" pitchFamily="34" charset="-120"/>
+              </a:rPr>
+              <a:t>make-ppt.js</a:t>
+            </a:r>
+            <a:endParaRPr lang="en-US" sz="1000" dirty="0"/>
+          </a:p>
+        </p:txBody>
+      </p:sp>
+      <p:sp>
+        <p:nvSpPr>
+          <p:cNvPr id="34" name="Text 32"/>
+          <p:cNvSpPr/>
+          <p:nvPr/>
+        </p:nvSpPr>
+        <p:spPr>
+          <a:xfrm>
+            <a:off x="2103120" y="3611880"/>
+            <a:ext cx="640080" cy="274320"/>
+          </a:xfrm>
+          <a:prstGeom prst="rect">
+            <a:avLst/>
+          </a:prstGeom>
+          <a:noFill/>
+          <a:ln/>
+        </p:spPr>
+        <p:txBody>
+          <a:bodyPr wrap="square" lIns="0" tIns="0" rIns="0" bIns="0" rtlCol="0" anchor="ctr"/>
+          <a:lstStyle/>
+          <a:p>
+            <a:pPr indent="0" marL="0">
+              <a:buNone/>
+            </a:pPr>
+            <a:r>
+              <a:rPr lang="en-US" sz="900" dirty="0">
+                <a:solidFill>
+                  <a:srgbClr val="6B7280"/>
+                </a:solidFill>
+                <a:latin typeface="Calibri" pitchFamily="34" charset="0"/>
+                <a:ea typeface="Calibri" pitchFamily="34" charset="-122"/>
+                <a:cs typeface="Calibri" pitchFamily="34" charset="-120"/>
+              </a:rPr>
+              <a:t>JS 脚本</a:t>
+            </a:r>
+            <a:endParaRPr lang="en-US" sz="900" dirty="0"/>
+          </a:p>
+        </p:txBody>
+      </p:sp>
+      <p:sp>
+        <p:nvSpPr>
+          <p:cNvPr id="35" name="Text 33"/>
+          <p:cNvSpPr/>
+          <p:nvPr/>
+        </p:nvSpPr>
+        <p:spPr>
+          <a:xfrm>
+            <a:off x="2834640" y="3611880"/>
+            <a:ext cx="2286000" cy="274320"/>
+          </a:xfrm>
+          <a:prstGeom prst="rect">
+            <a:avLst/>
+          </a:prstGeom>
+          <a:noFill/>
+          <a:ln/>
+        </p:spPr>
+        <p:txBody>
+          <a:bodyPr wrap="square" lIns="0" tIns="0" rIns="0" bIns="0" rtlCol="0" anchor="ctr"/>
+          <a:lstStyle/>
+          <a:p>
+            <a:pPr indent="0" marL="0">
+              <a:buNone/>
+            </a:pPr>
+            <a:r>
+              <a:rPr lang="en-US" sz="1000" dirty="0">
+                <a:solidFill>
+                  <a:srgbClr val="2D2D2D"/>
+                </a:solidFill>
+                <a:latin typeface="Calibri" pitchFamily="34" charset="0"/>
+                <a:ea typeface="Calibri" pitchFamily="34" charset="-122"/>
+                <a:cs typeface="Calibri" pitchFamily="34" charset="-120"/>
+              </a:rPr>
               <a:t>PPT 自动生成</a:t>
             </a:r>
             <a:endParaRPr lang="en-US" sz="1000" dirty="0"/>
@@ -23413,7 +23728,7 @@
       </p:sp>
       <p:sp>
         <p:nvSpPr>
-          <p:cNvPr id="32" name="Text 30"/>
+          <p:cNvPr id="36" name="Text 34"/>
           <p:cNvSpPr/>
           <p:nvPr/>
         </p:nvSpPr>
@@ -23452,7 +23767,7 @@
       </p:sp>
       <p:sp>
         <p:nvSpPr>
-          <p:cNvPr id="33" name="Shape 31"/>
+          <p:cNvPr id="37" name="Shape 35"/>
           <p:cNvSpPr/>
           <p:nvPr/>
         </p:nvSpPr>
@@ -23472,7 +23787,7 @@
       </p:sp>
       <p:sp>
         <p:nvSpPr>
-          <p:cNvPr id="34" name="Text 32"/>
+          <p:cNvPr id="38" name="Text 36"/>
           <p:cNvSpPr/>
           <p:nvPr/>
         </p:nvSpPr>
@@ -23511,7 +23826,7 @@
       </p:sp>
       <p:sp>
         <p:nvSpPr>
-          <p:cNvPr id="35" name="Text 33"/>
+          <p:cNvPr id="39" name="Text 37"/>
           <p:cNvSpPr/>
           <p:nvPr/>
         </p:nvSpPr>
@@ -23550,7 +23865,7 @@
       </p:sp>
       <p:sp>
         <p:nvSpPr>
-          <p:cNvPr id="36" name="Shape 34"/>
+          <p:cNvPr id="40" name="Shape 38"/>
           <p:cNvSpPr/>
           <p:nvPr/>
         </p:nvSpPr>
@@ -23570,7 +23885,7 @@
       </p:sp>
       <p:sp>
         <p:nvSpPr>
-          <p:cNvPr id="37" name="Text 35"/>
+          <p:cNvPr id="41" name="Text 39"/>
           <p:cNvSpPr/>
           <p:nvPr/>
         </p:nvSpPr>
@@ -23609,7 +23924,7 @@
       </p:sp>
       <p:sp>
         <p:nvSpPr>
-          <p:cNvPr id="38" name="Text 36"/>
+          <p:cNvPr id="42" name="Text 40"/>
           <p:cNvSpPr/>
           <p:nvPr/>
         </p:nvSpPr>
@@ -23648,7 +23963,7 @@
       </p:sp>
       <p:sp>
         <p:nvSpPr>
-          <p:cNvPr id="39" name="Shape 37"/>
+          <p:cNvPr id="43" name="Shape 41"/>
           <p:cNvSpPr/>
           <p:nvPr/>
         </p:nvSpPr>
@@ -23668,7 +23983,7 @@
       </p:sp>
       <p:sp>
         <p:nvSpPr>
-          <p:cNvPr id="40" name="Text 38"/>
+          <p:cNvPr id="44" name="Text 42"/>
           <p:cNvSpPr/>
           <p:nvPr/>
         </p:nvSpPr>
@@ -23707,7 +24022,7 @@
       </p:sp>
       <p:sp>
         <p:nvSpPr>
-          <p:cNvPr id="41" name="Text 39"/>
+          <p:cNvPr id="45" name="Text 43"/>
           <p:cNvSpPr/>
           <p:nvPr/>
         </p:nvSpPr>
@@ -23746,7 +24061,7 @@
       </p:sp>
       <p:sp>
         <p:nvSpPr>
-          <p:cNvPr id="42" name="Shape 40"/>
+          <p:cNvPr id="46" name="Shape 44"/>
           <p:cNvSpPr/>
           <p:nvPr/>
         </p:nvSpPr>
@@ -23766,7 +24081,7 @@
       </p:sp>
       <p:sp>
         <p:nvSpPr>
-          <p:cNvPr id="43" name="Text 41"/>
+          <p:cNvPr id="47" name="Text 45"/>
           <p:cNvSpPr/>
           <p:nvPr/>
         </p:nvSpPr>
@@ -23805,7 +24120,7 @@
       </p:sp>
       <p:sp>
         <p:nvSpPr>
-          <p:cNvPr id="44" name="Text 42"/>
+          <p:cNvPr id="48" name="Text 46"/>
           <p:cNvSpPr/>
           <p:nvPr/>
         </p:nvSpPr>
@@ -23844,7 +24159,7 @@
       </p:sp>
       <p:sp>
         <p:nvSpPr>
-          <p:cNvPr id="45" name="Shape 43"/>
+          <p:cNvPr id="49" name="Shape 47"/>
           <p:cNvSpPr/>
           <p:nvPr/>
         </p:nvSpPr>
@@ -23864,7 +24179,7 @@
       </p:sp>
       <p:sp>
         <p:nvSpPr>
-          <p:cNvPr id="46" name="Text 44"/>
+          <p:cNvPr id="50" name="Text 48"/>
           <p:cNvSpPr/>
           <p:nvPr/>
         </p:nvSpPr>
@@ -23903,7 +24218,7 @@
       </p:sp>
       <p:sp>
         <p:nvSpPr>
-          <p:cNvPr id="47" name="Text 45"/>
+          <p:cNvPr id="51" name="Text 49"/>
           <p:cNvSpPr/>
           <p:nvPr/>
         </p:nvSpPr>
@@ -23942,7 +24257,7 @@
       </p:sp>
       <p:sp>
         <p:nvSpPr>
-          <p:cNvPr id="48" name="Text 46"/>
+          <p:cNvPr id="52" name="Text 50"/>
           <p:cNvSpPr/>
           <p:nvPr/>
         </p:nvSpPr>
@@ -23981,7 +24296,7 @@
       </p:sp>
       <p:sp>
         <p:nvSpPr>
-          <p:cNvPr id="49" name="Text 47"/>
+          <p:cNvPr id="53" name="Text 51"/>
           <p:cNvSpPr/>
           <p:nvPr/>
         </p:nvSpPr>
@@ -24029,6 +24344,1422 @@
 <file path=ppt/slides/slide25.xml><?xml version="1.0" encoding="utf-8"?>
 <p:sld xmlns:a="http://schemas.openxmlformats.org/drawingml/2006/main" xmlns:r="http://schemas.openxmlformats.org/officeDocument/2006/relationships" xmlns:p="http://schemas.openxmlformats.org/presentationml/2006/main">
   <p:cSld name="Slide 25">
+    <p:bg>
+      <p:bgPr>
+        <a:solidFill>
+          <a:srgbClr val="FFFFFF"/>
+        </a:solidFill>
+      </p:bgPr>
+    </p:bg>
+    <p:spTree>
+      <p:nvGrpSpPr>
+        <p:cNvPr id="1" name=""/>
+        <p:cNvGrpSpPr/>
+        <p:nvPr/>
+      </p:nvGrpSpPr>
+      <p:grpSpPr>
+        <a:xfrm>
+          <a:off x="0" y="0"/>
+          <a:ext cx="0" cy="0"/>
+          <a:chOff x="0" y="0"/>
+          <a:chExt cx="0" cy="0"/>
+        </a:xfrm>
+      </p:grpSpPr>
+      <p:sp>
+        <p:nvSpPr>
+          <p:cNvPr id="2" name="Shape 0"/>
+          <p:cNvSpPr/>
+          <p:nvPr/>
+        </p:nvSpPr>
+        <p:spPr>
+          <a:xfrm>
+            <a:off x="548640" y="411480"/>
+            <a:ext cx="64008" cy="502920"/>
+          </a:xfrm>
+          <a:prstGeom prst="rect">
+            <a:avLst/>
+          </a:prstGeom>
+          <a:solidFill>
+            <a:srgbClr val="D4A574"/>
+          </a:solidFill>
+          <a:ln/>
+        </p:spPr>
+      </p:sp>
+      <p:sp>
+        <p:nvSpPr>
+          <p:cNvPr id="3" name="Text 1"/>
+          <p:cNvSpPr/>
+          <p:nvPr/>
+        </p:nvSpPr>
+        <p:spPr>
+          <a:xfrm>
+            <a:off x="822960" y="365760"/>
+            <a:ext cx="7772400" cy="594360"/>
+          </a:xfrm>
+          <a:prstGeom prst="rect">
+            <a:avLst/>
+          </a:prstGeom>
+          <a:noFill/>
+          <a:ln/>
+        </p:spPr>
+        <p:txBody>
+          <a:bodyPr wrap="square" lIns="0" tIns="0" rIns="0" bIns="0" rtlCol="0" anchor="ctr"/>
+          <a:lstStyle/>
+          <a:p>
+            <a:pPr indent="0" marL="0">
+              <a:buNone/>
+            </a:pPr>
+            <a:r>
+              <a:rPr lang="en-US" sz="2800" b="1" dirty="0">
+                <a:solidFill>
+                  <a:srgbClr val="1A1F36"/>
+                </a:solidFill>
+                <a:latin typeface="Georgia" pitchFamily="34" charset="0"/>
+                <a:ea typeface="Georgia" pitchFamily="34" charset="-122"/>
+                <a:cs typeface="Georgia" pitchFamily="34" charset="-120"/>
+              </a:rPr>
+              <a:t>新增功能：转账 · 注册 · 登录锁定</a:t>
+            </a:r>
+            <a:endParaRPr lang="en-US" sz="2800" dirty="0"/>
+          </a:p>
+        </p:txBody>
+      </p:sp>
+      <p:sp>
+        <p:nvSpPr>
+          <p:cNvPr id="4" name="Shape 2"/>
+          <p:cNvSpPr/>
+          <p:nvPr/>
+        </p:nvSpPr>
+        <p:spPr>
+          <a:xfrm>
+            <a:off x="548640" y="1097280"/>
+            <a:ext cx="3840480" cy="1463040"/>
+          </a:xfrm>
+          <a:prstGeom prst="rect">
+            <a:avLst/>
+          </a:prstGeom>
+          <a:solidFill>
+            <a:srgbClr val="FFFFFF"/>
+          </a:solidFill>
+          <a:ln/>
+          <a:effectLst>
+            <a:outerShdw sx="100000" sy="100000" kx="0" ky="0" algn="bl" rotWithShape="0" blurRad="76200" dist="25400" dir="8100000">
+              <a:srgbClr val="000000">
+                <a:alpha val="8000"/>
+              </a:srgbClr>
+            </a:outerShdw>
+          </a:effectLst>
+        </p:spPr>
+      </p:sp>
+      <p:sp>
+        <p:nvSpPr>
+          <p:cNvPr id="5" name="Shape 3"/>
+          <p:cNvSpPr/>
+          <p:nvPr/>
+        </p:nvSpPr>
+        <p:spPr>
+          <a:xfrm>
+            <a:off x="548640" y="1097280"/>
+            <a:ext cx="54864" cy="1463040"/>
+          </a:xfrm>
+          <a:prstGeom prst="rect">
+            <a:avLst/>
+          </a:prstGeom>
+          <a:solidFill>
+            <a:srgbClr val="10B981"/>
+          </a:solidFill>
+          <a:ln/>
+        </p:spPr>
+      </p:sp>
+      <p:sp>
+        <p:nvSpPr>
+          <p:cNvPr id="6" name="Text 4"/>
+          <p:cNvSpPr/>
+          <p:nvPr/>
+        </p:nvSpPr>
+        <p:spPr>
+          <a:xfrm>
+            <a:off x="822960" y="1188720"/>
+            <a:ext cx="3474720" cy="320040"/>
+          </a:xfrm>
+          <a:prstGeom prst="rect">
+            <a:avLst/>
+          </a:prstGeom>
+          <a:noFill/>
+          <a:ln/>
+        </p:spPr>
+        <p:txBody>
+          <a:bodyPr wrap="square" lIns="0" tIns="0" rIns="0" bIns="0" rtlCol="0" anchor="ctr"/>
+          <a:lstStyle/>
+          <a:p>
+            <a:pPr indent="0" marL="0">
+              <a:buNone/>
+            </a:pPr>
+            <a:r>
+              <a:rPr lang="en-US" sz="1600" b="1" dirty="0">
+                <a:solidFill>
+                  <a:srgbClr val="1A1F36"/>
+                </a:solidFill>
+                <a:latin typeface="Georgia" pitchFamily="34" charset="0"/>
+                <a:ea typeface="Georgia" pitchFamily="34" charset="-122"/>
+                <a:cs typeface="Georgia" pitchFamily="34" charset="-120"/>
+              </a:rPr>
+              <a:t>跨账户转账</a:t>
+            </a:r>
+            <a:endParaRPr lang="en-US" sz="1600" dirty="0"/>
+          </a:p>
+        </p:txBody>
+      </p:sp>
+      <p:sp>
+        <p:nvSpPr>
+          <p:cNvPr id="7" name="Text 5"/>
+          <p:cNvSpPr/>
+          <p:nvPr/>
+        </p:nvSpPr>
+        <p:spPr>
+          <a:xfrm>
+            <a:off x="822960" y="1554480"/>
+            <a:ext cx="3474720" cy="914400"/>
+          </a:xfrm>
+          <a:prstGeom prst="rect">
+            <a:avLst/>
+          </a:prstGeom>
+          <a:noFill/>
+          <a:ln/>
+        </p:spPr>
+        <p:txBody>
+          <a:bodyPr wrap="square" lIns="0" tIns="0" rIns="0" bIns="0" rtlCol="0" anchor="ctr"/>
+          <a:lstStyle/>
+          <a:p>
+            <a:pPr indent="0" marL="0">
+              <a:lnSpc>
+                <a:spcPts val="1800"/>
+              </a:lnSpc>
+              <a:buNone/>
+            </a:pPr>
+            <a:r>
+              <a:rPr lang="en-US" sz="1100" dirty="0">
+                <a:solidFill>
+                  <a:srgbClr val="6B7280"/>
+                </a:solidFill>
+                <a:latin typeface="Calibri" pitchFamily="34" charset="0"/>
+                <a:ea typeface="Calibri" pitchFamily="34" charset="-122"/>
+                <a:cs typeface="Calibri" pitchFamily="34" charset="-120"/>
+              </a:rPr>
+              <a:t>支持多用户，data.json 改为用户列表
+</a:t>
+            </a:r>
+            <a:pPr indent="0" marL="0">
+              <a:lnSpc>
+                <a:spcPts val="1800"/>
+              </a:lnSpc>
+              <a:buNone/>
+            </a:pPr>
+            <a:r>
+              <a:rPr lang="en-US" sz="1100" dirty="0">
+                <a:solidFill>
+                  <a:srgbClr val="2D2D2D"/>
+                </a:solidFill>
+                <a:latin typeface="Calibri" pitchFamily="34" charset="0"/>
+                <a:ea typeface="Calibri" pitchFamily="34" charset="-122"/>
+                <a:cs typeface="Calibri" pitchFamily="34" charset="-120"/>
+              </a:rPr>
+              <a:t>✦ 金额必须为 100 的倍数
+</a:t>
+            </a:r>
+            <a:pPr indent="0" marL="0">
+              <a:lnSpc>
+                <a:spcPts val="1800"/>
+              </a:lnSpc>
+              <a:buNone/>
+            </a:pPr>
+            <a:r>
+              <a:rPr lang="en-US" sz="1100" dirty="0">
+                <a:solidFill>
+                  <a:srgbClr val="2D2D2D"/>
+                </a:solidFill>
+                <a:latin typeface="Calibri" pitchFamily="34" charset="0"/>
+                <a:ea typeface="Calibri" pitchFamily="34" charset="-122"/>
+                <a:cs typeface="Calibri" pitchFamily="34" charset="-120"/>
+              </a:rPr>
+              <a:t>✦ 单笔 ≤ 5000，不可透支
+</a:t>
+            </a:r>
+            <a:pPr indent="0" marL="0">
+              <a:lnSpc>
+                <a:spcPts val="1800"/>
+              </a:lnSpc>
+              <a:buNone/>
+            </a:pPr>
+            <a:r>
+              <a:rPr lang="en-US" sz="1100" dirty="0">
+                <a:solidFill>
+                  <a:srgbClr val="2D2D2D"/>
+                </a:solidFill>
+                <a:latin typeface="Calibri" pitchFamily="34" charset="0"/>
+                <a:ea typeface="Calibri" pitchFamily="34" charset="-122"/>
+                <a:cs typeface="Calibri" pitchFamily="34" charset="-120"/>
+              </a:rPr>
+              <a:t>✦ 不可转账给自己，目标账号必须存在</a:t>
+            </a:r>
+            <a:endParaRPr lang="en-US" sz="1100" dirty="0"/>
+          </a:p>
+        </p:txBody>
+      </p:sp>
+      <p:sp>
+        <p:nvSpPr>
+          <p:cNvPr id="8" name="Shape 6"/>
+          <p:cNvSpPr/>
+          <p:nvPr/>
+        </p:nvSpPr>
+        <p:spPr>
+          <a:xfrm>
+            <a:off x="4754880" y="1097280"/>
+            <a:ext cx="3840480" cy="1463040"/>
+          </a:xfrm>
+          <a:prstGeom prst="rect">
+            <a:avLst/>
+          </a:prstGeom>
+          <a:solidFill>
+            <a:srgbClr val="FFFFFF"/>
+          </a:solidFill>
+          <a:ln/>
+          <a:effectLst>
+            <a:outerShdw sx="100000" sy="100000" kx="0" ky="0" algn="bl" rotWithShape="0" blurRad="76200" dist="25400" dir="8100000">
+              <a:srgbClr val="000000">
+                <a:alpha val="8000"/>
+              </a:srgbClr>
+            </a:outerShdw>
+          </a:effectLst>
+        </p:spPr>
+      </p:sp>
+      <p:sp>
+        <p:nvSpPr>
+          <p:cNvPr id="9" name="Shape 7"/>
+          <p:cNvSpPr/>
+          <p:nvPr/>
+        </p:nvSpPr>
+        <p:spPr>
+          <a:xfrm>
+            <a:off x="4754880" y="1097280"/>
+            <a:ext cx="54864" cy="1463040"/>
+          </a:xfrm>
+          <a:prstGeom prst="rect">
+            <a:avLst/>
+          </a:prstGeom>
+          <a:solidFill>
+            <a:srgbClr val="EF4444"/>
+          </a:solidFill>
+          <a:ln/>
+        </p:spPr>
+      </p:sp>
+      <p:sp>
+        <p:nvSpPr>
+          <p:cNvPr id="10" name="Text 8"/>
+          <p:cNvSpPr/>
+          <p:nvPr/>
+        </p:nvSpPr>
+        <p:spPr>
+          <a:xfrm>
+            <a:off x="5029200" y="1188720"/>
+            <a:ext cx="3474720" cy="320040"/>
+          </a:xfrm>
+          <a:prstGeom prst="rect">
+            <a:avLst/>
+          </a:prstGeom>
+          <a:noFill/>
+          <a:ln/>
+        </p:spPr>
+        <p:txBody>
+          <a:bodyPr wrap="square" lIns="0" tIns="0" rIns="0" bIns="0" rtlCol="0" anchor="ctr"/>
+          <a:lstStyle/>
+          <a:p>
+            <a:pPr indent="0" marL="0">
+              <a:buNone/>
+            </a:pPr>
+            <a:r>
+              <a:rPr lang="en-US" sz="1600" b="1" dirty="0">
+                <a:solidFill>
+                  <a:srgbClr val="1A1F36"/>
+                </a:solidFill>
+                <a:latin typeface="Georgia" pitchFamily="34" charset="0"/>
+                <a:ea typeface="Georgia" pitchFamily="34" charset="-122"/>
+                <a:cs typeface="Georgia" pitchFamily="34" charset="-120"/>
+              </a:rPr>
+              <a:t>注册 &amp; 登录锁定</a:t>
+            </a:r>
+            <a:endParaRPr lang="en-US" sz="1600" dirty="0"/>
+          </a:p>
+        </p:txBody>
+      </p:sp>
+      <p:sp>
+        <p:nvSpPr>
+          <p:cNvPr id="11" name="Text 9"/>
+          <p:cNvSpPr/>
+          <p:nvPr/>
+        </p:nvSpPr>
+        <p:spPr>
+          <a:xfrm>
+            <a:off x="5029200" y="1554480"/>
+            <a:ext cx="3474720" cy="914400"/>
+          </a:xfrm>
+          <a:prstGeom prst="rect">
+            <a:avLst/>
+          </a:prstGeom>
+          <a:noFill/>
+          <a:ln/>
+        </p:spPr>
+        <p:txBody>
+          <a:bodyPr wrap="square" lIns="0" tIns="0" rIns="0" bIns="0" rtlCol="0" anchor="ctr"/>
+          <a:lstStyle/>
+          <a:p>
+            <a:pPr indent="0" marL="0">
+              <a:lnSpc>
+                <a:spcPts val="1800"/>
+              </a:lnSpc>
+              <a:buNone/>
+            </a:pPr>
+            <a:r>
+              <a:rPr lang="en-US" sz="1100" dirty="0">
+                <a:solidFill>
+                  <a:srgbClr val="2D2D2D"/>
+                </a:solidFill>
+                <a:latin typeface="Calibri" pitchFamily="34" charset="0"/>
+                <a:ea typeface="Calibri" pitchFamily="34" charset="-122"/>
+                <a:cs typeface="Calibri" pitchFamily="34" charset="-120"/>
+              </a:rPr>
+              <a:t>注册新账户：账号 ≥ 4 位字母数字
+</a:t>
+            </a:r>
+            <a:pPr indent="0" marL="0">
+              <a:lnSpc>
+                <a:spcPts val="1800"/>
+              </a:lnSpc>
+              <a:buNone/>
+            </a:pPr>
+            <a:r>
+              <a:rPr lang="en-US" sz="1100" dirty="0">
+                <a:solidFill>
+                  <a:srgbClr val="2D2D2D"/>
+                </a:solidFill>
+                <a:latin typeface="Calibri" pitchFamily="34" charset="0"/>
+                <a:ea typeface="Calibri" pitchFamily="34" charset="-122"/>
+                <a:cs typeface="Calibri" pitchFamily="34" charset="-120"/>
+              </a:rPr>
+              <a:t>密码 ≥ 6 位，注册成功自动登录
+</a:t>
+            </a:r>
+            <a:pPr indent="0" marL="0">
+              <a:lnSpc>
+                <a:spcPts val="1800"/>
+              </a:lnSpc>
+              <a:buNone/>
+            </a:pPr>
+            <a:r>
+              <a:rPr lang="en-US" sz="1100" dirty="0">
+                <a:solidFill>
+                  <a:srgbClr val="2D2D2D"/>
+                </a:solidFill>
+                <a:latin typeface="Calibri" pitchFamily="34" charset="0"/>
+                <a:ea typeface="Calibri" pitchFamily="34" charset="-122"/>
+                <a:cs typeface="Calibri" pitchFamily="34" charset="-120"/>
+              </a:rPr>
+              <a:t>登录锁定：连续 3 次错误
+</a:t>
+            </a:r>
+            <a:pPr indent="0" marL="0">
+              <a:lnSpc>
+                <a:spcPts val="1800"/>
+              </a:lnSpc>
+              <a:buNone/>
+            </a:pPr>
+            <a:r>
+              <a:rPr lang="en-US" sz="1100" dirty="0">
+                <a:solidFill>
+                  <a:srgbClr val="2D2D2D"/>
+                </a:solidFill>
+                <a:latin typeface="Calibri" pitchFamily="34" charset="0"/>
+                <a:ea typeface="Calibri" pitchFamily="34" charset="-122"/>
+                <a:cs typeface="Calibri" pitchFamily="34" charset="-120"/>
+              </a:rPr>
+              <a:t>锁定 3 分钟，防止暴力破解</a:t>
+            </a:r>
+            <a:endParaRPr lang="en-US" sz="1100" dirty="0"/>
+          </a:p>
+        </p:txBody>
+      </p:sp>
+      <p:sp>
+        <p:nvSpPr>
+          <p:cNvPr id="12" name="Shape 10"/>
+          <p:cNvSpPr/>
+          <p:nvPr/>
+        </p:nvSpPr>
+        <p:spPr>
+          <a:xfrm>
+            <a:off x="548640" y="2834640"/>
+            <a:ext cx="8046720" cy="640080"/>
+          </a:xfrm>
+          <a:prstGeom prst="rect">
+            <a:avLst/>
+          </a:prstGeom>
+          <a:solidFill>
+            <a:srgbClr val="FFFFFF"/>
+          </a:solidFill>
+          <a:ln/>
+          <a:effectLst>
+            <a:outerShdw sx="100000" sy="100000" kx="0" ky="0" algn="bl" rotWithShape="0" blurRad="76200" dist="25400" dir="8100000">
+              <a:srgbClr val="000000">
+                <a:alpha val="8000"/>
+              </a:srgbClr>
+            </a:outerShdw>
+          </a:effectLst>
+        </p:spPr>
+      </p:sp>
+      <p:sp>
+        <p:nvSpPr>
+          <p:cNvPr id="13" name="Shape 11"/>
+          <p:cNvSpPr/>
+          <p:nvPr/>
+        </p:nvSpPr>
+        <p:spPr>
+          <a:xfrm>
+            <a:off x="548640" y="2834640"/>
+            <a:ext cx="54864" cy="640080"/>
+          </a:xfrm>
+          <a:prstGeom prst="rect">
+            <a:avLst/>
+          </a:prstGeom>
+          <a:solidFill>
+            <a:srgbClr val="D4A574"/>
+          </a:solidFill>
+          <a:ln/>
+        </p:spPr>
+      </p:sp>
+      <p:sp>
+        <p:nvSpPr>
+          <p:cNvPr id="14" name="Text 12"/>
+          <p:cNvSpPr/>
+          <p:nvPr/>
+        </p:nvSpPr>
+        <p:spPr>
+          <a:xfrm>
+            <a:off x="822960" y="2880360"/>
+            <a:ext cx="7680960" cy="548640"/>
+          </a:xfrm>
+          <a:prstGeom prst="rect">
+            <a:avLst/>
+          </a:prstGeom>
+          <a:noFill/>
+          <a:ln/>
+        </p:spPr>
+        <p:txBody>
+          <a:bodyPr wrap="square" lIns="0" tIns="0" rIns="0" bIns="0" rtlCol="0" anchor="ctr"/>
+          <a:lstStyle/>
+          <a:p>
+            <a:pPr indent="0" marL="0">
+              <a:buNone/>
+            </a:pPr>
+            <a:r>
+              <a:rPr lang="en-US" sz="1100" dirty="0">
+                <a:solidFill>
+                  <a:srgbClr val="2D2D2D"/>
+                </a:solidFill>
+                <a:latin typeface="Calibri" pitchFamily="34" charset="0"/>
+                <a:ea typeface="Calibri" pitchFamily="34" charset="-122"/>
+                <a:cs typeface="Calibri" pitchFamily="34" charset="-120"/>
+              </a:rPr>
+              <a:t>交易记录：每笔存款、取款、转账自动记录，支持按时间倒序查询。所有业务规则均在 Model 层统一实现。</a:t>
+            </a:r>
+            <a:endParaRPr lang="en-US" sz="1100" dirty="0"/>
+          </a:p>
+        </p:txBody>
+      </p:sp>
+      <p:sp>
+        <p:nvSpPr>
+          <p:cNvPr id="15" name="Shape 13"/>
+          <p:cNvSpPr/>
+          <p:nvPr/>
+        </p:nvSpPr>
+        <p:spPr>
+          <a:xfrm>
+            <a:off x="548640" y="3749040"/>
+            <a:ext cx="8046720" cy="731520"/>
+          </a:xfrm>
+          <a:prstGeom prst="rect">
+            <a:avLst/>
+          </a:prstGeom>
+          <a:solidFill>
+            <a:srgbClr val="F8F9FA"/>
+          </a:solidFill>
+          <a:ln/>
+        </p:spPr>
+      </p:sp>
+      <p:sp>
+        <p:nvSpPr>
+          <p:cNvPr id="16" name="Text 14"/>
+          <p:cNvSpPr/>
+          <p:nvPr/>
+        </p:nvSpPr>
+        <p:spPr>
+          <a:xfrm>
+            <a:off x="731520" y="3794760"/>
+            <a:ext cx="7772400" cy="640080"/>
+          </a:xfrm>
+          <a:prstGeom prst="rect">
+            <a:avLst/>
+          </a:prstGeom>
+          <a:noFill/>
+          <a:ln/>
+        </p:spPr>
+        <p:txBody>
+          <a:bodyPr wrap="square" lIns="0" tIns="0" rIns="0" bIns="0" rtlCol="0" anchor="ctr"/>
+          <a:lstStyle/>
+          <a:p>
+            <a:pPr indent="0" marL="0">
+              <a:buNone/>
+            </a:pPr>
+            <a:r>
+              <a:rPr lang="en-US" sz="1000" dirty="0">
+                <a:solidFill>
+                  <a:srgbClr val="2D2D2D"/>
+                </a:solidFill>
+                <a:latin typeface="Consolas" pitchFamily="34" charset="0"/>
+                <a:ea typeface="Consolas" pitchFamily="34" charset="-122"/>
+                <a:cs typeface="Consolas" pitchFamily="34" charset="-120"/>
+              </a:rPr>
+              <a:t>def transfer(self, target, amount):</a:t>
+            </a:r>
+            <a:endParaRPr lang="en-US" sz="1000" dirty="0"/>
+          </a:p>
+          <a:p>
+            <a:pPr indent="0" marL="0">
+              <a:buNone/>
+            </a:pPr>
+            <a:r>
+              <a:rPr lang="en-US" sz="1000" dirty="0">
+                <a:solidFill>
+                  <a:srgbClr val="2D2D2D"/>
+                </a:solidFill>
+                <a:latin typeface="Consolas" pitchFamily="34" charset="0"/>
+                <a:ea typeface="Consolas" pitchFamily="34" charset="-122"/>
+                <a:cs typeface="Consolas" pitchFamily="34" charset="-120"/>
+              </a:rPr>
+              <a:t>    if target == self.account: return False, '不能转账给自己'</a:t>
+            </a:r>
+            <a:endParaRPr lang="en-US" sz="1000" dirty="0"/>
+          </a:p>
+          <a:p>
+            <a:pPr indent="0" marL="0">
+              <a:buNone/>
+            </a:pPr>
+            <a:r>
+              <a:rPr lang="en-US" sz="1000" dirty="0">
+                <a:solidFill>
+                  <a:srgbClr val="2D2D2D"/>
+                </a:solidFill>
+                <a:latin typeface="Consolas" pitchFamily="34" charset="0"/>
+                <a:ea typeface="Consolas" pitchFamily="34" charset="-122"/>
+                <a:cs typeface="Consolas" pitchFamily="34" charset="-120"/>
+              </a:rPr>
+              <a:t>    target_user = self._find_user(target)</a:t>
+            </a:r>
+            <a:endParaRPr lang="en-US" sz="1000" dirty="0"/>
+          </a:p>
+          <a:p>
+            <a:pPr indent="0" marL="0">
+              <a:buNone/>
+            </a:pPr>
+            <a:r>
+              <a:rPr lang="en-US" sz="1000" dirty="0">
+                <a:solidFill>
+                  <a:srgbClr val="2D2D2D"/>
+                </a:solidFill>
+                <a:latin typeface="Consolas" pitchFamily="34" charset="0"/>
+                <a:ea typeface="Consolas" pitchFamily="34" charset="-122"/>
+                <a:cs typeface="Consolas" pitchFamily="34" charset="-120"/>
+              </a:rPr>
+              <a:t>    if not target_user: return False, '目标账号不存在'</a:t>
+            </a:r>
+            <a:endParaRPr lang="en-US" sz="1000" dirty="0"/>
+          </a:p>
+        </p:txBody>
+      </p:sp>
+      <p:sp>
+        <p:nvSpPr>
+          <p:cNvPr id="17" name="Shape 15"/>
+          <p:cNvSpPr/>
+          <p:nvPr/>
+        </p:nvSpPr>
+        <p:spPr>
+          <a:xfrm>
+            <a:off x="0" y="4572000"/>
+            <a:ext cx="9144000" cy="548640"/>
+          </a:xfrm>
+          <a:prstGeom prst="rect">
+            <a:avLst/>
+          </a:prstGeom>
+          <a:solidFill>
+            <a:srgbClr val="1A1F36"/>
+          </a:solidFill>
+          <a:ln/>
+        </p:spPr>
+      </p:sp>
+      <p:sp>
+        <p:nvSpPr>
+          <p:cNvPr id="18" name="Text 16"/>
+          <p:cNvSpPr/>
+          <p:nvPr/>
+        </p:nvSpPr>
+        <p:spPr>
+          <a:xfrm>
+            <a:off x="457200" y="4617720"/>
+            <a:ext cx="8229600" cy="457200"/>
+          </a:xfrm>
+          <a:prstGeom prst="rect">
+            <a:avLst/>
+          </a:prstGeom>
+          <a:noFill/>
+          <a:ln/>
+        </p:spPr>
+        <p:txBody>
+          <a:bodyPr wrap="square" lIns="0" tIns="0" rIns="0" bIns="0" rtlCol="0" anchor="ctr"/>
+          <a:lstStyle/>
+          <a:p>
+            <a:pPr algn="ctr" indent="0" marL="0">
+              <a:buNone/>
+            </a:pPr>
+            <a:r>
+              <a:rPr lang="en-US" sz="1200" dirty="0">
+                <a:solidFill>
+                  <a:srgbClr val="F5F0EB"/>
+                </a:solidFill>
+                <a:latin typeface="Calibri" pitchFamily="34" charset="0"/>
+                <a:ea typeface="Calibri" pitchFamily="34" charset="-122"/>
+                <a:cs typeface="Calibri" pitchFamily="34" charset="-120"/>
+              </a:rPr>
+              <a:t>ATM 柜员机模拟程序 · 湘潭大学 计算机·网络空间安全学院</a:t>
+            </a:r>
+            <a:endParaRPr lang="en-US" sz="1200" dirty="0"/>
+          </a:p>
+        </p:txBody>
+      </p:sp>
+    </p:spTree>
+  </p:cSld>
+  <p:clrMapOvr>
+    <a:masterClrMapping/>
+  </p:clrMapOvr>
+</p:sld>
+</file>
+
+<file path=ppt/slides/slide26.xml><?xml version="1.0" encoding="utf-8"?>
+<p:sld xmlns:a="http://schemas.openxmlformats.org/drawingml/2006/main" xmlns:r="http://schemas.openxmlformats.org/officeDocument/2006/relationships" xmlns:p="http://schemas.openxmlformats.org/presentationml/2006/main">
+  <p:cSld name="Slide 26">
+    <p:bg>
+      <p:bgPr>
+        <a:solidFill>
+          <a:srgbClr val="FFFFFF"/>
+        </a:solidFill>
+      </p:bgPr>
+    </p:bg>
+    <p:spTree>
+      <p:nvGrpSpPr>
+        <p:cNvPr id="1" name=""/>
+        <p:cNvGrpSpPr/>
+        <p:nvPr/>
+      </p:nvGrpSpPr>
+      <p:grpSpPr>
+        <a:xfrm>
+          <a:off x="0" y="0"/>
+          <a:ext cx="0" cy="0"/>
+          <a:chOff x="0" y="0"/>
+          <a:chExt cx="0" cy="0"/>
+        </a:xfrm>
+      </p:grpSpPr>
+      <p:sp>
+        <p:nvSpPr>
+          <p:cNvPr id="2" name="Shape 0"/>
+          <p:cNvSpPr/>
+          <p:nvPr/>
+        </p:nvSpPr>
+        <p:spPr>
+          <a:xfrm>
+            <a:off x="548640" y="411480"/>
+            <a:ext cx="64008" cy="502920"/>
+          </a:xfrm>
+          <a:prstGeom prst="rect">
+            <a:avLst/>
+          </a:prstGeom>
+          <a:solidFill>
+            <a:srgbClr val="D4A574"/>
+          </a:solidFill>
+          <a:ln/>
+        </p:spPr>
+      </p:sp>
+      <p:sp>
+        <p:nvSpPr>
+          <p:cNvPr id="3" name="Text 1"/>
+          <p:cNvSpPr/>
+          <p:nvPr/>
+        </p:nvSpPr>
+        <p:spPr>
+          <a:xfrm>
+            <a:off x="822960" y="365760"/>
+            <a:ext cx="7772400" cy="594360"/>
+          </a:xfrm>
+          <a:prstGeom prst="rect">
+            <a:avLst/>
+          </a:prstGeom>
+          <a:noFill/>
+          <a:ln/>
+        </p:spPr>
+        <p:txBody>
+          <a:bodyPr wrap="square" lIns="0" tIns="0" rIns="0" bIns="0" rtlCol="0" anchor="ctr"/>
+          <a:lstStyle/>
+          <a:p>
+            <a:pPr indent="0" marL="0">
+              <a:buNone/>
+            </a:pPr>
+            <a:r>
+              <a:rPr lang="en-US" sz="2800" b="1" dirty="0">
+                <a:solidFill>
+                  <a:srgbClr val="1A1F36"/>
+                </a:solidFill>
+                <a:latin typeface="Georgia" pitchFamily="34" charset="0"/>
+                <a:ea typeface="Georgia" pitchFamily="34" charset="-122"/>
+                <a:cs typeface="Georgia" pitchFamily="34" charset="-120"/>
+              </a:rPr>
+              <a:t>多语言支持 · 架构扩展</a:t>
+            </a:r>
+            <a:endParaRPr lang="en-US" sz="2800" dirty="0"/>
+          </a:p>
+        </p:txBody>
+      </p:sp>
+      <p:sp>
+        <p:nvSpPr>
+          <p:cNvPr id="4" name="Shape 2"/>
+          <p:cNvSpPr/>
+          <p:nvPr/>
+        </p:nvSpPr>
+        <p:spPr>
+          <a:xfrm>
+            <a:off x="548640" y="1097280"/>
+            <a:ext cx="3840480" cy="2011680"/>
+          </a:xfrm>
+          <a:prstGeom prst="rect">
+            <a:avLst/>
+          </a:prstGeom>
+          <a:solidFill>
+            <a:srgbClr val="FFFFFF"/>
+          </a:solidFill>
+          <a:ln/>
+          <a:effectLst>
+            <a:outerShdw sx="100000" sy="100000" kx="0" ky="0" algn="bl" rotWithShape="0" blurRad="76200" dist="25400" dir="8100000">
+              <a:srgbClr val="000000">
+                <a:alpha val="8000"/>
+              </a:srgbClr>
+            </a:outerShdw>
+          </a:effectLst>
+        </p:spPr>
+      </p:sp>
+      <p:sp>
+        <p:nvSpPr>
+          <p:cNvPr id="5" name="Shape 3"/>
+          <p:cNvSpPr/>
+          <p:nvPr/>
+        </p:nvSpPr>
+        <p:spPr>
+          <a:xfrm>
+            <a:off x="548640" y="1097280"/>
+            <a:ext cx="54864" cy="2011680"/>
+          </a:xfrm>
+          <a:prstGeom prst="rect">
+            <a:avLst/>
+          </a:prstGeom>
+          <a:solidFill>
+            <a:srgbClr val="1A73E8"/>
+          </a:solidFill>
+          <a:ln/>
+        </p:spPr>
+      </p:sp>
+      <p:sp>
+        <p:nvSpPr>
+          <p:cNvPr id="6" name="Text 4"/>
+          <p:cNvSpPr/>
+          <p:nvPr/>
+        </p:nvSpPr>
+        <p:spPr>
+          <a:xfrm>
+            <a:off x="822960" y="1188720"/>
+            <a:ext cx="3474720" cy="320040"/>
+          </a:xfrm>
+          <a:prstGeom prst="rect">
+            <a:avLst/>
+          </a:prstGeom>
+          <a:noFill/>
+          <a:ln/>
+        </p:spPr>
+        <p:txBody>
+          <a:bodyPr wrap="square" lIns="0" tIns="0" rIns="0" bIns="0" rtlCol="0" anchor="ctr"/>
+          <a:lstStyle/>
+          <a:p>
+            <a:pPr indent="0" marL="0">
+              <a:buNone/>
+            </a:pPr>
+            <a:r>
+              <a:rPr lang="en-US" sz="1600" b="1" dirty="0">
+                <a:solidFill>
+                  <a:srgbClr val="1A1F36"/>
+                </a:solidFill>
+                <a:latin typeface="Georgia" pitchFamily="34" charset="0"/>
+                <a:ea typeface="Georgia" pitchFamily="34" charset="-122"/>
+                <a:cs typeface="Georgia" pitchFamily="34" charset="-120"/>
+              </a:rPr>
+              <a:t>国际化（i18n）</a:t>
+            </a:r>
+            <a:endParaRPr lang="en-US" sz="1600" dirty="0"/>
+          </a:p>
+        </p:txBody>
+      </p:sp>
+      <p:sp>
+        <p:nvSpPr>
+          <p:cNvPr id="7" name="Text 5"/>
+          <p:cNvSpPr/>
+          <p:nvPr/>
+        </p:nvSpPr>
+        <p:spPr>
+          <a:xfrm>
+            <a:off x="822960" y="1600200"/>
+            <a:ext cx="3474720" cy="1371600"/>
+          </a:xfrm>
+          <a:prstGeom prst="rect">
+            <a:avLst/>
+          </a:prstGeom>
+          <a:noFill/>
+          <a:ln/>
+        </p:spPr>
+        <p:txBody>
+          <a:bodyPr wrap="square" lIns="0" tIns="0" rIns="0" bIns="0" rtlCol="0" anchor="ctr"/>
+          <a:lstStyle/>
+          <a:p>
+            <a:pPr indent="0" marL="0">
+              <a:lnSpc>
+                <a:spcPts val="1900"/>
+              </a:lnSpc>
+              <a:buNone/>
+            </a:pPr>
+            <a:r>
+              <a:rPr lang="en-US" sz="1100" dirty="0">
+                <a:solidFill>
+                  <a:srgbClr val="2D2D2D"/>
+                </a:solidFill>
+                <a:latin typeface="Calibri" pitchFamily="34" charset="0"/>
+                <a:ea typeface="Calibri" pitchFamily="34" charset="-122"/>
+                <a:cs typeface="Calibri" pitchFamily="34" charset="-120"/>
+              </a:rPr>
+              <a:t>✦ 中英文双语字典，集中管理
+</a:t>
+            </a:r>
+            <a:pPr indent="0" marL="0">
+              <a:lnSpc>
+                <a:spcPts val="1900"/>
+              </a:lnSpc>
+              <a:buNone/>
+            </a:pPr>
+            <a:r>
+              <a:rPr lang="en-US" sz="1100" dirty="0">
+                <a:solidFill>
+                  <a:srgbClr val="2D2D2D"/>
+                </a:solidFill>
+                <a:latin typeface="Calibri" pitchFamily="34" charset="0"/>
+                <a:ea typeface="Calibri" pitchFamily="34" charset="-122"/>
+                <a:cs typeface="Calibri" pitchFamily="34" charset="-120"/>
+              </a:rPr>
+              <a:t>✦ tr(key) 统一访问，支持格式化
+</a:t>
+            </a:r>
+            <a:pPr indent="0" marL="0">
+              <a:lnSpc>
+                <a:spcPts val="1900"/>
+              </a:lnSpc>
+              <a:buNone/>
+            </a:pPr>
+            <a:r>
+              <a:rPr lang="en-US" sz="1100" dirty="0">
+                <a:solidFill>
+                  <a:srgbClr val="2D2D2D"/>
+                </a:solidFill>
+                <a:latin typeface="Calibri" pitchFamily="34" charset="0"/>
+                <a:ea typeface="Calibri" pitchFamily="34" charset="-122"/>
+                <a:cs typeface="Calibri" pitchFamily="34" charset="-120"/>
+              </a:rPr>
+              <a:t>✦ Python 版切换语言后重绘界面
+</a:t>
+            </a:r>
+            <a:pPr indent="0" marL="0">
+              <a:lnSpc>
+                <a:spcPts val="1900"/>
+              </a:lnSpc>
+              <a:buNone/>
+            </a:pPr>
+            <a:r>
+              <a:rPr lang="en-US" sz="1100" dirty="0">
+                <a:solidFill>
+                  <a:srgbClr val="2D2D2D"/>
+                </a:solidFill>
+                <a:latin typeface="Calibri" pitchFamily="34" charset="0"/>
+                <a:ea typeface="Calibri" pitchFamily="34" charset="-122"/>
+                <a:cs typeface="Calibri" pitchFamily="34" charset="-120"/>
+              </a:rPr>
+              <a:t>✦ Web 版 data-i18n 属性即时切换
+</a:t>
+            </a:r>
+            <a:pPr indent="0" marL="0">
+              <a:lnSpc>
+                <a:spcPts val="1900"/>
+              </a:lnSpc>
+              <a:buNone/>
+            </a:pPr>
+            <a:r>
+              <a:rPr lang="en-US" sz="1100" dirty="0">
+                <a:solidFill>
+                  <a:srgbClr val="2D2D2D"/>
+                </a:solidFill>
+                <a:latin typeface="Calibri" pitchFamily="34" charset="0"/>
+                <a:ea typeface="Calibri" pitchFamily="34" charset="-122"/>
+                <a:cs typeface="Calibri" pitchFamily="34" charset="-120"/>
+              </a:rPr>
+              <a:t>✦ 菜单一键切换，无需重启
+</a:t>
+            </a:r>
+            <a:endParaRPr lang="en-US" sz="1100" dirty="0"/>
+          </a:p>
+        </p:txBody>
+      </p:sp>
+      <p:sp>
+        <p:nvSpPr>
+          <p:cNvPr id="8" name="Shape 6"/>
+          <p:cNvSpPr/>
+          <p:nvPr/>
+        </p:nvSpPr>
+        <p:spPr>
+          <a:xfrm>
+            <a:off x="4754880" y="1097280"/>
+            <a:ext cx="3840480" cy="2011680"/>
+          </a:xfrm>
+          <a:prstGeom prst="rect">
+            <a:avLst/>
+          </a:prstGeom>
+          <a:solidFill>
+            <a:srgbClr val="FFFFFF"/>
+          </a:solidFill>
+          <a:ln/>
+          <a:effectLst>
+            <a:outerShdw sx="100000" sy="100000" kx="0" ky="0" algn="bl" rotWithShape="0" blurRad="76200" dist="25400" dir="8100000">
+              <a:srgbClr val="000000">
+                <a:alpha val="8000"/>
+              </a:srgbClr>
+            </a:outerShdw>
+          </a:effectLst>
+        </p:spPr>
+      </p:sp>
+      <p:sp>
+        <p:nvSpPr>
+          <p:cNvPr id="9" name="Shape 7"/>
+          <p:cNvSpPr/>
+          <p:nvPr/>
+        </p:nvSpPr>
+        <p:spPr>
+          <a:xfrm>
+            <a:off x="4754880" y="1097280"/>
+            <a:ext cx="54864" cy="2011680"/>
+          </a:xfrm>
+          <a:prstGeom prst="rect">
+            <a:avLst/>
+          </a:prstGeom>
+          <a:solidFill>
+            <a:srgbClr val="D4A574"/>
+          </a:solidFill>
+          <a:ln/>
+        </p:spPr>
+      </p:sp>
+      <p:sp>
+        <p:nvSpPr>
+          <p:cNvPr id="10" name="Text 8"/>
+          <p:cNvSpPr/>
+          <p:nvPr/>
+        </p:nvSpPr>
+        <p:spPr>
+          <a:xfrm>
+            <a:off x="5029200" y="1188720"/>
+            <a:ext cx="3474720" cy="320040"/>
+          </a:xfrm>
+          <a:prstGeom prst="rect">
+            <a:avLst/>
+          </a:prstGeom>
+          <a:noFill/>
+          <a:ln/>
+        </p:spPr>
+        <p:txBody>
+          <a:bodyPr wrap="square" lIns="0" tIns="0" rIns="0" bIns="0" rtlCol="0" anchor="ctr"/>
+          <a:lstStyle/>
+          <a:p>
+            <a:pPr indent="0" marL="0">
+              <a:buNone/>
+            </a:pPr>
+            <a:r>
+              <a:rPr lang="en-US" sz="1600" b="1" dirty="0">
+                <a:solidFill>
+                  <a:srgbClr val="1A1F36"/>
+                </a:solidFill>
+                <a:latin typeface="Georgia" pitchFamily="34" charset="0"/>
+                <a:ea typeface="Georgia" pitchFamily="34" charset="-122"/>
+                <a:cs typeface="Georgia" pitchFamily="34" charset="-120"/>
+              </a:rPr>
+              <a:t>lang.py 实现</a:t>
+            </a:r>
+            <a:endParaRPr lang="en-US" sz="1600" dirty="0"/>
+          </a:p>
+        </p:txBody>
+      </p:sp>
+      <p:sp>
+        <p:nvSpPr>
+          <p:cNvPr id="11" name="Shape 9"/>
+          <p:cNvSpPr/>
+          <p:nvPr/>
+        </p:nvSpPr>
+        <p:spPr>
+          <a:xfrm>
+            <a:off x="5029200" y="1600200"/>
+            <a:ext cx="3337560" cy="1371600"/>
+          </a:xfrm>
+          <a:prstGeom prst="rect">
+            <a:avLst/>
+          </a:prstGeom>
+          <a:solidFill>
+            <a:srgbClr val="F8F9FA"/>
+          </a:solidFill>
+          <a:ln/>
+        </p:spPr>
+      </p:sp>
+      <p:sp>
+        <p:nvSpPr>
+          <p:cNvPr id="12" name="Text 10"/>
+          <p:cNvSpPr/>
+          <p:nvPr/>
+        </p:nvSpPr>
+        <p:spPr>
+          <a:xfrm>
+            <a:off x="5120640" y="1645920"/>
+            <a:ext cx="3200400" cy="1280160"/>
+          </a:xfrm>
+          <a:prstGeom prst="rect">
+            <a:avLst/>
+          </a:prstGeom>
+          <a:noFill/>
+          <a:ln/>
+        </p:spPr>
+        <p:txBody>
+          <a:bodyPr wrap="square" lIns="0" tIns="0" rIns="0" bIns="0" rtlCol="0" anchor="ctr"/>
+          <a:lstStyle/>
+          <a:p>
+            <a:pPr indent="0" marL="0">
+              <a:buNone/>
+            </a:pPr>
+            <a:r>
+              <a:rPr lang="en-US" sz="1050" dirty="0">
+                <a:solidFill>
+                  <a:srgbClr val="2D2D2D"/>
+                </a:solidFill>
+                <a:latin typeface="Consolas" pitchFamily="34" charset="0"/>
+                <a:ea typeface="Consolas" pitchFamily="34" charset="-122"/>
+                <a:cs typeface="Consolas" pitchFamily="34" charset="-120"/>
+              </a:rPr>
+              <a:t>STRINGS = {</a:t>
+            </a:r>
+            <a:endParaRPr lang="en-US" sz="1050" dirty="0"/>
+          </a:p>
+          <a:p>
+            <a:pPr indent="0" marL="0">
+              <a:buNone/>
+            </a:pPr>
+            <a:r>
+              <a:rPr lang="en-US" sz="1050" dirty="0">
+                <a:solidFill>
+                  <a:srgbClr val="2D2D2D"/>
+                </a:solidFill>
+                <a:latin typeface="Consolas" pitchFamily="34" charset="0"/>
+                <a:ea typeface="Consolas" pitchFamily="34" charset="-122"/>
+                <a:cs typeface="Consolas" pitchFamily="34" charset="-120"/>
+              </a:rPr>
+              <a:t>  'zh': { 'menu_balance': '查询余额' },</a:t>
+            </a:r>
+            <a:endParaRPr lang="en-US" sz="1050" dirty="0"/>
+          </a:p>
+          <a:p>
+            <a:pPr indent="0" marL="0">
+              <a:buNone/>
+            </a:pPr>
+            <a:r>
+              <a:rPr lang="en-US" sz="1050" dirty="0">
+                <a:solidFill>
+                  <a:srgbClr val="2D2D2D"/>
+                </a:solidFill>
+                <a:latin typeface="Consolas" pitchFamily="34" charset="0"/>
+                <a:ea typeface="Consolas" pitchFamily="34" charset="-122"/>
+                <a:cs typeface="Consolas" pitchFamily="34" charset="-120"/>
+              </a:rPr>
+              <a:t>  'en': { 'menu_balance': 'Balance' }</a:t>
+            </a:r>
+            <a:endParaRPr lang="en-US" sz="1050" dirty="0"/>
+          </a:p>
+          <a:p>
+            <a:pPr indent="0" marL="0">
+              <a:buNone/>
+            </a:pPr>
+            <a:r>
+              <a:rPr lang="en-US" sz="1050" dirty="0">
+                <a:solidFill>
+                  <a:srgbClr val="2D2D2D"/>
+                </a:solidFill>
+                <a:latin typeface="Consolas" pitchFamily="34" charset="0"/>
+                <a:ea typeface="Consolas" pitchFamily="34" charset="-122"/>
+                <a:cs typeface="Consolas" pitchFamily="34" charset="-120"/>
+              </a:rPr>
+              <a:t>}</a:t>
+            </a:r>
+            <a:endParaRPr lang="en-US" sz="1050" dirty="0"/>
+          </a:p>
+          <a:p>
+            <a:pPr indent="0" marL="0">
+              <a:buNone/>
+            </a:pPr>
+            <a:r>
+              <a:rPr lang="en-US" sz="1050" dirty="0">
+                <a:solidFill>
+                  <a:srgbClr val="2D2D2D"/>
+                </a:solidFill>
+                <a:latin typeface="Consolas" pitchFamily="34" charset="0"/>
+                <a:ea typeface="Consolas" pitchFamily="34" charset="-122"/>
+                <a:cs typeface="Consolas" pitchFamily="34" charset="-120"/>
+              </a:rPr>
+              <a:t>def tr(key):</a:t>
+            </a:r>
+            <a:endParaRPr lang="en-US" sz="1050" dirty="0"/>
+          </a:p>
+          <a:p>
+            <a:pPr indent="0" marL="0">
+              <a:buNone/>
+            </a:pPr>
+            <a:r>
+              <a:rPr lang="en-US" sz="1050" dirty="0">
+                <a:solidFill>
+                  <a:srgbClr val="2D2D2D"/>
+                </a:solidFill>
+                <a:latin typeface="Consolas" pitchFamily="34" charset="0"/>
+                <a:ea typeface="Consolas" pitchFamily="34" charset="-122"/>
+                <a:cs typeface="Consolas" pitchFamily="34" charset="-120"/>
+              </a:rPr>
+              <a:t>    return STRINGS[lang][key]</a:t>
+            </a:r>
+            <a:endParaRPr lang="en-US" sz="1050" dirty="0"/>
+          </a:p>
+        </p:txBody>
+      </p:sp>
+      <p:sp>
+        <p:nvSpPr>
+          <p:cNvPr id="13" name="Shape 11"/>
+          <p:cNvSpPr/>
+          <p:nvPr/>
+        </p:nvSpPr>
+        <p:spPr>
+          <a:xfrm>
+            <a:off x="548640" y="3383280"/>
+            <a:ext cx="8046720" cy="731520"/>
+          </a:xfrm>
+          <a:prstGeom prst="rect">
+            <a:avLst/>
+          </a:prstGeom>
+          <a:solidFill>
+            <a:srgbClr val="FFFFFF"/>
+          </a:solidFill>
+          <a:ln/>
+          <a:effectLst>
+            <a:outerShdw sx="100000" sy="100000" kx="0" ky="0" algn="bl" rotWithShape="0" blurRad="76200" dist="25400" dir="8100000">
+              <a:srgbClr val="000000">
+                <a:alpha val="8000"/>
+              </a:srgbClr>
+            </a:outerShdw>
+          </a:effectLst>
+        </p:spPr>
+      </p:sp>
+      <p:sp>
+        <p:nvSpPr>
+          <p:cNvPr id="14" name="Shape 12"/>
+          <p:cNvSpPr/>
+          <p:nvPr/>
+        </p:nvSpPr>
+        <p:spPr>
+          <a:xfrm>
+            <a:off x="548640" y="3383280"/>
+            <a:ext cx="54864" cy="731520"/>
+          </a:xfrm>
+          <a:prstGeom prst="rect">
+            <a:avLst/>
+          </a:prstGeom>
+          <a:solidFill>
+            <a:srgbClr val="10B981"/>
+          </a:solidFill>
+          <a:ln/>
+        </p:spPr>
+      </p:sp>
+      <p:sp>
+        <p:nvSpPr>
+          <p:cNvPr id="15" name="Text 13"/>
+          <p:cNvSpPr/>
+          <p:nvPr/>
+        </p:nvSpPr>
+        <p:spPr>
+          <a:xfrm>
+            <a:off x="822960" y="3429000"/>
+            <a:ext cx="7680960" cy="274320"/>
+          </a:xfrm>
+          <a:prstGeom prst="rect">
+            <a:avLst/>
+          </a:prstGeom>
+          <a:noFill/>
+          <a:ln/>
+        </p:spPr>
+        <p:txBody>
+          <a:bodyPr wrap="square" lIns="0" tIns="0" rIns="0" bIns="0" rtlCol="0" anchor="ctr"/>
+          <a:lstStyle/>
+          <a:p>
+            <a:pPr indent="0" marL="0">
+              <a:buNone/>
+            </a:pPr>
+            <a:r>
+              <a:rPr lang="en-US" sz="1300" b="1" dirty="0">
+                <a:solidFill>
+                  <a:srgbClr val="1A1F36"/>
+                </a:solidFill>
+                <a:latin typeface="Georgia" pitchFamily="34" charset="0"/>
+                <a:ea typeface="Georgia" pitchFamily="34" charset="-122"/>
+                <a:cs typeface="Georgia" pitchFamily="34" charset="-120"/>
+              </a:rPr>
+              <a:t>架构演进：单用户 → 多用户 → 交易日志 → 国际化</a:t>
+            </a:r>
+            <a:endParaRPr lang="en-US" sz="1300" dirty="0"/>
+          </a:p>
+        </p:txBody>
+      </p:sp>
+      <p:sp>
+        <p:nvSpPr>
+          <p:cNvPr id="16" name="Text 14"/>
+          <p:cNvSpPr/>
+          <p:nvPr/>
+        </p:nvSpPr>
+        <p:spPr>
+          <a:xfrm>
+            <a:off x="822960" y="3703320"/>
+            <a:ext cx="7680960" cy="320040"/>
+          </a:xfrm>
+          <a:prstGeom prst="rect">
+            <a:avLst/>
+          </a:prstGeom>
+          <a:noFill/>
+          <a:ln/>
+        </p:spPr>
+        <p:txBody>
+          <a:bodyPr wrap="square" lIns="0" tIns="0" rIns="0" bIns="0" rtlCol="0" anchor="ctr"/>
+          <a:lstStyle/>
+          <a:p>
+            <a:pPr indent="0" marL="0">
+              <a:buNone/>
+            </a:pPr>
+            <a:r>
+              <a:rPr lang="en-US" sz="1100" dirty="0">
+                <a:solidFill>
+                  <a:srgbClr val="6B7280"/>
+                </a:solidFill>
+                <a:latin typeface="Calibri" pitchFamily="34" charset="0"/>
+                <a:ea typeface="Calibri" pitchFamily="34" charset="-122"/>
+                <a:cs typeface="Calibri" pitchFamily="34" charset="-120"/>
+              </a:rPr>
+              <a:t>新增 lang.py 模块 + TransferFrame/HistoryFrame/RegisterFrame 三个视图，总代码扩展约 40%</a:t>
+            </a:r>
+            <a:endParaRPr lang="en-US" sz="1100" dirty="0"/>
+          </a:p>
+        </p:txBody>
+      </p:sp>
+      <p:sp>
+        <p:nvSpPr>
+          <p:cNvPr id="17" name="Shape 15"/>
+          <p:cNvSpPr/>
+          <p:nvPr/>
+        </p:nvSpPr>
+        <p:spPr>
+          <a:xfrm>
+            <a:off x="0" y="4572000"/>
+            <a:ext cx="9144000" cy="548640"/>
+          </a:xfrm>
+          <a:prstGeom prst="rect">
+            <a:avLst/>
+          </a:prstGeom>
+          <a:solidFill>
+            <a:srgbClr val="1A1F36"/>
+          </a:solidFill>
+          <a:ln/>
+        </p:spPr>
+      </p:sp>
+      <p:sp>
+        <p:nvSpPr>
+          <p:cNvPr id="18" name="Text 16"/>
+          <p:cNvSpPr/>
+          <p:nvPr/>
+        </p:nvSpPr>
+        <p:spPr>
+          <a:xfrm>
+            <a:off x="457200" y="4617720"/>
+            <a:ext cx="8229600" cy="457200"/>
+          </a:xfrm>
+          <a:prstGeom prst="rect">
+            <a:avLst/>
+          </a:prstGeom>
+          <a:noFill/>
+          <a:ln/>
+        </p:spPr>
+        <p:txBody>
+          <a:bodyPr wrap="square" lIns="0" tIns="0" rIns="0" bIns="0" rtlCol="0" anchor="ctr"/>
+          <a:lstStyle/>
+          <a:p>
+            <a:pPr algn="ctr" indent="0" marL="0">
+              <a:buNone/>
+            </a:pPr>
+            <a:r>
+              <a:rPr lang="en-US" sz="1200" dirty="0">
+                <a:solidFill>
+                  <a:srgbClr val="F5F0EB"/>
+                </a:solidFill>
+                <a:latin typeface="Calibri" pitchFamily="34" charset="0"/>
+                <a:ea typeface="Calibri" pitchFamily="34" charset="-122"/>
+                <a:cs typeface="Calibri" pitchFamily="34" charset="-120"/>
+              </a:rPr>
+              <a:t>ATM 柜员机模拟程序 · 湘潭大学 计算机·网络空间安全学院</a:t>
+            </a:r>
+            <a:endParaRPr lang="en-US" sz="1200" dirty="0"/>
+          </a:p>
+        </p:txBody>
+      </p:sp>
+    </p:spTree>
+  </p:cSld>
+  <p:clrMapOvr>
+    <a:masterClrMapping/>
+  </p:clrMapOvr>
+</p:sld>
+</file>
+
+<file path=ppt/slides/slide27.xml><?xml version="1.0" encoding="utf-8"?>
+<p:sld xmlns:a="http://schemas.openxmlformats.org/drawingml/2006/main" xmlns:r="http://schemas.openxmlformats.org/officeDocument/2006/relationships" xmlns:p="http://schemas.openxmlformats.org/presentationml/2006/main">
+  <p:cSld name="Slide 27">
     <p:bg>
       <p:bgPr>
         <a:solidFill>

--- a/ATM项目演示.pptx
+++ b/ATM项目演示.pptx
@@ -4,6 +4,9 @@
   <p:sldMasterIdLst>
     <p:sldMasterId id="2147483648" r:id="rId1"/>
   </p:sldMasterIdLst>
+  <p:notesMasterIdLst>
+    <p:notesMasterId r:id="rId29"/>
+  </p:notesMasterIdLst>
   <p:sldIdLst>
     <p:sldId id="256" r:id="rId2"/>
     <p:sldId id="257" r:id="rId3"/>
@@ -33,10 +36,7 @@
     <p:sldId id="281" r:id="rId27"/>
     <p:sldId id="282" r:id="rId28"/>
   </p:sldIdLst>
-  <p:notesMasterIdLst>
-    <p:notesMasterId r:id="rId29"/>
-  </p:notesMasterIdLst>
-  <p:sldSz cx="9144000" cy="5143500"/>
+  <p:sldSz cx="9144000" cy="5143500" type="screen16x9"/>
   <p:notesSz cx="5143500" cy="9144000"/>
   <p:defaultTextStyle>
     <a:lvl1pPr marL="0" algn="l" defTabSz="914400" rtl="0" eaLnBrk="1" latinLnBrk="0" hangingPunct="1">
@@ -130,6 +130,11 @@
       </a:defRPr>
     </a:lvl9pPr>
   </p:defaultTextStyle>
+  <p:extLst>
+    <p:ext uri="{EFAFB233-063F-42B5-8137-9DF3F51BA10A}">
+      <p15:sldGuideLst xmlns:p15="http://schemas.microsoft.com/office/powerpoint/2012/main"/>
+    </p:ext>
+  </p:extLst>
 </p:presentation>
 </file>
 
@@ -155,234 +160,10 @@
           <a:chExt cx="0" cy="0"/>
         </a:xfrm>
       </p:grpSpPr>
-      <p:sp>
-        <p:nvSpPr>
-          <p:cNvPr id="2" name="Header Placeholder 1"/>
-          <p:cNvSpPr>
-            <a:spLocks noGrp="1"/>
-          </p:cNvSpPr>
-          <p:nvPr>
-            <p:ph type="hdr" sz="quarter"/>
-          </p:nvPr>
-        </p:nvSpPr>
-        <p:spPr>
-          <a:xfrm>
-            <a:off x="0" y="0"/>
-            <a:ext cx="2971800" cy="458788"/>
-          </a:xfrm>
-          <a:prstGeom prst="rect">
-            <a:avLst/>
-          </a:prstGeom>
-        </p:spPr>
-        <p:txBody>
-          <a:bodyPr vert="horz" lIns="91440" tIns="45720" rIns="91440" bIns="45720" rtlCol="0"/>
-          <a:lstStyle>
-            <a:lvl1pPr algn="l">
-              <a:defRPr sz="1200"/>
-            </a:lvl1pPr>
-          </a:lstStyle>
-          <a:p>
-            <a:endParaRPr lang="en-US"/>
-          </a:p>
-        </p:txBody>
-      </p:sp>
-      <p:sp>
-        <p:nvSpPr>
-          <p:cNvPr id="3" name="Date Placeholder 2"/>
-          <p:cNvSpPr>
-            <a:spLocks noGrp="1"/>
-          </p:cNvSpPr>
-          <p:nvPr>
-            <p:ph type="dt" idx="1"/>
-          </p:nvPr>
-        </p:nvSpPr>
-        <p:spPr>
-          <a:xfrm>
-            <a:off x="3884613" y="0"/>
-            <a:ext cx="2971800" cy="458788"/>
-          </a:xfrm>
-          <a:prstGeom prst="rect">
-            <a:avLst/>
-          </a:prstGeom>
-        </p:spPr>
-        <p:txBody>
-          <a:bodyPr vert="horz" lIns="91440" tIns="45720" rIns="91440" bIns="45720" rtlCol="0"/>
-          <a:lstStyle>
-            <a:lvl1pPr algn="r">
-              <a:defRPr sz="1200"/>
-            </a:lvl1pPr>
-          </a:lstStyle>
-          <a:p>
-            <a:fld id="{5282F153-3F37-0F45-9E97-73ACFA13230C}" type="datetimeFigureOut">
-              <a:rPr lang="en-US"/>
-              <a:t>7/23/19</a:t>
-            </a:fld>
-            <a:endParaRPr lang="en-US"/>
-          </a:p>
-        </p:txBody>
-      </p:sp>
-      <p:sp>
-        <p:nvSpPr>
-          <p:cNvPr id="4" name="Slide Image Placeholder 3"/>
-          <p:cNvSpPr>
-            <a:spLocks noGrp="1" noRot="1" noChangeAspect="1"/>
-          </p:cNvSpPr>
-          <p:nvPr>
-            <p:ph type="sldImg" idx="2"/>
-          </p:nvPr>
-        </p:nvSpPr>
-        <p:spPr>
-          <a:xfrm>
-            <a:off x="685800" y="1143000"/>
-            <a:ext cx="5486400" cy="3086100"/>
-          </a:xfrm>
-          <a:prstGeom prst="rect">
-            <a:avLst/>
-          </a:prstGeom>
-          <a:noFill/>
-          <a:ln w="12700">
-            <a:solidFill>
-              <a:prstClr val="black"/>
-            </a:solidFill>
-          </a:ln>
-        </p:spPr>
-        <p:txBody>
-          <a:bodyPr vert="horz" lIns="91440" tIns="45720" rIns="91440" bIns="45720" rtlCol="0" anchor="ctr"/>
-          <a:lstStyle/>
-          <a:p>
-            <a:endParaRPr lang="en-US"/>
-          </a:p>
-        </p:txBody>
-      </p:sp>
-      <p:sp>
-        <p:nvSpPr>
-          <p:cNvPr id="5" name="Notes Placeholder 4"/>
-          <p:cNvSpPr>
-            <a:spLocks noGrp="1"/>
-          </p:cNvSpPr>
-          <p:nvPr>
-            <p:ph type="body" sz="quarter" idx="3"/>
-          </p:nvPr>
-        </p:nvSpPr>
-        <p:spPr>
-          <a:xfrm>
-            <a:off x="685800" y="4400550"/>
-            <a:ext cx="5486400" cy="3600450"/>
-          </a:xfrm>
-          <a:prstGeom prst="rect">
-            <a:avLst/>
-          </a:prstGeom>
-        </p:spPr>
-        <p:txBody>
-          <a:bodyPr vert="horz" lIns="91440" tIns="45720" rIns="91440" bIns="45720" rtlCol="0"/>
-          <a:lstStyle/>
-          <a:p>
-            <a:pPr lvl="0"/>
-            <a:r>
-              <a:rPr lang="en-US"/>
-              <a:t>Click to edit Master text styles</a:t>
-            </a:r>
-          </a:p>
-          <a:p>
-            <a:pPr lvl="1"/>
-            <a:r>
-              <a:rPr lang="en-US"/>
-              <a:t>Second level</a:t>
-            </a:r>
-          </a:p>
-          <a:p>
-            <a:pPr lvl="2"/>
-            <a:r>
-              <a:rPr lang="en-US"/>
-              <a:t>Third level</a:t>
-            </a:r>
-          </a:p>
-          <a:p>
-            <a:pPr lvl="3"/>
-            <a:r>
-              <a:rPr lang="en-US"/>
-              <a:t>Fourth level</a:t>
-            </a:r>
-          </a:p>
-          <a:p>
-            <a:pPr lvl="4"/>
-            <a:r>
-              <a:rPr lang="en-US"/>
-              <a:t>Fifth level</a:t>
-            </a:r>
-          </a:p>
-        </p:txBody>
-      </p:sp>
-      <p:sp>
-        <p:nvSpPr>
-          <p:cNvPr id="6" name="Footer Placeholder 5"/>
-          <p:cNvSpPr>
-            <a:spLocks noGrp="1"/>
-          </p:cNvSpPr>
-          <p:nvPr>
-            <p:ph type="ftr" sz="quarter" idx="4"/>
-          </p:nvPr>
-        </p:nvSpPr>
-        <p:spPr>
-          <a:xfrm>
-            <a:off x="0" y="8685213"/>
-            <a:ext cx="2971800" cy="458787"/>
-          </a:xfrm>
-          <a:prstGeom prst="rect">
-            <a:avLst/>
-          </a:prstGeom>
-        </p:spPr>
-        <p:txBody>
-          <a:bodyPr vert="horz" lIns="91440" tIns="45720" rIns="91440" bIns="45720" rtlCol="0" anchor="b"/>
-          <a:lstStyle>
-            <a:lvl1pPr algn="l">
-              <a:defRPr sz="1200"/>
-            </a:lvl1pPr>
-          </a:lstStyle>
-          <a:p>
-            <a:endParaRPr lang="en-US"/>
-          </a:p>
-        </p:txBody>
-      </p:sp>
-      <p:sp>
-        <p:nvSpPr>
-          <p:cNvPr id="7" name="Slide Number Placeholder 6"/>
-          <p:cNvSpPr>
-            <a:spLocks noGrp="1"/>
-          </p:cNvSpPr>
-          <p:nvPr>
-            <p:ph type="sldNum" sz="quarter" idx="5"/>
-          </p:nvPr>
-        </p:nvSpPr>
-        <p:spPr>
-          <a:xfrm>
-            <a:off x="3884613" y="8685213"/>
-            <a:ext cx="2971800" cy="458787"/>
-          </a:xfrm>
-          <a:prstGeom prst="rect">
-            <a:avLst/>
-          </a:prstGeom>
-        </p:spPr>
-        <p:txBody>
-          <a:bodyPr vert="horz" lIns="91440" tIns="45720" rIns="91440" bIns="45720" rtlCol="0" anchor="b"/>
-          <a:lstStyle>
-            <a:lvl1pPr algn="r">
-              <a:defRPr sz="1200"/>
-            </a:lvl1pPr>
-          </a:lstStyle>
-          <a:p>
-            <a:fld id="{CE5E9CC1-C706-0F49-92D6-E571CC5EEA8F}" type="slidenum">
-              <a:rPr lang="en-US"/>
-              <a:t>‹#›</a:t>
-            </a:fld>
-            <a:endParaRPr lang="en-US"/>
-          </a:p>
-        </p:txBody>
-      </p:sp>
     </p:spTree>
     <p:extLst>
       <p:ext uri="{BB962C8B-B14F-4D97-AF65-F5344CB8AC3E}">
-        <p14:creationId xmlns:p14="http://schemas.microsoft.com/office/powerpoint/2010/main" val="1024086991"/>
+        <p14:creationId xmlns:p14="http://schemas.microsoft.com/office/powerpoint/2010/main" val="3669943445"/>
       </p:ext>
     </p:extLst>
   </p:cSld>
@@ -526,10 +307,6 @@
           <a:bodyPr/>
           <a:lstStyle/>
           <a:p>
-            <a:r>
-              <a:rPr lang="en-US" dirty="0"/>
-              <a:t/>
-            </a:r>
             <a:endParaRPr lang="en-US" dirty="0"/>
           </a:p>
         </p:txBody>
@@ -614,10 +391,6 @@
           <a:bodyPr/>
           <a:lstStyle/>
           <a:p>
-            <a:r>
-              <a:rPr lang="en-US" dirty="0"/>
-              <a:t/>
-            </a:r>
             <a:endParaRPr lang="en-US" dirty="0"/>
           </a:p>
         </p:txBody>
@@ -702,10 +475,6 @@
           <a:bodyPr/>
           <a:lstStyle/>
           <a:p>
-            <a:r>
-              <a:rPr lang="en-US" dirty="0"/>
-              <a:t/>
-            </a:r>
             <a:endParaRPr lang="en-US" dirty="0"/>
           </a:p>
         </p:txBody>
@@ -790,10 +559,6 @@
           <a:bodyPr/>
           <a:lstStyle/>
           <a:p>
-            <a:r>
-              <a:rPr lang="en-US" dirty="0"/>
-              <a:t/>
-            </a:r>
             <a:endParaRPr lang="en-US" dirty="0"/>
           </a:p>
         </p:txBody>
@@ -878,10 +643,6 @@
           <a:bodyPr/>
           <a:lstStyle/>
           <a:p>
-            <a:r>
-              <a:rPr lang="en-US" dirty="0"/>
-              <a:t/>
-            </a:r>
             <a:endParaRPr lang="en-US" dirty="0"/>
           </a:p>
         </p:txBody>
@@ -966,10 +727,6 @@
           <a:bodyPr/>
           <a:lstStyle/>
           <a:p>
-            <a:r>
-              <a:rPr lang="en-US" dirty="0"/>
-              <a:t/>
-            </a:r>
             <a:endParaRPr lang="en-US" dirty="0"/>
           </a:p>
         </p:txBody>
@@ -1054,10 +811,6 @@
           <a:bodyPr/>
           <a:lstStyle/>
           <a:p>
-            <a:r>
-              <a:rPr lang="en-US" dirty="0"/>
-              <a:t/>
-            </a:r>
             <a:endParaRPr lang="en-US" dirty="0"/>
           </a:p>
         </p:txBody>
@@ -1142,10 +895,6 @@
           <a:bodyPr/>
           <a:lstStyle/>
           <a:p>
-            <a:r>
-              <a:rPr lang="en-US" dirty="0"/>
-              <a:t/>
-            </a:r>
             <a:endParaRPr lang="en-US" dirty="0"/>
           </a:p>
         </p:txBody>
@@ -1230,10 +979,6 @@
           <a:bodyPr/>
           <a:lstStyle/>
           <a:p>
-            <a:r>
-              <a:rPr lang="en-US" dirty="0"/>
-              <a:t/>
-            </a:r>
             <a:endParaRPr lang="en-US" dirty="0"/>
           </a:p>
         </p:txBody>
@@ -1318,10 +1063,6 @@
           <a:bodyPr/>
           <a:lstStyle/>
           <a:p>
-            <a:r>
-              <a:rPr lang="en-US" dirty="0"/>
-              <a:t/>
-            </a:r>
             <a:endParaRPr lang="en-US" dirty="0"/>
           </a:p>
         </p:txBody>
@@ -1406,10 +1147,6 @@
           <a:bodyPr/>
           <a:lstStyle/>
           <a:p>
-            <a:r>
-              <a:rPr lang="en-US" dirty="0"/>
-              <a:t/>
-            </a:r>
             <a:endParaRPr lang="en-US" dirty="0"/>
           </a:p>
         </p:txBody>
@@ -1494,10 +1231,6 @@
           <a:bodyPr/>
           <a:lstStyle/>
           <a:p>
-            <a:r>
-              <a:rPr lang="en-US" dirty="0"/>
-              <a:t/>
-            </a:r>
             <a:endParaRPr lang="en-US" dirty="0"/>
           </a:p>
         </p:txBody>
@@ -1582,10 +1315,6 @@
           <a:bodyPr/>
           <a:lstStyle/>
           <a:p>
-            <a:r>
-              <a:rPr lang="en-US" dirty="0"/>
-              <a:t/>
-            </a:r>
             <a:endParaRPr lang="en-US" dirty="0"/>
           </a:p>
         </p:txBody>
@@ -1670,10 +1399,6 @@
           <a:bodyPr/>
           <a:lstStyle/>
           <a:p>
-            <a:r>
-              <a:rPr lang="en-US" dirty="0"/>
-              <a:t/>
-            </a:r>
             <a:endParaRPr lang="en-US" dirty="0"/>
           </a:p>
         </p:txBody>
@@ -1758,10 +1483,6 @@
           <a:bodyPr/>
           <a:lstStyle/>
           <a:p>
-            <a:r>
-              <a:rPr lang="en-US" dirty="0"/>
-              <a:t/>
-            </a:r>
             <a:endParaRPr lang="en-US" dirty="0"/>
           </a:p>
         </p:txBody>
@@ -1846,10 +1567,6 @@
           <a:bodyPr/>
           <a:lstStyle/>
           <a:p>
-            <a:r>
-              <a:rPr lang="en-US" dirty="0"/>
-              <a:t/>
-            </a:r>
             <a:endParaRPr lang="en-US" dirty="0"/>
           </a:p>
         </p:txBody>
@@ -1934,10 +1651,6 @@
           <a:bodyPr/>
           <a:lstStyle/>
           <a:p>
-            <a:r>
-              <a:rPr lang="en-US" dirty="0"/>
-              <a:t/>
-            </a:r>
             <a:endParaRPr lang="en-US" dirty="0"/>
           </a:p>
         </p:txBody>
@@ -2022,10 +1735,6 @@
           <a:bodyPr/>
           <a:lstStyle/>
           <a:p>
-            <a:r>
-              <a:rPr lang="en-US" dirty="0"/>
-              <a:t/>
-            </a:r>
             <a:endParaRPr lang="en-US" dirty="0"/>
           </a:p>
         </p:txBody>
@@ -2110,10 +1819,6 @@
           <a:bodyPr/>
           <a:lstStyle/>
           <a:p>
-            <a:r>
-              <a:rPr lang="en-US" dirty="0"/>
-              <a:t/>
-            </a:r>
             <a:endParaRPr lang="en-US" dirty="0"/>
           </a:p>
         </p:txBody>
@@ -2198,10 +1903,6 @@
           <a:bodyPr/>
           <a:lstStyle/>
           <a:p>
-            <a:r>
-              <a:rPr lang="en-US" dirty="0"/>
-              <a:t/>
-            </a:r>
             <a:endParaRPr lang="en-US" dirty="0"/>
           </a:p>
         </p:txBody>
@@ -2286,10 +1987,6 @@
           <a:bodyPr/>
           <a:lstStyle/>
           <a:p>
-            <a:r>
-              <a:rPr lang="en-US" dirty="0"/>
-              <a:t/>
-            </a:r>
             <a:endParaRPr lang="en-US" dirty="0"/>
           </a:p>
         </p:txBody>
@@ -2374,10 +2071,6 @@
           <a:bodyPr/>
           <a:lstStyle/>
           <a:p>
-            <a:r>
-              <a:rPr lang="en-US" dirty="0"/>
-              <a:t/>
-            </a:r>
             <a:endParaRPr lang="en-US" dirty="0"/>
           </a:p>
         </p:txBody>
@@ -2462,10 +2155,6 @@
           <a:bodyPr/>
           <a:lstStyle/>
           <a:p>
-            <a:r>
-              <a:rPr lang="en-US" dirty="0"/>
-              <a:t/>
-            </a:r>
             <a:endParaRPr lang="en-US" dirty="0"/>
           </a:p>
         </p:txBody>
@@ -2550,10 +2239,6 @@
           <a:bodyPr/>
           <a:lstStyle/>
           <a:p>
-            <a:r>
-              <a:rPr lang="en-US" dirty="0"/>
-              <a:t/>
-            </a:r>
             <a:endParaRPr lang="en-US" dirty="0"/>
           </a:p>
         </p:txBody>
@@ -2638,10 +2323,6 @@
           <a:bodyPr/>
           <a:lstStyle/>
           <a:p>
-            <a:r>
-              <a:rPr lang="en-US" dirty="0"/>
-              <a:t/>
-            </a:r>
             <a:endParaRPr lang="en-US" dirty="0"/>
           </a:p>
         </p:txBody>
@@ -2726,10 +2407,6 @@
           <a:bodyPr/>
           <a:lstStyle/>
           <a:p>
-            <a:r>
-              <a:rPr lang="en-US" dirty="0"/>
-              <a:t/>
-            </a:r>
             <a:endParaRPr lang="en-US" dirty="0"/>
           </a:p>
         </p:txBody>
@@ -2814,10 +2491,6 @@
           <a:bodyPr/>
           <a:lstStyle/>
           <a:p>
-            <a:r>
-              <a:rPr lang="en-US" dirty="0"/>
-              <a:t/>
-            </a:r>
             <a:endParaRPr lang="en-US" dirty="0"/>
           </a:p>
         </p:txBody>
@@ -2891,6 +2564,11 @@
 <file path=ppt/slideMasters/slideMaster1.xml><?xml version="1.0" encoding="utf-8"?>
 <p:sldMaster xmlns:a="http://schemas.openxmlformats.org/drawingml/2006/main" xmlns:r="http://schemas.openxmlformats.org/officeDocument/2006/relationships" xmlns:p="http://schemas.openxmlformats.org/presentationml/2006/main">
   <p:cSld>
+    <p:bg>
+      <p:bgRef idx="1001">
+        <a:schemeClr val="bg1"/>
+      </p:bgRef>
+    </p:bg>
     <p:spTree>
       <p:nvGrpSpPr>
         <p:cNvPr id="1" name=""/>
@@ -3173,6 +2851,7 @@
         <a:solidFill>
           <a:srgbClr val="0A0A0C"/>
         </a:solidFill>
+        <a:effectLst/>
       </p:bgPr>
     </p:bg>
     <p:spTree>
@@ -3254,7 +2933,7 @@
           <a:bodyPr wrap="square" lIns="0" tIns="0" rIns="0" bIns="0" rtlCol="0" anchor="ctr"/>
           <a:lstStyle/>
           <a:p>
-            <a:pPr algn="ctr" indent="0" marL="0">
+            <a:pPr marL="0" indent="0" algn="ctr">
               <a:buNone/>
             </a:pPr>
             <a:r>
@@ -3290,7 +2969,7 @@
           <a:bodyPr wrap="square" lIns="0" tIns="0" rIns="0" bIns="0" rtlCol="0" anchor="ctr"/>
           <a:lstStyle/>
           <a:p>
-            <a:pPr indent="0" marL="0">
+            <a:pPr marL="0" indent="0">
               <a:buNone/>
             </a:pPr>
             <a:r>
@@ -3329,7 +3008,7 @@
           <a:bodyPr wrap="square" lIns="0" tIns="0" rIns="0" bIns="0" rtlCol="0" anchor="ctr"/>
           <a:lstStyle/>
           <a:p>
-            <a:pPr indent="0" marL="0">
+            <a:pPr marL="0" indent="0">
               <a:buNone/>
             </a:pPr>
             <a:r>
@@ -3388,7 +3067,7 @@
           <a:bodyPr wrap="square" lIns="0" tIns="0" rIns="0" bIns="0" rtlCol="0" anchor="ctr"/>
           <a:lstStyle/>
           <a:p>
-            <a:pPr indent="0" marL="0">
+            <a:pPr marL="0" indent="0">
               <a:buNone/>
             </a:pPr>
             <a:r>
@@ -3427,7 +3106,7 @@
           <a:bodyPr wrap="square" lIns="0" tIns="0" rIns="0" bIns="0" rtlCol="0" anchor="ctr"/>
           <a:lstStyle/>
           <a:p>
-            <a:pPr indent="0" marL="0">
+            <a:pPr marL="0" indent="0">
               <a:buNone/>
             </a:pPr>
             <a:r>
@@ -3461,6 +3140,7 @@
         <a:solidFill>
           <a:srgbClr val="FFFFFF"/>
         </a:solidFill>
+        <a:effectLst/>
       </p:bgPr>
     </p:bg>
     <p:spTree>
@@ -3518,7 +3198,7 @@
           <a:bodyPr wrap="square" lIns="0" tIns="0" rIns="0" bIns="0" rtlCol="0" anchor="ctr"/>
           <a:lstStyle/>
           <a:p>
-            <a:pPr indent="0" marL="0">
+            <a:pPr marL="0" indent="0">
               <a:buNone/>
             </a:pPr>
             <a:r>
@@ -3555,7 +3235,7 @@
           </a:solidFill>
           <a:ln/>
           <a:effectLst>
-            <a:outerShdw sx="100000" sy="100000" kx="0" ky="0" algn="bl" rotWithShape="0" blurRad="76200" dist="25400" dir="8100000">
+            <a:outerShdw blurRad="76200" dist="25400" dir="8100000" algn="bl" rotWithShape="0">
               <a:srgbClr val="000000">
                 <a:alpha val="8000"/>
               </a:srgbClr>
@@ -3604,7 +3284,7 @@
           <a:bodyPr wrap="square" lIns="0" tIns="0" rIns="0" bIns="0" rtlCol="0" anchor="ctr"/>
           <a:lstStyle/>
           <a:p>
-            <a:pPr indent="0" marL="0">
+            <a:pPr marL="0" indent="0">
               <a:buNone/>
             </a:pPr>
             <a:r>
@@ -3643,7 +3323,7 @@
           <a:bodyPr wrap="square" lIns="0" tIns="0" rIns="0" bIns="0" rtlCol="0" anchor="ctr"/>
           <a:lstStyle/>
           <a:p>
-            <a:pPr indent="0" marL="0">
+            <a:pPr marL="0" indent="0">
               <a:buNone/>
             </a:pPr>
             <a:r>
@@ -3682,7 +3362,7 @@
           <a:bodyPr wrap="square" lIns="0" tIns="0" rIns="0" bIns="0" rtlCol="0" anchor="ctr"/>
           <a:lstStyle/>
           <a:p>
-            <a:pPr algn="ctr" indent="0" marL="0">
+            <a:pPr marL="0" indent="0" algn="ctr">
               <a:buNone/>
             </a:pPr>
             <a:r>
@@ -3716,7 +3396,7 @@
           </a:solidFill>
           <a:ln/>
           <a:effectLst>
-            <a:outerShdw sx="100000" sy="100000" kx="0" ky="0" algn="bl" rotWithShape="0" blurRad="76200" dist="25400" dir="8100000">
+            <a:outerShdw blurRad="76200" dist="25400" dir="8100000" algn="bl" rotWithShape="0">
               <a:srgbClr val="000000">
                 <a:alpha val="8000"/>
               </a:srgbClr>
@@ -3765,7 +3445,7 @@
           <a:bodyPr wrap="square" lIns="0" tIns="0" rIns="0" bIns="0" rtlCol="0" anchor="ctr"/>
           <a:lstStyle/>
           <a:p>
-            <a:pPr indent="0" marL="0">
+            <a:pPr marL="0" indent="0">
               <a:buNone/>
             </a:pPr>
             <a:r>
@@ -3804,7 +3484,7 @@
           <a:bodyPr wrap="square" lIns="0" tIns="0" rIns="0" bIns="0" rtlCol="0" anchor="ctr"/>
           <a:lstStyle/>
           <a:p>
-            <a:pPr indent="0" marL="0">
+            <a:pPr marL="0" indent="0">
               <a:buNone/>
             </a:pPr>
             <a:r>
@@ -3843,7 +3523,7 @@
           <a:bodyPr wrap="square" lIns="0" tIns="0" rIns="0" bIns="0" rtlCol="0" anchor="ctr"/>
           <a:lstStyle/>
           <a:p>
-            <a:pPr algn="ctr" indent="0" marL="0">
+            <a:pPr marL="0" indent="0" algn="ctr">
               <a:buNone/>
             </a:pPr>
             <a:r>
@@ -3877,7 +3557,7 @@
           </a:solidFill>
           <a:ln/>
           <a:effectLst>
-            <a:outerShdw sx="100000" sy="100000" kx="0" ky="0" algn="bl" rotWithShape="0" blurRad="76200" dist="25400" dir="8100000">
+            <a:outerShdw blurRad="76200" dist="25400" dir="8100000" algn="bl" rotWithShape="0">
               <a:srgbClr val="000000">
                 <a:alpha val="8000"/>
               </a:srgbClr>
@@ -3926,7 +3606,7 @@
           <a:bodyPr wrap="square" lIns="0" tIns="0" rIns="0" bIns="0" rtlCol="0" anchor="ctr"/>
           <a:lstStyle/>
           <a:p>
-            <a:pPr indent="0" marL="0">
+            <a:pPr marL="0" indent="0">
               <a:buNone/>
             </a:pPr>
             <a:r>
@@ -3965,7 +3645,7 @@
           <a:bodyPr wrap="square" lIns="0" tIns="0" rIns="0" bIns="0" rtlCol="0" anchor="ctr"/>
           <a:lstStyle/>
           <a:p>
-            <a:pPr indent="0" marL="0">
+            <a:pPr marL="0" indent="0">
               <a:buNone/>
             </a:pPr>
             <a:r>
@@ -4004,7 +3684,7 @@
           <a:bodyPr wrap="square" lIns="0" tIns="0" rIns="0" bIns="0" rtlCol="0" anchor="ctr"/>
           <a:lstStyle/>
           <a:p>
-            <a:pPr algn="ctr" indent="0" marL="0">
+            <a:pPr marL="0" indent="0" algn="ctr">
               <a:buNone/>
             </a:pPr>
             <a:r>
@@ -4038,7 +3718,7 @@
           </a:solidFill>
           <a:ln/>
           <a:effectLst>
-            <a:outerShdw sx="100000" sy="100000" kx="0" ky="0" algn="bl" rotWithShape="0" blurRad="76200" dist="25400" dir="8100000">
+            <a:outerShdw blurRad="76200" dist="25400" dir="8100000" algn="bl" rotWithShape="0">
               <a:srgbClr val="000000">
                 <a:alpha val="8000"/>
               </a:srgbClr>
@@ -4087,7 +3767,7 @@
           <a:bodyPr wrap="square" lIns="0" tIns="0" rIns="0" bIns="0" rtlCol="0" anchor="ctr"/>
           <a:lstStyle/>
           <a:p>
-            <a:pPr indent="0" marL="0">
+            <a:pPr marL="0" indent="0">
               <a:buNone/>
             </a:pPr>
             <a:r>
@@ -4126,7 +3806,7 @@
           <a:bodyPr wrap="square" lIns="0" tIns="0" rIns="0" bIns="0" rtlCol="0" anchor="ctr"/>
           <a:lstStyle/>
           <a:p>
-            <a:pPr indent="0" marL="0">
+            <a:pPr marL="0" indent="0">
               <a:buNone/>
             </a:pPr>
             <a:r>
@@ -4165,7 +3845,7 @@
           <a:bodyPr wrap="square" lIns="0" tIns="0" rIns="0" bIns="0" rtlCol="0" anchor="ctr"/>
           <a:lstStyle/>
           <a:p>
-            <a:pPr indent="0" marL="0">
+            <a:pPr marL="0" indent="0">
               <a:buNone/>
             </a:pPr>
             <a:r>
@@ -4224,7 +3904,7 @@
           <a:bodyPr wrap="square" lIns="0" tIns="0" rIns="0" bIns="0" rtlCol="0" anchor="ctr"/>
           <a:lstStyle/>
           <a:p>
-            <a:pPr indent="0" marL="0">
+            <a:pPr marL="0" indent="0">
               <a:buNone/>
             </a:pPr>
             <a:r>
@@ -4263,7 +3943,7 @@
           <a:bodyPr wrap="square" lIns="0" tIns="0" rIns="0" bIns="0" rtlCol="0" anchor="ctr"/>
           <a:lstStyle/>
           <a:p>
-            <a:pPr indent="0" marL="0">
+            <a:pPr marL="0" indent="0">
               <a:buNone/>
             </a:pPr>
             <a:r>
@@ -4322,7 +4002,7 @@
           <a:bodyPr wrap="square" lIns="0" tIns="0" rIns="0" bIns="0" rtlCol="0" anchor="ctr"/>
           <a:lstStyle/>
           <a:p>
-            <a:pPr indent="0" marL="0">
+            <a:pPr marL="0" indent="0">
               <a:buNone/>
             </a:pPr>
             <a:r>
@@ -4361,7 +4041,7 @@
           <a:bodyPr wrap="square" lIns="0" tIns="0" rIns="0" bIns="0" rtlCol="0" anchor="ctr"/>
           <a:lstStyle/>
           <a:p>
-            <a:pPr indent="0" marL="0">
+            <a:pPr marL="0" indent="0">
               <a:buNone/>
             </a:pPr>
             <a:r>
@@ -4420,7 +4100,7 @@
           <a:bodyPr wrap="square" lIns="0" tIns="0" rIns="0" bIns="0" rtlCol="0" anchor="ctr"/>
           <a:lstStyle/>
           <a:p>
-            <a:pPr indent="0" marL="0">
+            <a:pPr marL="0" indent="0">
               <a:buNone/>
             </a:pPr>
             <a:r>
@@ -4459,7 +4139,7 @@
           <a:bodyPr wrap="square" lIns="0" tIns="0" rIns="0" bIns="0" rtlCol="0" anchor="ctr"/>
           <a:lstStyle/>
           <a:p>
-            <a:pPr indent="0" marL="0">
+            <a:pPr marL="0" indent="0">
               <a:buNone/>
             </a:pPr>
             <a:r>
@@ -4518,7 +4198,7 @@
           <a:bodyPr wrap="square" lIns="0" tIns="0" rIns="0" bIns="0" rtlCol="0" anchor="ctr"/>
           <a:lstStyle/>
           <a:p>
-            <a:pPr indent="0" marL="0">
+            <a:pPr marL="0" indent="0">
               <a:buNone/>
             </a:pPr>
             <a:r>
@@ -4557,7 +4237,7 @@
           <a:bodyPr wrap="square" lIns="0" tIns="0" rIns="0" bIns="0" rtlCol="0" anchor="ctr"/>
           <a:lstStyle/>
           <a:p>
-            <a:pPr indent="0" marL="0">
+            <a:pPr marL="0" indent="0">
               <a:buNone/>
             </a:pPr>
             <a:r>
@@ -4616,7 +4296,7 @@
           <a:bodyPr wrap="square" lIns="0" tIns="0" rIns="0" bIns="0" rtlCol="0" anchor="ctr"/>
           <a:lstStyle/>
           <a:p>
-            <a:pPr indent="0" marL="0">
+            <a:pPr marL="0" indent="0">
               <a:buNone/>
             </a:pPr>
             <a:r>
@@ -4655,7 +4335,7 @@
           <a:bodyPr wrap="square" lIns="0" tIns="0" rIns="0" bIns="0" rtlCol="0" anchor="ctr"/>
           <a:lstStyle/>
           <a:p>
-            <a:pPr indent="0" marL="0">
+            <a:pPr marL="0" indent="0">
               <a:buNone/>
             </a:pPr>
             <a:r>
@@ -4714,7 +4394,7 @@
           <a:bodyPr wrap="square" lIns="0" tIns="0" rIns="0" bIns="0" rtlCol="0" anchor="ctr"/>
           <a:lstStyle/>
           <a:p>
-            <a:pPr indent="0" marL="0">
+            <a:pPr marL="0" indent="0">
               <a:buNone/>
             </a:pPr>
             <a:r>
@@ -4753,7 +4433,7 @@
           <a:bodyPr wrap="square" lIns="0" tIns="0" rIns="0" bIns="0" rtlCol="0" anchor="ctr"/>
           <a:lstStyle/>
           <a:p>
-            <a:pPr indent="0" marL="0">
+            <a:pPr marL="0" indent="0">
               <a:buNone/>
             </a:pPr>
             <a:r>
@@ -4787,6 +4467,7 @@
         <a:solidFill>
           <a:srgbClr val="FFFFFF"/>
         </a:solidFill>
+        <a:effectLst/>
       </p:bgPr>
     </p:bg>
     <p:spTree>
@@ -4844,7 +4525,7 @@
           <a:bodyPr wrap="square" lIns="0" tIns="0" rIns="0" bIns="0" rtlCol="0" anchor="ctr"/>
           <a:lstStyle/>
           <a:p>
-            <a:pPr indent="0" marL="0">
+            <a:pPr marL="0" indent="0">
               <a:buNone/>
             </a:pPr>
             <a:r>
@@ -4881,7 +4562,7 @@
           </a:solidFill>
           <a:ln/>
           <a:effectLst>
-            <a:outerShdw sx="100000" sy="100000" kx="0" ky="0" algn="bl" rotWithShape="0" blurRad="76200" dist="25400" dir="8100000">
+            <a:outerShdw blurRad="76200" dist="25400" dir="8100000" algn="bl" rotWithShape="0">
               <a:srgbClr val="000000">
                 <a:alpha val="8000"/>
               </a:srgbClr>
@@ -4930,7 +4611,7 @@
           <a:bodyPr wrap="square" lIns="0" tIns="0" rIns="0" bIns="0" rtlCol="0" anchor="ctr"/>
           <a:lstStyle/>
           <a:p>
-            <a:pPr indent="0" marL="0">
+            <a:pPr marL="0" indent="0">
               <a:buNone/>
             </a:pPr>
             <a:r>
@@ -5009,7 +4690,7 @@
           <a:bodyPr wrap="square" lIns="0" tIns="0" rIns="0" bIns="0" rtlCol="0" anchor="ctr"/>
           <a:lstStyle/>
           <a:p>
-            <a:pPr indent="0" marL="0">
+            <a:pPr marL="0" indent="0">
               <a:buNone/>
             </a:pPr>
             <a:r>
@@ -5048,7 +4729,7 @@
           <a:bodyPr wrap="square" lIns="0" tIns="0" rIns="0" bIns="0" rtlCol="0" anchor="ctr"/>
           <a:lstStyle/>
           <a:p>
-            <a:pPr indent="0" marL="0">
+            <a:pPr marL="0" indent="0">
               <a:buNone/>
             </a:pPr>
             <a:r>
@@ -5087,7 +4768,7 @@
           <a:bodyPr wrap="square" lIns="0" tIns="0" rIns="0" bIns="0" rtlCol="0" anchor="ctr"/>
           <a:lstStyle/>
           <a:p>
-            <a:pPr indent="0" marL="0">
+            <a:pPr marL="0" indent="0">
               <a:buNone/>
             </a:pPr>
             <a:r>
@@ -5166,7 +4847,7 @@
           <a:bodyPr wrap="square" lIns="0" tIns="0" rIns="0" bIns="0" rtlCol="0" anchor="ctr"/>
           <a:lstStyle/>
           <a:p>
-            <a:pPr indent="0" marL="0">
+            <a:pPr marL="0" indent="0">
               <a:buNone/>
             </a:pPr>
             <a:r>
@@ -5205,7 +4886,7 @@
           <a:bodyPr wrap="square" lIns="0" tIns="0" rIns="0" bIns="0" rtlCol="0" anchor="ctr"/>
           <a:lstStyle/>
           <a:p>
-            <a:pPr indent="0" marL="0">
+            <a:pPr marL="0" indent="0">
               <a:buNone/>
             </a:pPr>
             <a:r>
@@ -5244,7 +4925,7 @@
           <a:bodyPr wrap="square" lIns="0" tIns="0" rIns="0" bIns="0" rtlCol="0" anchor="ctr"/>
           <a:lstStyle/>
           <a:p>
-            <a:pPr indent="0" marL="0">
+            <a:pPr marL="0" indent="0">
               <a:buNone/>
             </a:pPr>
             <a:r>
@@ -5323,7 +5004,7 @@
           <a:bodyPr wrap="square" lIns="0" tIns="0" rIns="0" bIns="0" rtlCol="0" anchor="ctr"/>
           <a:lstStyle/>
           <a:p>
-            <a:pPr indent="0" marL="0">
+            <a:pPr marL="0" indent="0">
               <a:buNone/>
             </a:pPr>
             <a:r>
@@ -5362,7 +5043,7 @@
           <a:bodyPr wrap="square" lIns="0" tIns="0" rIns="0" bIns="0" rtlCol="0" anchor="ctr"/>
           <a:lstStyle/>
           <a:p>
-            <a:pPr indent="0" marL="0">
+            <a:pPr marL="0" indent="0">
               <a:buNone/>
             </a:pPr>
             <a:r>
@@ -5401,7 +5082,7 @@
           <a:bodyPr wrap="square" lIns="0" tIns="0" rIns="0" bIns="0" rtlCol="0" anchor="ctr"/>
           <a:lstStyle/>
           <a:p>
-            <a:pPr indent="0" marL="0">
+            <a:pPr marL="0" indent="0">
               <a:buNone/>
             </a:pPr>
             <a:r>
@@ -5480,7 +5161,7 @@
           <a:bodyPr wrap="square" lIns="0" tIns="0" rIns="0" bIns="0" rtlCol="0" anchor="ctr"/>
           <a:lstStyle/>
           <a:p>
-            <a:pPr indent="0" marL="0">
+            <a:pPr marL="0" indent="0">
               <a:buNone/>
             </a:pPr>
             <a:r>
@@ -5519,7 +5200,7 @@
           <a:bodyPr wrap="square" lIns="0" tIns="0" rIns="0" bIns="0" rtlCol="0" anchor="ctr"/>
           <a:lstStyle/>
           <a:p>
-            <a:pPr indent="0" marL="0">
+            <a:pPr marL="0" indent="0">
               <a:buNone/>
             </a:pPr>
             <a:r>
@@ -5558,7 +5239,7 @@
           <a:bodyPr wrap="square" lIns="0" tIns="0" rIns="0" bIns="0" rtlCol="0" anchor="ctr"/>
           <a:lstStyle/>
           <a:p>
-            <a:pPr indent="0" marL="0">
+            <a:pPr marL="0" indent="0">
               <a:buNone/>
             </a:pPr>
             <a:r>
@@ -5617,7 +5298,7 @@
           <a:bodyPr wrap="square" lIns="0" tIns="0" rIns="0" bIns="0" rtlCol="0" anchor="ctr"/>
           <a:lstStyle/>
           <a:p>
-            <a:pPr algn="ctr" indent="0" marL="0">
+            <a:pPr marL="0" indent="0" algn="ctr">
               <a:buNone/>
             </a:pPr>
             <a:r>
@@ -5651,6 +5332,7 @@
         <a:solidFill>
           <a:srgbClr val="F5F0EB"/>
         </a:solidFill>
+        <a:effectLst/>
       </p:bgPr>
     </p:bg>
     <p:spTree>
@@ -5708,7 +5390,7 @@
           <a:bodyPr wrap="square" lIns="0" tIns="0" rIns="0" bIns="0" rtlCol="0" anchor="ctr"/>
           <a:lstStyle/>
           <a:p>
-            <a:pPr indent="0" marL="0">
+            <a:pPr marL="0" indent="0">
               <a:buNone/>
             </a:pPr>
             <a:r>
@@ -5745,7 +5427,7 @@
           </a:solidFill>
           <a:ln/>
           <a:effectLst>
-            <a:outerShdw sx="100000" sy="100000" kx="0" ky="0" algn="bl" rotWithShape="0" blurRad="76200" dist="25400" dir="8100000">
+            <a:outerShdw blurRad="76200" dist="25400" dir="8100000" algn="bl" rotWithShape="0">
               <a:srgbClr val="000000">
                 <a:alpha val="8000"/>
               </a:srgbClr>
@@ -5794,7 +5476,7 @@
           <a:bodyPr wrap="square" lIns="0" tIns="0" rIns="0" bIns="0" rtlCol="0" anchor="ctr"/>
           <a:lstStyle/>
           <a:p>
-            <a:pPr indent="0" marL="0">
+            <a:pPr marL="0" indent="0">
               <a:buNone/>
             </a:pPr>
             <a:r>
@@ -5833,7 +5515,7 @@
           <a:bodyPr wrap="square" lIns="0" tIns="0" rIns="0" bIns="0" rtlCol="0" anchor="ctr"/>
           <a:lstStyle/>
           <a:p>
-            <a:pPr indent="0" marL="0">
+            <a:pPr marL="0" indent="0">
               <a:buNone/>
             </a:pPr>
             <a:r>
@@ -6042,7 +5724,7 @@
           </a:solidFill>
           <a:ln/>
           <a:effectLst>
-            <a:outerShdw sx="100000" sy="100000" kx="0" ky="0" algn="bl" rotWithShape="0" blurRad="76200" dist="25400" dir="8100000">
+            <a:outerShdw blurRad="76200" dist="25400" dir="8100000" algn="bl" rotWithShape="0">
               <a:srgbClr val="000000">
                 <a:alpha val="8000"/>
               </a:srgbClr>
@@ -6091,7 +5773,7 @@
           <a:bodyPr wrap="square" lIns="0" tIns="0" rIns="0" bIns="0" rtlCol="0" anchor="ctr"/>
           <a:lstStyle/>
           <a:p>
-            <a:pPr indent="0" marL="0">
+            <a:pPr marL="0" indent="0">
               <a:buNone/>
             </a:pPr>
             <a:r>
@@ -6130,7 +5812,7 @@
           <a:bodyPr wrap="square" lIns="0" tIns="0" rIns="0" bIns="0" rtlCol="0" anchor="ctr"/>
           <a:lstStyle/>
           <a:p>
-            <a:pPr indent="0" marL="0">
+            <a:pPr marL="0" indent="0">
               <a:buNone/>
             </a:pPr>
             <a:r>
@@ -6404,7 +6086,7 @@
           <a:bodyPr wrap="square" lIns="0" tIns="0" rIns="0" bIns="0" rtlCol="0" anchor="ctr"/>
           <a:lstStyle/>
           <a:p>
-            <a:pPr algn="ctr" indent="0" marL="0">
+            <a:pPr marL="0" indent="0" algn="ctr">
               <a:buNone/>
             </a:pPr>
             <a:r>
@@ -6438,6 +6120,7 @@
         <a:solidFill>
           <a:srgbClr val="FFFFFF"/>
         </a:solidFill>
+        <a:effectLst/>
       </p:bgPr>
     </p:bg>
     <p:spTree>
@@ -6495,7 +6178,7 @@
           <a:bodyPr wrap="square" lIns="0" tIns="0" rIns="0" bIns="0" rtlCol="0" anchor="ctr"/>
           <a:lstStyle/>
           <a:p>
-            <a:pPr indent="0" marL="0">
+            <a:pPr marL="0" indent="0">
               <a:buNone/>
             </a:pPr>
             <a:r>
@@ -6534,7 +6217,7 @@
           <a:bodyPr wrap="square" lIns="0" tIns="0" rIns="0" bIns="0" rtlCol="0" anchor="ctr"/>
           <a:lstStyle/>
           <a:p>
-            <a:pPr indent="0" marL="0">
+            <a:pPr marL="0" indent="0">
               <a:buNone/>
             </a:pPr>
             <a:r>
@@ -6571,7 +6254,7 @@
           </a:solidFill>
           <a:ln/>
           <a:effectLst>
-            <a:outerShdw sx="100000" sy="100000" kx="0" ky="0" algn="bl" rotWithShape="0" blurRad="76200" dist="25400" dir="8100000">
+            <a:outerShdw blurRad="76200" dist="25400" dir="8100000" algn="bl" rotWithShape="0">
               <a:srgbClr val="000000">
                 <a:alpha val="8000"/>
               </a:srgbClr>
@@ -6620,7 +6303,7 @@
           <a:bodyPr wrap="square" lIns="0" tIns="0" rIns="0" bIns="0" rtlCol="0" anchor="ctr"/>
           <a:lstStyle/>
           <a:p>
-            <a:pPr indent="0" marL="0">
+            <a:pPr marL="0" indent="0">
               <a:buNone/>
             </a:pPr>
             <a:r>
@@ -6661,7 +6344,7 @@
           <a:bodyPr wrap="square" lIns="1270" tIns="1270" rIns="1270" bIns="1270" rtlCol="0" anchor="t"/>
           <a:lstStyle/>
           <a:p>
-            <a:pPr indent="0" marL="0">
+            <a:pPr marL="0" indent="0">
               <a:buNone/>
             </a:pPr>
             <a:r>
@@ -6678,7 +6361,7 @@
             <a:endParaRPr lang="en-US" sz="1200" dirty="0"/>
           </a:p>
           <a:p>
-            <a:pPr indent="0" marL="0">
+            <a:pPr marL="0" indent="0">
               <a:buNone/>
             </a:pPr>
             <a:r>
@@ -6695,7 +6378,7 @@
             <a:endParaRPr lang="en-US" sz="1200" dirty="0"/>
           </a:p>
           <a:p>
-            <a:pPr indent="0" marL="0">
+            <a:pPr marL="0" indent="0">
               <a:buNone/>
             </a:pPr>
             <a:r>
@@ -6712,7 +6395,7 @@
             <a:endParaRPr lang="en-US" sz="1200" dirty="0"/>
           </a:p>
           <a:p>
-            <a:pPr indent="0" marL="0">
+            <a:pPr marL="0" indent="0">
               <a:buNone/>
             </a:pPr>
             <a:r>
@@ -6729,7 +6412,7 @@
             <a:endParaRPr lang="en-US" sz="1200" dirty="0"/>
           </a:p>
           <a:p>
-            <a:pPr indent="0" marL="0">
+            <a:pPr marL="0" indent="0">
               <a:buNone/>
             </a:pPr>
             <a:r>
@@ -6766,7 +6449,7 @@
           </a:solidFill>
           <a:ln/>
           <a:effectLst>
-            <a:outerShdw sx="100000" sy="100000" kx="0" ky="0" algn="bl" rotWithShape="0" blurRad="76200" dist="25400" dir="8100000">
+            <a:outerShdw blurRad="76200" dist="25400" dir="8100000" algn="bl" rotWithShape="0">
               <a:srgbClr val="000000">
                 <a:alpha val="8000"/>
               </a:srgbClr>
@@ -6815,7 +6498,7 @@
           <a:bodyPr wrap="square" lIns="0" tIns="0" rIns="0" bIns="0" rtlCol="0" anchor="ctr"/>
           <a:lstStyle/>
           <a:p>
-            <a:pPr indent="0" marL="0">
+            <a:pPr marL="0" indent="0">
               <a:buNone/>
             </a:pPr>
             <a:r>
@@ -6856,7 +6539,7 @@
           <a:bodyPr wrap="square" lIns="1270" tIns="1270" rIns="1270" bIns="1270" rtlCol="0" anchor="t"/>
           <a:lstStyle/>
           <a:p>
-            <a:pPr indent="0" marL="0">
+            <a:pPr marL="0" indent="0">
               <a:buNone/>
             </a:pPr>
             <a:r>
@@ -6873,7 +6556,7 @@
             <a:endParaRPr lang="en-US" sz="1000" dirty="0"/>
           </a:p>
           <a:p>
-            <a:pPr indent="0" marL="0">
+            <a:pPr marL="0" indent="0">
               <a:buNone/>
             </a:pPr>
             <a:r>
@@ -6890,7 +6573,7 @@
             <a:endParaRPr lang="en-US" sz="1000" dirty="0"/>
           </a:p>
           <a:p>
-            <a:pPr indent="0" marL="0">
+            <a:pPr marL="0" indent="0">
               <a:buNone/>
             </a:pPr>
             <a:r>
@@ -6907,7 +6590,7 @@
             <a:endParaRPr lang="en-US" sz="1000" dirty="0"/>
           </a:p>
           <a:p>
-            <a:pPr indent="0" marL="0">
+            <a:pPr marL="0" indent="0">
               <a:buNone/>
             </a:pPr>
             <a:r>
@@ -6924,13 +6607,13 @@
             <a:endParaRPr lang="en-US" sz="1000" dirty="0"/>
           </a:p>
           <a:p>
-            <a:pPr indent="0" marL="0">
+            <a:pPr marL="0" indent="0">
               <a:buNone/>
             </a:pPr>
             <a:endParaRPr lang="en-US" sz="1000" dirty="0"/>
           </a:p>
           <a:p>
-            <a:pPr indent="0" marL="0">
+            <a:pPr marL="0" indent="0">
               <a:buNone/>
             </a:pPr>
             <a:r>
@@ -6947,7 +6630,7 @@
             <a:endParaRPr lang="en-US" sz="1000" dirty="0"/>
           </a:p>
           <a:p>
-            <a:pPr indent="0" marL="0">
+            <a:pPr marL="0" indent="0">
               <a:buNone/>
             </a:pPr>
             <a:r>
@@ -6986,7 +6669,7 @@
           <a:bodyPr wrap="square" lIns="0" tIns="0" rIns="0" bIns="0" rtlCol="0" anchor="ctr"/>
           <a:lstStyle/>
           <a:p>
-            <a:pPr indent="0" marL="0">
+            <a:pPr marL="0" indent="0">
               <a:buNone/>
             </a:pPr>
             <a:r>
@@ -7149,6 +6832,7 @@
         <a:solidFill>
           <a:srgbClr val="F5F0EB"/>
         </a:solidFill>
+        <a:effectLst/>
       </p:bgPr>
     </p:bg>
     <p:spTree>
@@ -7206,7 +6890,7 @@
           <a:bodyPr wrap="square" lIns="0" tIns="0" rIns="0" bIns="0" rtlCol="0" anchor="ctr"/>
           <a:lstStyle/>
           <a:p>
-            <a:pPr indent="0" marL="0">
+            <a:pPr marL="0" indent="0">
               <a:buNone/>
             </a:pPr>
             <a:r>
@@ -7245,7 +6929,7 @@
           <a:bodyPr wrap="square" lIns="0" tIns="0" rIns="0" bIns="0" rtlCol="0" anchor="ctr"/>
           <a:lstStyle/>
           <a:p>
-            <a:pPr indent="0" marL="0">
+            <a:pPr marL="0" indent="0">
               <a:buNone/>
             </a:pPr>
             <a:r>
@@ -7282,7 +6966,7 @@
           </a:solidFill>
           <a:ln/>
           <a:effectLst>
-            <a:outerShdw sx="100000" sy="100000" kx="0" ky="0" algn="bl" rotWithShape="0" blurRad="76200" dist="25400" dir="8100000">
+            <a:outerShdw blurRad="76200" dist="25400" dir="8100000" algn="bl" rotWithShape="0">
               <a:srgbClr val="000000">
                 <a:alpha val="8000"/>
               </a:srgbClr>
@@ -7331,7 +7015,7 @@
           <a:bodyPr wrap="square" lIns="0" tIns="0" rIns="0" bIns="0" rtlCol="0" anchor="ctr"/>
           <a:lstStyle/>
           <a:p>
-            <a:pPr indent="0" marL="0">
+            <a:pPr marL="0" indent="0">
               <a:buNone/>
             </a:pPr>
             <a:r>
@@ -7372,7 +7056,7 @@
           <a:bodyPr wrap="square" lIns="1270" tIns="1270" rIns="1270" bIns="1270" rtlCol="0" anchor="t"/>
           <a:lstStyle/>
           <a:p>
-            <a:pPr indent="0" marL="0">
+            <a:pPr marL="0" indent="0">
               <a:buNone/>
             </a:pPr>
             <a:r>
@@ -7389,13 +7073,13 @@
             <a:endParaRPr lang="en-US" sz="900" dirty="0"/>
           </a:p>
           <a:p>
-            <a:pPr indent="0" marL="0">
+            <a:pPr marL="0" indent="0">
               <a:buNone/>
             </a:pPr>
             <a:endParaRPr lang="en-US" sz="900" dirty="0"/>
           </a:p>
           <a:p>
-            <a:pPr indent="0" marL="0">
+            <a:pPr marL="0" indent="0">
               <a:buNone/>
             </a:pPr>
             <a:r>
@@ -7412,7 +7096,7 @@
             <a:endParaRPr lang="en-US" sz="900" dirty="0"/>
           </a:p>
           <a:p>
-            <a:pPr indent="0" marL="0">
+            <a:pPr marL="0" indent="0">
               <a:buNone/>
             </a:pPr>
             <a:r>
@@ -7429,7 +7113,7 @@
             <a:endParaRPr lang="en-US" sz="900" dirty="0"/>
           </a:p>
           <a:p>
-            <a:pPr indent="0" marL="0">
+            <a:pPr marL="0" indent="0">
               <a:buNone/>
             </a:pPr>
             <a:r>
@@ -7446,7 +7130,7 @@
             <a:endParaRPr lang="en-US" sz="900" dirty="0"/>
           </a:p>
           <a:p>
-            <a:pPr indent="0" marL="0">
+            <a:pPr marL="0" indent="0">
               <a:buNone/>
             </a:pPr>
             <a:r>
@@ -7463,7 +7147,7 @@
             <a:endParaRPr lang="en-US" sz="900" dirty="0"/>
           </a:p>
           <a:p>
-            <a:pPr indent="0" marL="0">
+            <a:pPr marL="0" indent="0">
               <a:buNone/>
             </a:pPr>
             <a:r>
@@ -7480,7 +7164,7 @@
             <a:endParaRPr lang="en-US" sz="900" dirty="0"/>
           </a:p>
           <a:p>
-            <a:pPr indent="0" marL="0">
+            <a:pPr marL="0" indent="0">
               <a:buNone/>
             </a:pPr>
             <a:r>
@@ -7497,7 +7181,7 @@
             <a:endParaRPr lang="en-US" sz="900" dirty="0"/>
           </a:p>
           <a:p>
-            <a:pPr indent="0" marL="0">
+            <a:pPr marL="0" indent="0">
               <a:buNone/>
             </a:pPr>
             <a:r>
@@ -7514,7 +7198,7 @@
             <a:endParaRPr lang="en-US" sz="900" dirty="0"/>
           </a:p>
           <a:p>
-            <a:pPr indent="0" marL="0">
+            <a:pPr marL="0" indent="0">
               <a:buNone/>
             </a:pPr>
             <a:r>
@@ -7531,13 +7215,13 @@
             <a:endParaRPr lang="en-US" sz="900" dirty="0"/>
           </a:p>
           <a:p>
-            <a:pPr indent="0" marL="0">
+            <a:pPr marL="0" indent="0">
               <a:buNone/>
             </a:pPr>
             <a:endParaRPr lang="en-US" sz="900" dirty="0"/>
           </a:p>
           <a:p>
-            <a:pPr indent="0" marL="0">
+            <a:pPr marL="0" indent="0">
               <a:buNone/>
             </a:pPr>
             <a:r>
@@ -7554,7 +7238,7 @@
             <a:endParaRPr lang="en-US" sz="900" dirty="0"/>
           </a:p>
           <a:p>
-            <a:pPr indent="0" marL="0">
+            <a:pPr marL="0" indent="0">
               <a:buNone/>
             </a:pPr>
             <a:r>
@@ -7571,7 +7255,7 @@
             <a:endParaRPr lang="en-US" sz="900" dirty="0"/>
           </a:p>
           <a:p>
-            <a:pPr indent="0" marL="0">
+            <a:pPr marL="0" indent="0">
               <a:buNone/>
             </a:pPr>
             <a:r>
@@ -7588,7 +7272,7 @@
             <a:endParaRPr lang="en-US" sz="900" dirty="0"/>
           </a:p>
           <a:p>
-            <a:pPr indent="0" marL="0">
+            <a:pPr marL="0" indent="0">
               <a:buNone/>
             </a:pPr>
             <a:r>
@@ -7605,7 +7289,7 @@
             <a:endParaRPr lang="en-US" sz="900" dirty="0"/>
           </a:p>
           <a:p>
-            <a:pPr indent="0" marL="0">
+            <a:pPr marL="0" indent="0">
               <a:buNone/>
             </a:pPr>
             <a:r>
@@ -7642,7 +7326,7 @@
           </a:solidFill>
           <a:ln/>
           <a:effectLst>
-            <a:outerShdw sx="100000" sy="100000" kx="0" ky="0" algn="bl" rotWithShape="0" blurRad="76200" dist="25400" dir="8100000">
+            <a:outerShdw blurRad="76200" dist="25400" dir="8100000" algn="bl" rotWithShape="0">
               <a:srgbClr val="000000">
                 <a:alpha val="8000"/>
               </a:srgbClr>
@@ -7691,7 +7375,7 @@
           <a:bodyPr wrap="square" lIns="0" tIns="0" rIns="0" bIns="0" rtlCol="0" anchor="ctr"/>
           <a:lstStyle/>
           <a:p>
-            <a:pPr indent="0" marL="0">
+            <a:pPr marL="0" indent="0">
               <a:buNone/>
             </a:pPr>
             <a:r>
@@ -7730,7 +7414,7 @@
           <a:bodyPr wrap="square" lIns="0" tIns="0" rIns="0" bIns="0" rtlCol="0" anchor="ctr"/>
           <a:lstStyle/>
           <a:p>
-            <a:pPr indent="0" marL="0">
+            <a:pPr marL="0" indent="0">
               <a:buNone/>
             </a:pPr>
             <a:r>
@@ -7769,7 +7453,7 @@
           <a:bodyPr wrap="square" lIns="0" tIns="0" rIns="0" bIns="0" rtlCol="0" anchor="ctr"/>
           <a:lstStyle/>
           <a:p>
-            <a:pPr indent="0" marL="0">
+            <a:pPr marL="0" indent="0">
               <a:buNone/>
             </a:pPr>
             <a:r>
@@ -7808,7 +7492,7 @@
           <a:bodyPr wrap="square" lIns="0" tIns="0" rIns="0" bIns="0" rtlCol="0" anchor="ctr"/>
           <a:lstStyle/>
           <a:p>
-            <a:pPr indent="0" marL="0">
+            <a:pPr marL="0" indent="0">
               <a:buNone/>
             </a:pPr>
             <a:r>
@@ -7867,7 +7551,7 @@
           <a:bodyPr wrap="square" lIns="0" tIns="0" rIns="0" bIns="0" rtlCol="0" anchor="ctr"/>
           <a:lstStyle/>
           <a:p>
-            <a:pPr indent="0" marL="0">
+            <a:pPr marL="0" indent="0">
               <a:buNone/>
             </a:pPr>
             <a:r>
@@ -7906,7 +7590,7 @@
           <a:bodyPr wrap="square" lIns="0" tIns="0" rIns="0" bIns="0" rtlCol="0" anchor="ctr"/>
           <a:lstStyle/>
           <a:p>
-            <a:pPr indent="0" marL="0">
+            <a:pPr marL="0" indent="0">
               <a:buNone/>
             </a:pPr>
             <a:r>
@@ -7945,7 +7629,7 @@
           <a:bodyPr wrap="square" lIns="0" tIns="0" rIns="0" bIns="0" rtlCol="0" anchor="ctr"/>
           <a:lstStyle/>
           <a:p>
-            <a:pPr indent="0" marL="0">
+            <a:pPr marL="0" indent="0">
               <a:buNone/>
             </a:pPr>
             <a:r>
@@ -8004,7 +7688,7 @@
           <a:bodyPr wrap="square" lIns="0" tIns="0" rIns="0" bIns="0" rtlCol="0" anchor="ctr"/>
           <a:lstStyle/>
           <a:p>
-            <a:pPr indent="0" marL="0">
+            <a:pPr marL="0" indent="0">
               <a:buNone/>
             </a:pPr>
             <a:r>
@@ -8043,7 +7727,7 @@
           <a:bodyPr wrap="square" lIns="0" tIns="0" rIns="0" bIns="0" rtlCol="0" anchor="ctr"/>
           <a:lstStyle/>
           <a:p>
-            <a:pPr indent="0" marL="0">
+            <a:pPr marL="0" indent="0">
               <a:buNone/>
             </a:pPr>
             <a:r>
@@ -8082,7 +7766,7 @@
           <a:bodyPr wrap="square" lIns="0" tIns="0" rIns="0" bIns="0" rtlCol="0" anchor="ctr"/>
           <a:lstStyle/>
           <a:p>
-            <a:pPr indent="0" marL="0">
+            <a:pPr marL="0" indent="0">
               <a:buNone/>
             </a:pPr>
             <a:r>
@@ -8141,7 +7825,7 @@
           <a:bodyPr wrap="square" lIns="0" tIns="0" rIns="0" bIns="0" rtlCol="0" anchor="ctr"/>
           <a:lstStyle/>
           <a:p>
-            <a:pPr indent="0" marL="0">
+            <a:pPr marL="0" indent="0">
               <a:buNone/>
             </a:pPr>
             <a:r>
@@ -8180,7 +7864,7 @@
           <a:bodyPr wrap="square" lIns="0" tIns="0" rIns="0" bIns="0" rtlCol="0" anchor="ctr"/>
           <a:lstStyle/>
           <a:p>
-            <a:pPr indent="0" marL="0">
+            <a:pPr marL="0" indent="0">
               <a:buNone/>
             </a:pPr>
             <a:r>
@@ -8219,7 +7903,7 @@
           <a:bodyPr wrap="square" lIns="0" tIns="0" rIns="0" bIns="0" rtlCol="0" anchor="ctr"/>
           <a:lstStyle/>
           <a:p>
-            <a:pPr indent="0" marL="0">
+            <a:pPr marL="0" indent="0">
               <a:buNone/>
             </a:pPr>
             <a:r>
@@ -8278,7 +7962,7 @@
           <a:bodyPr wrap="square" lIns="0" tIns="0" rIns="0" bIns="0" rtlCol="0" anchor="ctr"/>
           <a:lstStyle/>
           <a:p>
-            <a:pPr indent="0" marL="0">
+            <a:pPr marL="0" indent="0">
               <a:buNone/>
             </a:pPr>
             <a:r>
@@ -8317,7 +8001,7 @@
           <a:bodyPr wrap="square" lIns="0" tIns="0" rIns="0" bIns="0" rtlCol="0" anchor="ctr"/>
           <a:lstStyle/>
           <a:p>
-            <a:pPr indent="0" marL="0">
+            <a:pPr marL="0" indent="0">
               <a:buNone/>
             </a:pPr>
             <a:r>
@@ -8356,7 +8040,7 @@
           <a:bodyPr wrap="square" lIns="0" tIns="0" rIns="0" bIns="0" rtlCol="0" anchor="ctr"/>
           <a:lstStyle/>
           <a:p>
-            <a:pPr indent="0" marL="0">
+            <a:pPr marL="0" indent="0">
               <a:buNone/>
             </a:pPr>
             <a:r>
@@ -8415,7 +8099,7 @@
           <a:bodyPr wrap="square" lIns="0" tIns="0" rIns="0" bIns="0" rtlCol="0" anchor="ctr"/>
           <a:lstStyle/>
           <a:p>
-            <a:pPr indent="0" marL="0">
+            <a:pPr marL="0" indent="0">
               <a:buNone/>
             </a:pPr>
             <a:r>
@@ -8454,7 +8138,7 @@
           <a:bodyPr wrap="square" lIns="0" tIns="0" rIns="0" bIns="0" rtlCol="0" anchor="ctr"/>
           <a:lstStyle/>
           <a:p>
-            <a:pPr indent="0" marL="0">
+            <a:pPr marL="0" indent="0">
               <a:buNone/>
             </a:pPr>
             <a:r>
@@ -8493,7 +8177,7 @@
           <a:bodyPr wrap="square" lIns="0" tIns="0" rIns="0" bIns="0" rtlCol="0" anchor="ctr"/>
           <a:lstStyle/>
           <a:p>
-            <a:pPr indent="0" marL="0">
+            <a:pPr marL="0" indent="0">
               <a:buNone/>
             </a:pPr>
             <a:r>
@@ -8527,6 +8211,7 @@
         <a:solidFill>
           <a:srgbClr val="FFFFFF"/>
         </a:solidFill>
+        <a:effectLst/>
       </p:bgPr>
     </p:bg>
     <p:spTree>
@@ -8584,7 +8269,7 @@
           <a:bodyPr wrap="square" lIns="0" tIns="0" rIns="0" bIns="0" rtlCol="0" anchor="ctr"/>
           <a:lstStyle/>
           <a:p>
-            <a:pPr indent="0" marL="0">
+            <a:pPr marL="0" indent="0">
               <a:buNone/>
             </a:pPr>
             <a:r>
@@ -8618,16 +8303,34 @@
         </p:nvGraphicFramePr>
         <p:xfrm>
           <a:off x="548640" y="1097280"/>
-          <a:ext cx="8046720" cy="914400"/>
+          <a:ext cx="8046720" cy="2971800"/>
         </p:xfrm>
         <a:graphic>
           <a:graphicData uri="http://schemas.openxmlformats.org/drawingml/2006/table">
             <a:tbl>
               <a:tblPr/>
               <a:tblGrid>
-                <a:gridCol w="1188720"/>
-                <a:gridCol w="2926080"/>
-                <a:gridCol w="3931920"/>
+                <a:gridCol w="1188720">
+                  <a:extLst>
+                    <a:ext uri="{9D8B030D-6E8A-4147-A177-3AD203B41FA5}">
+                      <a16:colId xmlns:a16="http://schemas.microsoft.com/office/drawing/2014/main" val="20000"/>
+                    </a:ext>
+                  </a:extLst>
+                </a:gridCol>
+                <a:gridCol w="2926080">
+                  <a:extLst>
+                    <a:ext uri="{9D8B030D-6E8A-4147-A177-3AD203B41FA5}">
+                      <a16:colId xmlns:a16="http://schemas.microsoft.com/office/drawing/2014/main" val="20001"/>
+                    </a:ext>
+                  </a:extLst>
+                </a:gridCol>
+                <a:gridCol w="3931920">
+                  <a:extLst>
+                    <a:ext uri="{9D8B030D-6E8A-4147-A177-3AD203B41FA5}">
+                      <a16:colId xmlns:a16="http://schemas.microsoft.com/office/drawing/2014/main" val="20002"/>
+                    </a:ext>
+                  </a:extLst>
+                </a:gridCol>
               </a:tblGrid>
               <a:tr h="411480">
                 <a:tc>
@@ -8635,7 +8338,7 @@
                     <a:bodyPr/>
                     <a:lstStyle/>
                     <a:p>
-                      <a:pPr algn="ctr" indent="0" marL="0">
+                      <a:pPr marL="0" indent="0" algn="ctr">
                         <a:buNone/>
                       </a:pPr>
                       <a:r>
@@ -8656,7 +8359,7 @@
                       </a:endParaRPr>
                     </a:p>
                   </a:txBody>
-                  <a:tcPr marL="91440" marR="91440" marT="45720" marB="45720" anchor="ctr">
+                  <a:tcPr anchor="ctr">
                     <a:lnL w="6350" cap="flat" cmpd="sng" algn="ctr">
                       <a:solidFill>
                         <a:srgbClr val="E5E7EB"/>
@@ -8703,7 +8406,7 @@
                     <a:bodyPr/>
                     <a:lstStyle/>
                     <a:p>
-                      <a:pPr algn="ctr" indent="0" marL="0">
+                      <a:pPr marL="0" indent="0" algn="ctr">
                         <a:buNone/>
                       </a:pPr>
                       <a:r>
@@ -8724,7 +8427,7 @@
                       </a:endParaRPr>
                     </a:p>
                   </a:txBody>
-                  <a:tcPr marL="91440" marR="91440" marT="45720" marB="45720" anchor="ctr">
+                  <a:tcPr anchor="ctr">
                     <a:lnL w="6350" cap="flat" cmpd="sng" algn="ctr">
                       <a:solidFill>
                         <a:srgbClr val="E5E7EB"/>
@@ -8771,7 +8474,7 @@
                     <a:bodyPr/>
                     <a:lstStyle/>
                     <a:p>
-                      <a:pPr algn="ctr" indent="0" marL="0">
+                      <a:pPr marL="0" indent="0" algn="ctr">
                         <a:buNone/>
                       </a:pPr>
                       <a:r>
@@ -8792,7 +8495,7 @@
                       </a:endParaRPr>
                     </a:p>
                   </a:txBody>
-                  <a:tcPr marL="91440" marR="91440" marT="45720" marB="45720" anchor="ctr">
+                  <a:tcPr anchor="ctr">
                     <a:lnL w="6350" cap="flat" cmpd="sng" algn="ctr">
                       <a:solidFill>
                         <a:srgbClr val="E5E7EB"/>
@@ -8834,6 +8537,11 @@
                     </a:solidFill>
                   </a:tcPr>
                 </a:tc>
+                <a:extLst>
+                  <a:ext uri="{0D108BD9-81ED-4DB2-BD59-A6C34878D82A}">
+                    <a16:rowId xmlns:a16="http://schemas.microsoft.com/office/drawing/2014/main" val="10000"/>
+                  </a:ext>
+                </a:extLst>
               </a:tr>
               <a:tr h="365760">
                 <a:tc>
@@ -8841,7 +8549,7 @@
                     <a:bodyPr/>
                     <a:lstStyle/>
                     <a:p>
-                      <a:pPr indent="0" marL="0">
+                      <a:pPr marL="0" indent="0">
                         <a:buNone/>
                       </a:pPr>
                       <a:r>
@@ -8862,7 +8570,7 @@
                       </a:endParaRPr>
                     </a:p>
                   </a:txBody>
-                  <a:tcPr marL="91440" marR="91440" marT="45720" marB="45720" anchor="ctr">
+                  <a:tcPr anchor="ctr">
                     <a:lnL w="6350" cap="flat" cmpd="sng" algn="ctr">
                       <a:solidFill>
                         <a:srgbClr val="E5E7EB"/>
@@ -8906,7 +8614,7 @@
                     <a:bodyPr/>
                     <a:lstStyle/>
                     <a:p>
-                      <a:pPr indent="0" marL="0">
+                      <a:pPr marL="0" indent="0">
                         <a:buNone/>
                       </a:pPr>
                       <a:r>
@@ -8927,7 +8635,7 @@
                       </a:endParaRPr>
                     </a:p>
                   </a:txBody>
-                  <a:tcPr marL="91440" marR="91440" marT="45720" marB="45720" anchor="ctr">
+                  <a:tcPr anchor="ctr">
                     <a:lnL w="6350" cap="flat" cmpd="sng" algn="ctr">
                       <a:solidFill>
                         <a:srgbClr val="E5E7EB"/>
@@ -8971,7 +8679,7 @@
                     <a:bodyPr/>
                     <a:lstStyle/>
                     <a:p>
-                      <a:pPr indent="0" marL="0">
+                      <a:pPr marL="0" indent="0">
                         <a:buNone/>
                       </a:pPr>
                       <a:r>
@@ -8992,7 +8700,7 @@
                       </a:endParaRPr>
                     </a:p>
                   </a:txBody>
-                  <a:tcPr marL="91440" marR="91440" marT="45720" marB="45720" anchor="ctr">
+                  <a:tcPr anchor="ctr">
                     <a:lnL w="6350" cap="flat" cmpd="sng" algn="ctr">
                       <a:solidFill>
                         <a:srgbClr val="E5E7EB"/>
@@ -9031,6 +8739,11 @@
                     </a:lnB>
                   </a:tcPr>
                 </a:tc>
+                <a:extLst>
+                  <a:ext uri="{0D108BD9-81ED-4DB2-BD59-A6C34878D82A}">
+                    <a16:rowId xmlns:a16="http://schemas.microsoft.com/office/drawing/2014/main" val="10001"/>
+                  </a:ext>
+                </a:extLst>
               </a:tr>
               <a:tr h="365760">
                 <a:tc>
@@ -9038,7 +8751,7 @@
                     <a:bodyPr/>
                     <a:lstStyle/>
                     <a:p>
-                      <a:pPr indent="0" marL="0">
+                      <a:pPr marL="0" indent="0">
                         <a:buNone/>
                       </a:pPr>
                       <a:r>
@@ -9059,7 +8772,7 @@
                       </a:endParaRPr>
                     </a:p>
                   </a:txBody>
-                  <a:tcPr marL="91440" marR="91440" marT="45720" marB="45720" anchor="ctr">
+                  <a:tcPr anchor="ctr">
                     <a:lnL w="6350" cap="flat" cmpd="sng" algn="ctr">
                       <a:solidFill>
                         <a:srgbClr val="E5E7EB"/>
@@ -9103,7 +8816,7 @@
                     <a:bodyPr/>
                     <a:lstStyle/>
                     <a:p>
-                      <a:pPr indent="0" marL="0">
+                      <a:pPr marL="0" indent="0">
                         <a:buNone/>
                       </a:pPr>
                       <a:r>
@@ -9124,7 +8837,7 @@
                       </a:endParaRPr>
                     </a:p>
                   </a:txBody>
-                  <a:tcPr marL="91440" marR="91440" marT="45720" marB="45720" anchor="ctr">
+                  <a:tcPr anchor="ctr">
                     <a:lnL w="6350" cap="flat" cmpd="sng" algn="ctr">
                       <a:solidFill>
                         <a:srgbClr val="E5E7EB"/>
@@ -9168,7 +8881,7 @@
                     <a:bodyPr/>
                     <a:lstStyle/>
                     <a:p>
-                      <a:pPr indent="0" marL="0">
+                      <a:pPr marL="0" indent="0">
                         <a:buNone/>
                       </a:pPr>
                       <a:r>
@@ -9189,7 +8902,7 @@
                       </a:endParaRPr>
                     </a:p>
                   </a:txBody>
-                  <a:tcPr marL="91440" marR="91440" marT="45720" marB="45720" anchor="ctr">
+                  <a:tcPr anchor="ctr">
                     <a:lnL w="6350" cap="flat" cmpd="sng" algn="ctr">
                       <a:solidFill>
                         <a:srgbClr val="E5E7EB"/>
@@ -9228,6 +8941,11 @@
                     </a:lnB>
                   </a:tcPr>
                 </a:tc>
+                <a:extLst>
+                  <a:ext uri="{0D108BD9-81ED-4DB2-BD59-A6C34878D82A}">
+                    <a16:rowId xmlns:a16="http://schemas.microsoft.com/office/drawing/2014/main" val="10002"/>
+                  </a:ext>
+                </a:extLst>
               </a:tr>
               <a:tr h="365760">
                 <a:tc>
@@ -9235,7 +8953,7 @@
                     <a:bodyPr/>
                     <a:lstStyle/>
                     <a:p>
-                      <a:pPr indent="0" marL="0">
+                      <a:pPr marL="0" indent="0">
                         <a:buNone/>
                       </a:pPr>
                       <a:r>
@@ -9256,7 +8974,7 @@
                       </a:endParaRPr>
                     </a:p>
                   </a:txBody>
-                  <a:tcPr marL="91440" marR="91440" marT="45720" marB="45720" anchor="ctr">
+                  <a:tcPr anchor="ctr">
                     <a:lnL w="6350" cap="flat" cmpd="sng" algn="ctr">
                       <a:solidFill>
                         <a:srgbClr val="E5E7EB"/>
@@ -9300,7 +9018,7 @@
                     <a:bodyPr/>
                     <a:lstStyle/>
                     <a:p>
-                      <a:pPr indent="0" marL="0">
+                      <a:pPr marL="0" indent="0">
                         <a:buNone/>
                       </a:pPr>
                       <a:r>
@@ -9321,7 +9039,7 @@
                       </a:endParaRPr>
                     </a:p>
                   </a:txBody>
-                  <a:tcPr marL="91440" marR="91440" marT="45720" marB="45720" anchor="ctr">
+                  <a:tcPr anchor="ctr">
                     <a:lnL w="6350" cap="flat" cmpd="sng" algn="ctr">
                       <a:solidFill>
                         <a:srgbClr val="E5E7EB"/>
@@ -9365,7 +9083,7 @@
                     <a:bodyPr/>
                     <a:lstStyle/>
                     <a:p>
-                      <a:pPr indent="0" marL="0">
+                      <a:pPr marL="0" indent="0">
                         <a:buNone/>
                       </a:pPr>
                       <a:r>
@@ -9386,7 +9104,7 @@
                       </a:endParaRPr>
                     </a:p>
                   </a:txBody>
-                  <a:tcPr marL="91440" marR="91440" marT="45720" marB="45720" anchor="ctr">
+                  <a:tcPr anchor="ctr">
                     <a:lnL w="6350" cap="flat" cmpd="sng" algn="ctr">
                       <a:solidFill>
                         <a:srgbClr val="E5E7EB"/>
@@ -9425,6 +9143,11 @@
                     </a:lnB>
                   </a:tcPr>
                 </a:tc>
+                <a:extLst>
+                  <a:ext uri="{0D108BD9-81ED-4DB2-BD59-A6C34878D82A}">
+                    <a16:rowId xmlns:a16="http://schemas.microsoft.com/office/drawing/2014/main" val="10003"/>
+                  </a:ext>
+                </a:extLst>
               </a:tr>
               <a:tr h="365760">
                 <a:tc>
@@ -9432,7 +9155,7 @@
                     <a:bodyPr/>
                     <a:lstStyle/>
                     <a:p>
-                      <a:pPr indent="0" marL="0">
+                      <a:pPr marL="0" indent="0">
                         <a:buNone/>
                       </a:pPr>
                       <a:r>
@@ -9453,7 +9176,7 @@
                       </a:endParaRPr>
                     </a:p>
                   </a:txBody>
-                  <a:tcPr marL="91440" marR="91440" marT="45720" marB="45720" anchor="ctr">
+                  <a:tcPr anchor="ctr">
                     <a:lnL w="6350" cap="flat" cmpd="sng" algn="ctr">
                       <a:solidFill>
                         <a:srgbClr val="E5E7EB"/>
@@ -9497,7 +9220,7 @@
                     <a:bodyPr/>
                     <a:lstStyle/>
                     <a:p>
-                      <a:pPr indent="0" marL="0">
+                      <a:pPr marL="0" indent="0">
                         <a:buNone/>
                       </a:pPr>
                       <a:r>
@@ -9518,7 +9241,7 @@
                       </a:endParaRPr>
                     </a:p>
                   </a:txBody>
-                  <a:tcPr marL="91440" marR="91440" marT="45720" marB="45720" anchor="ctr">
+                  <a:tcPr anchor="ctr">
                     <a:lnL w="6350" cap="flat" cmpd="sng" algn="ctr">
                       <a:solidFill>
                         <a:srgbClr val="E5E7EB"/>
@@ -9562,7 +9285,7 @@
                     <a:bodyPr/>
                     <a:lstStyle/>
                     <a:p>
-                      <a:pPr indent="0" marL="0">
+                      <a:pPr marL="0" indent="0">
                         <a:buNone/>
                       </a:pPr>
                       <a:r>
@@ -9583,7 +9306,7 @@
                       </a:endParaRPr>
                     </a:p>
                   </a:txBody>
-                  <a:tcPr marL="91440" marR="91440" marT="45720" marB="45720" anchor="ctr">
+                  <a:tcPr anchor="ctr">
                     <a:lnL w="6350" cap="flat" cmpd="sng" algn="ctr">
                       <a:solidFill>
                         <a:srgbClr val="E5E7EB"/>
@@ -9622,6 +9345,11 @@
                     </a:lnB>
                   </a:tcPr>
                 </a:tc>
+                <a:extLst>
+                  <a:ext uri="{0D108BD9-81ED-4DB2-BD59-A6C34878D82A}">
+                    <a16:rowId xmlns:a16="http://schemas.microsoft.com/office/drawing/2014/main" val="10004"/>
+                  </a:ext>
+                </a:extLst>
               </a:tr>
               <a:tr h="365760">
                 <a:tc>
@@ -9629,7 +9357,7 @@
                     <a:bodyPr/>
                     <a:lstStyle/>
                     <a:p>
-                      <a:pPr indent="0" marL="0">
+                      <a:pPr marL="0" indent="0">
                         <a:buNone/>
                       </a:pPr>
                       <a:r>
@@ -9650,7 +9378,7 @@
                       </a:endParaRPr>
                     </a:p>
                   </a:txBody>
-                  <a:tcPr marL="91440" marR="91440" marT="45720" marB="45720" anchor="ctr">
+                  <a:tcPr anchor="ctr">
                     <a:lnL w="6350" cap="flat" cmpd="sng" algn="ctr">
                       <a:solidFill>
                         <a:srgbClr val="E5E7EB"/>
@@ -9694,7 +9422,7 @@
                     <a:bodyPr/>
                     <a:lstStyle/>
                     <a:p>
-                      <a:pPr indent="0" marL="0">
+                      <a:pPr marL="0" indent="0">
                         <a:buNone/>
                       </a:pPr>
                       <a:r>
@@ -9715,7 +9443,7 @@
                       </a:endParaRPr>
                     </a:p>
                   </a:txBody>
-                  <a:tcPr marL="91440" marR="91440" marT="45720" marB="45720" anchor="ctr">
+                  <a:tcPr anchor="ctr">
                     <a:lnL w="6350" cap="flat" cmpd="sng" algn="ctr">
                       <a:solidFill>
                         <a:srgbClr val="E5E7EB"/>
@@ -9759,7 +9487,7 @@
                     <a:bodyPr/>
                     <a:lstStyle/>
                     <a:p>
-                      <a:pPr indent="0" marL="0">
+                      <a:pPr marL="0" indent="0">
                         <a:buNone/>
                       </a:pPr>
                       <a:r>
@@ -9780,7 +9508,7 @@
                       </a:endParaRPr>
                     </a:p>
                   </a:txBody>
-                  <a:tcPr marL="91440" marR="91440" marT="45720" marB="45720" anchor="ctr">
+                  <a:tcPr anchor="ctr">
                     <a:lnL w="6350" cap="flat" cmpd="sng" algn="ctr">
                       <a:solidFill>
                         <a:srgbClr val="E5E7EB"/>
@@ -9819,6 +9547,11 @@
                     </a:lnB>
                   </a:tcPr>
                 </a:tc>
+                <a:extLst>
+                  <a:ext uri="{0D108BD9-81ED-4DB2-BD59-A6C34878D82A}">
+                    <a16:rowId xmlns:a16="http://schemas.microsoft.com/office/drawing/2014/main" val="10005"/>
+                  </a:ext>
+                </a:extLst>
               </a:tr>
               <a:tr h="365760">
                 <a:tc>
@@ -9826,7 +9559,7 @@
                     <a:bodyPr/>
                     <a:lstStyle/>
                     <a:p>
-                      <a:pPr indent="0" marL="0">
+                      <a:pPr marL="0" indent="0">
                         <a:buNone/>
                       </a:pPr>
                       <a:r>
@@ -9847,7 +9580,7 @@
                       </a:endParaRPr>
                     </a:p>
                   </a:txBody>
-                  <a:tcPr marL="91440" marR="91440" marT="45720" marB="45720" anchor="ctr">
+                  <a:tcPr anchor="ctr">
                     <a:lnL w="6350" cap="flat" cmpd="sng" algn="ctr">
                       <a:solidFill>
                         <a:srgbClr val="E5E7EB"/>
@@ -9891,7 +9624,7 @@
                     <a:bodyPr/>
                     <a:lstStyle/>
                     <a:p>
-                      <a:pPr indent="0" marL="0">
+                      <a:pPr marL="0" indent="0">
                         <a:buNone/>
                       </a:pPr>
                       <a:r>
@@ -9912,7 +9645,7 @@
                       </a:endParaRPr>
                     </a:p>
                   </a:txBody>
-                  <a:tcPr marL="91440" marR="91440" marT="45720" marB="45720" anchor="ctr">
+                  <a:tcPr anchor="ctr">
                     <a:lnL w="6350" cap="flat" cmpd="sng" algn="ctr">
                       <a:solidFill>
                         <a:srgbClr val="E5E7EB"/>
@@ -9956,7 +9689,7 @@
                     <a:bodyPr/>
                     <a:lstStyle/>
                     <a:p>
-                      <a:pPr indent="0" marL="0">
+                      <a:pPr marL="0" indent="0">
                         <a:buNone/>
                       </a:pPr>
                       <a:r>
@@ -9977,7 +9710,7 @@
                       </a:endParaRPr>
                     </a:p>
                   </a:txBody>
-                  <a:tcPr marL="91440" marR="91440" marT="45720" marB="45720" anchor="ctr">
+                  <a:tcPr anchor="ctr">
                     <a:lnL w="6350" cap="flat" cmpd="sng" algn="ctr">
                       <a:solidFill>
                         <a:srgbClr val="E5E7EB"/>
@@ -10016,6 +9749,11 @@
                     </a:lnB>
                   </a:tcPr>
                 </a:tc>
+                <a:extLst>
+                  <a:ext uri="{0D108BD9-81ED-4DB2-BD59-A6C34878D82A}">
+                    <a16:rowId xmlns:a16="http://schemas.microsoft.com/office/drawing/2014/main" val="10006"/>
+                  </a:ext>
+                </a:extLst>
               </a:tr>
               <a:tr h="365760">
                 <a:tc>
@@ -10023,7 +9761,7 @@
                     <a:bodyPr/>
                     <a:lstStyle/>
                     <a:p>
-                      <a:pPr indent="0" marL="0">
+                      <a:pPr marL="0" indent="0">
                         <a:buNone/>
                       </a:pPr>
                       <a:r>
@@ -10044,7 +9782,7 @@
                       </a:endParaRPr>
                     </a:p>
                   </a:txBody>
-                  <a:tcPr marL="91440" marR="91440" marT="45720" marB="45720" anchor="ctr">
+                  <a:tcPr anchor="ctr">
                     <a:lnL w="6350" cap="flat" cmpd="sng" algn="ctr">
                       <a:solidFill>
                         <a:srgbClr val="E5E7EB"/>
@@ -10088,7 +9826,7 @@
                     <a:bodyPr/>
                     <a:lstStyle/>
                     <a:p>
-                      <a:pPr indent="0" marL="0">
+                      <a:pPr marL="0" indent="0">
                         <a:buNone/>
                       </a:pPr>
                       <a:r>
@@ -10109,7 +9847,7 @@
                       </a:endParaRPr>
                     </a:p>
                   </a:txBody>
-                  <a:tcPr marL="91440" marR="91440" marT="45720" marB="45720" anchor="ctr">
+                  <a:tcPr anchor="ctr">
                     <a:lnL w="6350" cap="flat" cmpd="sng" algn="ctr">
                       <a:solidFill>
                         <a:srgbClr val="E5E7EB"/>
@@ -10153,7 +9891,7 @@
                     <a:bodyPr/>
                     <a:lstStyle/>
                     <a:p>
-                      <a:pPr indent="0" marL="0">
+                      <a:pPr marL="0" indent="0">
                         <a:buNone/>
                       </a:pPr>
                       <a:r>
@@ -10174,7 +9912,7 @@
                       </a:endParaRPr>
                     </a:p>
                   </a:txBody>
-                  <a:tcPr marL="91440" marR="91440" marT="45720" marB="45720" anchor="ctr">
+                  <a:tcPr anchor="ctr">
                     <a:lnL w="6350" cap="flat" cmpd="sng" algn="ctr">
                       <a:solidFill>
                         <a:srgbClr val="E5E7EB"/>
@@ -10213,6 +9951,11 @@
                     </a:lnB>
                   </a:tcPr>
                 </a:tc>
+                <a:extLst>
+                  <a:ext uri="{0D108BD9-81ED-4DB2-BD59-A6C34878D82A}">
+                    <a16:rowId xmlns:a16="http://schemas.microsoft.com/office/drawing/2014/main" val="10007"/>
+                  </a:ext>
+                </a:extLst>
               </a:tr>
             </a:tbl>
           </a:graphicData>
@@ -10237,7 +9980,7 @@
           </a:solidFill>
           <a:ln/>
           <a:effectLst>
-            <a:outerShdw sx="100000" sy="100000" kx="0" ky="0" algn="bl" rotWithShape="0" blurRad="76200" dist="25400" dir="8100000">
+            <a:outerShdw blurRad="76200" dist="25400" dir="8100000" algn="bl" rotWithShape="0">
               <a:srgbClr val="000000">
                 <a:alpha val="8000"/>
               </a:srgbClr>
@@ -10286,7 +10029,7 @@
           <a:bodyPr wrap="square" lIns="0" tIns="0" rIns="0" bIns="0" rtlCol="0" anchor="ctr"/>
           <a:lstStyle/>
           <a:p>
-            <a:pPr indent="0" marL="0">
+            <a:pPr marL="0" indent="0">
               <a:buNone/>
             </a:pPr>
             <a:r>
@@ -10320,6 +10063,7 @@
         <a:solidFill>
           <a:srgbClr val="0A0A0C"/>
         </a:solidFill>
+        <a:effectLst/>
       </p:bgPr>
     </p:bg>
     <p:spTree>
@@ -10377,7 +10121,7 @@
           <a:bodyPr wrap="square" lIns="0" tIns="0" rIns="0" bIns="0" rtlCol="0" anchor="ctr"/>
           <a:lstStyle/>
           <a:p>
-            <a:pPr indent="0" marL="0">
+            <a:pPr marL="0" indent="0">
               <a:buNone/>
             </a:pPr>
             <a:r>
@@ -10416,7 +10160,7 @@
           <a:bodyPr wrap="square" lIns="0" tIns="0" rIns="0" bIns="0" rtlCol="0" anchor="ctr"/>
           <a:lstStyle/>
           <a:p>
-            <a:pPr indent="0" marL="0">
+            <a:pPr marL="0" indent="0">
               <a:buNone/>
             </a:pPr>
             <a:r>
@@ -10497,7 +10241,7 @@
           <a:bodyPr wrap="square" lIns="0" tIns="0" rIns="0" bIns="0" rtlCol="0" anchor="ctr"/>
           <a:lstStyle/>
           <a:p>
-            <a:pPr indent="0" marL="0">
+            <a:pPr marL="0" indent="0">
               <a:buNone/>
             </a:pPr>
             <a:r>
@@ -10536,7 +10280,7 @@
           <a:bodyPr wrap="square" lIns="0" tIns="0" rIns="0" bIns="0" rtlCol="0" anchor="ctr"/>
           <a:lstStyle/>
           <a:p>
-            <a:pPr indent="0" marL="0">
+            <a:pPr marL="0" indent="0">
               <a:buNone/>
             </a:pPr>
             <a:r>
@@ -10617,7 +10361,7 @@
           <a:bodyPr wrap="square" lIns="0" tIns="0" rIns="0" bIns="0" rtlCol="0" anchor="ctr"/>
           <a:lstStyle/>
           <a:p>
-            <a:pPr indent="0" marL="0">
+            <a:pPr marL="0" indent="0">
               <a:buNone/>
             </a:pPr>
             <a:r>
@@ -10656,7 +10400,7 @@
           <a:bodyPr wrap="square" lIns="0" tIns="0" rIns="0" bIns="0" rtlCol="0" anchor="ctr"/>
           <a:lstStyle/>
           <a:p>
-            <a:pPr indent="0" marL="0">
+            <a:pPr marL="0" indent="0">
               <a:buNone/>
             </a:pPr>
             <a:r>
@@ -10737,7 +10481,7 @@
           <a:bodyPr wrap="square" lIns="0" tIns="0" rIns="0" bIns="0" rtlCol="0" anchor="ctr"/>
           <a:lstStyle/>
           <a:p>
-            <a:pPr indent="0" marL="0">
+            <a:pPr marL="0" indent="0">
               <a:buNone/>
             </a:pPr>
             <a:r>
@@ -10776,7 +10520,7 @@
           <a:bodyPr wrap="square" lIns="0" tIns="0" rIns="0" bIns="0" rtlCol="0" anchor="ctr"/>
           <a:lstStyle/>
           <a:p>
-            <a:pPr indent="0" marL="0">
+            <a:pPr marL="0" indent="0">
               <a:buNone/>
             </a:pPr>
             <a:r>
@@ -10857,7 +10601,7 @@
           <a:bodyPr wrap="square" lIns="0" tIns="0" rIns="0" bIns="0" rtlCol="0" anchor="ctr"/>
           <a:lstStyle/>
           <a:p>
-            <a:pPr indent="0" marL="0">
+            <a:pPr marL="0" indent="0">
               <a:buNone/>
             </a:pPr>
             <a:r>
@@ -10896,7 +10640,7 @@
           <a:bodyPr wrap="square" lIns="0" tIns="0" rIns="0" bIns="0" rtlCol="0" anchor="ctr"/>
           <a:lstStyle/>
           <a:p>
-            <a:pPr indent="0" marL="0">
+            <a:pPr marL="0" indent="0">
               <a:buNone/>
             </a:pPr>
             <a:r>
@@ -10977,7 +10721,7 @@
           <a:bodyPr wrap="square" lIns="0" tIns="0" rIns="0" bIns="0" rtlCol="0" anchor="ctr"/>
           <a:lstStyle/>
           <a:p>
-            <a:pPr indent="0" marL="0">
+            <a:pPr marL="0" indent="0">
               <a:buNone/>
             </a:pPr>
             <a:r>
@@ -11016,7 +10760,7 @@
           <a:bodyPr wrap="square" lIns="0" tIns="0" rIns="0" bIns="0" rtlCol="0" anchor="ctr"/>
           <a:lstStyle/>
           <a:p>
-            <a:pPr indent="0" marL="0">
+            <a:pPr marL="0" indent="0">
               <a:buNone/>
             </a:pPr>
             <a:r>
@@ -11097,7 +10841,7 @@
           <a:bodyPr wrap="square" lIns="0" tIns="0" rIns="0" bIns="0" rtlCol="0" anchor="ctr"/>
           <a:lstStyle/>
           <a:p>
-            <a:pPr indent="0" marL="0">
+            <a:pPr marL="0" indent="0">
               <a:buNone/>
             </a:pPr>
             <a:r>
@@ -11136,7 +10880,7 @@
           <a:bodyPr wrap="square" lIns="0" tIns="0" rIns="0" bIns="0" rtlCol="0" anchor="ctr"/>
           <a:lstStyle/>
           <a:p>
-            <a:pPr indent="0" marL="0">
+            <a:pPr marL="0" indent="0">
               <a:buNone/>
             </a:pPr>
             <a:r>
@@ -11170,6 +10914,7 @@
         <a:solidFill>
           <a:srgbClr val="FFFFFF"/>
         </a:solidFill>
+        <a:effectLst/>
       </p:bgPr>
     </p:bg>
     <p:spTree>
@@ -11227,7 +10972,7 @@
           <a:bodyPr wrap="square" lIns="0" tIns="0" rIns="0" bIns="0" rtlCol="0" anchor="ctr"/>
           <a:lstStyle/>
           <a:p>
-            <a:pPr indent="0" marL="0">
+            <a:pPr marL="0" indent="0">
               <a:buNone/>
             </a:pPr>
             <a:r>
@@ -11266,7 +11011,7 @@
           <a:bodyPr wrap="square" lIns="0" tIns="0" rIns="0" bIns="0" rtlCol="0" anchor="ctr"/>
           <a:lstStyle/>
           <a:p>
-            <a:pPr indent="0" marL="0">
+            <a:pPr marL="0" indent="0">
               <a:buNone/>
             </a:pPr>
             <a:r>
@@ -11303,7 +11048,7 @@
           </a:solidFill>
           <a:ln/>
           <a:effectLst>
-            <a:outerShdw sx="100000" sy="100000" kx="0" ky="0" algn="bl" rotWithShape="0" blurRad="76200" dist="25400" dir="8100000">
+            <a:outerShdw blurRad="76200" dist="25400" dir="8100000" algn="bl" rotWithShape="0">
               <a:srgbClr val="000000">
                 <a:alpha val="8000"/>
               </a:srgbClr>
@@ -11352,7 +11097,7 @@
           <a:bodyPr wrap="square" lIns="0" tIns="0" rIns="0" bIns="0" rtlCol="0" anchor="ctr"/>
           <a:lstStyle/>
           <a:p>
-            <a:pPr indent="0" marL="0">
+            <a:pPr marL="0" indent="0">
               <a:buNone/>
             </a:pPr>
             <a:r>
@@ -11393,7 +11138,7 @@
           <a:bodyPr wrap="square" lIns="1016" tIns="1016" rIns="1016" bIns="1016" rtlCol="0" anchor="t"/>
           <a:lstStyle/>
           <a:p>
-            <a:pPr indent="0" marL="0">
+            <a:pPr marL="0" indent="0">
               <a:buNone/>
             </a:pPr>
             <a:r>
@@ -11410,7 +11155,7 @@
             <a:endParaRPr lang="en-US" sz="750" dirty="0"/>
           </a:p>
           <a:p>
-            <a:pPr indent="0" marL="0">
+            <a:pPr marL="0" indent="0">
               <a:buNone/>
             </a:pPr>
             <a:r>
@@ -11427,7 +11172,7 @@
             <a:endParaRPr lang="en-US" sz="750" dirty="0"/>
           </a:p>
           <a:p>
-            <a:pPr indent="0" marL="0">
+            <a:pPr marL="0" indent="0">
               <a:buNone/>
             </a:pPr>
             <a:r>
@@ -11466,7 +11211,7 @@
           <a:bodyPr wrap="square" lIns="0" tIns="0" rIns="0" bIns="0" rtlCol="0" anchor="ctr"/>
           <a:lstStyle/>
           <a:p>
-            <a:pPr indent="0" marL="0">
+            <a:pPr marL="0" indent="0">
               <a:buNone/>
             </a:pPr>
             <a:r>
@@ -11503,7 +11248,7 @@
           </a:solidFill>
           <a:ln/>
           <a:effectLst>
-            <a:outerShdw sx="100000" sy="100000" kx="0" ky="0" algn="bl" rotWithShape="0" blurRad="76200" dist="25400" dir="8100000">
+            <a:outerShdw blurRad="76200" dist="25400" dir="8100000" algn="bl" rotWithShape="0">
               <a:srgbClr val="000000">
                 <a:alpha val="8000"/>
               </a:srgbClr>
@@ -11552,7 +11297,7 @@
           <a:bodyPr wrap="square" lIns="0" tIns="0" rIns="0" bIns="0" rtlCol="0" anchor="ctr"/>
           <a:lstStyle/>
           <a:p>
-            <a:pPr indent="0" marL="0">
+            <a:pPr marL="0" indent="0">
               <a:buNone/>
             </a:pPr>
             <a:r>
@@ -11593,7 +11338,7 @@
           <a:bodyPr wrap="square" lIns="1016" tIns="1016" rIns="1016" bIns="1016" rtlCol="0" anchor="t"/>
           <a:lstStyle/>
           <a:p>
-            <a:pPr indent="0" marL="0">
+            <a:pPr marL="0" indent="0">
               <a:buNone/>
             </a:pPr>
             <a:r>
@@ -11610,7 +11355,7 @@
             <a:endParaRPr lang="en-US" sz="750" dirty="0"/>
           </a:p>
           <a:p>
-            <a:pPr indent="0" marL="0">
+            <a:pPr marL="0" indent="0">
               <a:buNone/>
             </a:pPr>
             <a:r>
@@ -11627,7 +11372,7 @@
             <a:endParaRPr lang="en-US" sz="750" dirty="0"/>
           </a:p>
           <a:p>
-            <a:pPr indent="0" marL="0">
+            <a:pPr marL="0" indent="0">
               <a:buNone/>
             </a:pPr>
             <a:r>
@@ -11644,7 +11389,7 @@
             <a:endParaRPr lang="en-US" sz="750" dirty="0"/>
           </a:p>
           <a:p>
-            <a:pPr indent="0" marL="0">
+            <a:pPr marL="0" indent="0">
               <a:buNone/>
             </a:pPr>
             <a:r>
@@ -11661,7 +11406,7 @@
             <a:endParaRPr lang="en-US" sz="750" dirty="0"/>
           </a:p>
           <a:p>
-            <a:pPr indent="0" marL="0">
+            <a:pPr marL="0" indent="0">
               <a:buNone/>
             </a:pPr>
             <a:r>
@@ -11678,7 +11423,7 @@
             <a:endParaRPr lang="en-US" sz="750" dirty="0"/>
           </a:p>
           <a:p>
-            <a:pPr indent="0" marL="0">
+            <a:pPr marL="0" indent="0">
               <a:buNone/>
             </a:pPr>
             <a:r>
@@ -11717,7 +11462,7 @@
           <a:bodyPr wrap="square" lIns="0" tIns="0" rIns="0" bIns="0" rtlCol="0" anchor="ctr"/>
           <a:lstStyle/>
           <a:p>
-            <a:pPr indent="0" marL="0">
+            <a:pPr marL="0" indent="0">
               <a:buNone/>
             </a:pPr>
             <a:r>
@@ -11754,7 +11499,7 @@
           </a:solidFill>
           <a:ln/>
           <a:effectLst>
-            <a:outerShdw sx="100000" sy="100000" kx="0" ky="0" algn="bl" rotWithShape="0" blurRad="76200" dist="25400" dir="8100000">
+            <a:outerShdw blurRad="76200" dist="25400" dir="8100000" algn="bl" rotWithShape="0">
               <a:srgbClr val="000000">
                 <a:alpha val="8000"/>
               </a:srgbClr>
@@ -11803,7 +11548,7 @@
           <a:bodyPr wrap="square" lIns="0" tIns="0" rIns="0" bIns="0" rtlCol="0" anchor="ctr"/>
           <a:lstStyle/>
           <a:p>
-            <a:pPr indent="0" marL="0">
+            <a:pPr marL="0" indent="0">
               <a:buNone/>
             </a:pPr>
             <a:r>
@@ -11844,7 +11589,7 @@
           <a:bodyPr wrap="square" lIns="1016" tIns="1016" rIns="1016" bIns="1016" rtlCol="0" anchor="t"/>
           <a:lstStyle/>
           <a:p>
-            <a:pPr indent="0" marL="0">
+            <a:pPr marL="0" indent="0">
               <a:buNone/>
             </a:pPr>
             <a:r>
@@ -11861,7 +11606,7 @@
             <a:endParaRPr lang="en-US" sz="750" dirty="0"/>
           </a:p>
           <a:p>
-            <a:pPr indent="0" marL="0">
+            <a:pPr marL="0" indent="0">
               <a:buNone/>
             </a:pPr>
             <a:r>
@@ -11878,7 +11623,7 @@
             <a:endParaRPr lang="en-US" sz="750" dirty="0"/>
           </a:p>
           <a:p>
-            <a:pPr indent="0" marL="0">
+            <a:pPr marL="0" indent="0">
               <a:buNone/>
             </a:pPr>
             <a:r>
@@ -11895,7 +11640,7 @@
             <a:endParaRPr lang="en-US" sz="750" dirty="0"/>
           </a:p>
           <a:p>
-            <a:pPr indent="0" marL="0">
+            <a:pPr marL="0" indent="0">
               <a:buNone/>
             </a:pPr>
             <a:r>
@@ -11912,7 +11657,7 @@
             <a:endParaRPr lang="en-US" sz="750" dirty="0"/>
           </a:p>
           <a:p>
-            <a:pPr indent="0" marL="0">
+            <a:pPr marL="0" indent="0">
               <a:buNone/>
             </a:pPr>
             <a:r>
@@ -11929,7 +11674,7 @@
             <a:endParaRPr lang="en-US" sz="750" dirty="0"/>
           </a:p>
           <a:p>
-            <a:pPr indent="0" marL="0">
+            <a:pPr marL="0" indent="0">
               <a:buNone/>
             </a:pPr>
             <a:r>
@@ -11946,7 +11691,7 @@
             <a:endParaRPr lang="en-US" sz="750" dirty="0"/>
           </a:p>
           <a:p>
-            <a:pPr indent="0" marL="0">
+            <a:pPr marL="0" indent="0">
               <a:buNone/>
             </a:pPr>
             <a:r>
@@ -11963,7 +11708,7 @@
             <a:endParaRPr lang="en-US" sz="750" dirty="0"/>
           </a:p>
           <a:p>
-            <a:pPr indent="0" marL="0">
+            <a:pPr marL="0" indent="0">
               <a:buNone/>
             </a:pPr>
             <a:r>
@@ -12002,7 +11747,7 @@
           <a:bodyPr wrap="square" lIns="0" tIns="0" rIns="0" bIns="0" rtlCol="0" anchor="ctr"/>
           <a:lstStyle/>
           <a:p>
-            <a:pPr indent="0" marL="0">
+            <a:pPr marL="0" indent="0">
               <a:buNone/>
             </a:pPr>
             <a:r>
@@ -12039,7 +11784,7 @@
           </a:solidFill>
           <a:ln/>
           <a:effectLst>
-            <a:outerShdw sx="100000" sy="100000" kx="0" ky="0" algn="bl" rotWithShape="0" blurRad="76200" dist="25400" dir="8100000">
+            <a:outerShdw blurRad="76200" dist="25400" dir="8100000" algn="bl" rotWithShape="0">
               <a:srgbClr val="000000">
                 <a:alpha val="8000"/>
               </a:srgbClr>
@@ -12088,7 +11833,7 @@
           <a:bodyPr wrap="square" lIns="0" tIns="0" rIns="0" bIns="0" rtlCol="0" anchor="ctr"/>
           <a:lstStyle/>
           <a:p>
-            <a:pPr indent="0" marL="0">
+            <a:pPr marL="0" indent="0">
               <a:buNone/>
             </a:pPr>
             <a:r>
@@ -12129,7 +11874,7 @@
           <a:bodyPr wrap="square" lIns="1016" tIns="1016" rIns="1016" bIns="1016" rtlCol="0" anchor="t"/>
           <a:lstStyle/>
           <a:p>
-            <a:pPr indent="0" marL="0">
+            <a:pPr marL="0" indent="0">
               <a:buNone/>
             </a:pPr>
             <a:r>
@@ -12146,7 +11891,7 @@
             <a:endParaRPr lang="en-US" sz="750" dirty="0"/>
           </a:p>
           <a:p>
-            <a:pPr indent="0" marL="0">
+            <a:pPr marL="0" indent="0">
               <a:buNone/>
             </a:pPr>
             <a:r>
@@ -12163,7 +11908,7 @@
             <a:endParaRPr lang="en-US" sz="750" dirty="0"/>
           </a:p>
           <a:p>
-            <a:pPr indent="0" marL="0">
+            <a:pPr marL="0" indent="0">
               <a:buNone/>
             </a:pPr>
             <a:r>
@@ -12180,7 +11925,7 @@
             <a:endParaRPr lang="en-US" sz="750" dirty="0"/>
           </a:p>
           <a:p>
-            <a:pPr indent="0" marL="0">
+            <a:pPr marL="0" indent="0">
               <a:buNone/>
             </a:pPr>
             <a:r>
@@ -12197,7 +11942,7 @@
             <a:endParaRPr lang="en-US" sz="750" dirty="0"/>
           </a:p>
           <a:p>
-            <a:pPr indent="0" marL="0">
+            <a:pPr marL="0" indent="0">
               <a:buNone/>
             </a:pPr>
             <a:r>
@@ -12214,7 +11959,7 @@
             <a:endParaRPr lang="en-US" sz="750" dirty="0"/>
           </a:p>
           <a:p>
-            <a:pPr indent="0" marL="0">
+            <a:pPr marL="0" indent="0">
               <a:buNone/>
             </a:pPr>
             <a:r>
@@ -12231,7 +11976,7 @@
             <a:endParaRPr lang="en-US" sz="750" dirty="0"/>
           </a:p>
           <a:p>
-            <a:pPr indent="0" marL="0">
+            <a:pPr marL="0" indent="0">
               <a:buNone/>
             </a:pPr>
             <a:r>
@@ -12248,7 +11993,7 @@
             <a:endParaRPr lang="en-US" sz="750" dirty="0"/>
           </a:p>
           <a:p>
-            <a:pPr indent="0" marL="0">
+            <a:pPr marL="0" indent="0">
               <a:buNone/>
             </a:pPr>
             <a:r>
@@ -12287,7 +12032,7 @@
           <a:bodyPr wrap="square" lIns="0" tIns="0" rIns="0" bIns="0" rtlCol="0" anchor="ctr"/>
           <a:lstStyle/>
           <a:p>
-            <a:pPr indent="0" marL="0">
+            <a:pPr marL="0" indent="0">
               <a:buNone/>
             </a:pPr>
             <a:r>
@@ -12321,6 +12066,7 @@
         <a:solidFill>
           <a:srgbClr val="F5F0EB"/>
         </a:solidFill>
+        <a:effectLst/>
       </p:bgPr>
     </p:bg>
     <p:spTree>
@@ -12378,7 +12124,7 @@
           <a:bodyPr wrap="square" lIns="0" tIns="0" rIns="0" bIns="0" rtlCol="0" anchor="ctr"/>
           <a:lstStyle/>
           <a:p>
-            <a:pPr indent="0" marL="0">
+            <a:pPr marL="0" indent="0">
               <a:buNone/>
             </a:pPr>
             <a:r>
@@ -12417,7 +12163,7 @@
           <a:bodyPr wrap="square" lIns="0" tIns="0" rIns="0" bIns="0" rtlCol="0" anchor="ctr"/>
           <a:lstStyle/>
           <a:p>
-            <a:pPr indent="0" marL="0">
+            <a:pPr marL="0" indent="0">
               <a:buNone/>
             </a:pPr>
             <a:r>
@@ -12476,7 +12222,7 @@
           <a:bodyPr wrap="square" lIns="0" tIns="0" rIns="0" bIns="0" rtlCol="0" anchor="ctr"/>
           <a:lstStyle/>
           <a:p>
-            <a:pPr algn="ctr" indent="0" marL="0">
+            <a:pPr marL="0" indent="0" algn="ctr">
               <a:buNone/>
             </a:pPr>
             <a:r>
@@ -12513,7 +12259,7 @@
           </a:solidFill>
           <a:ln/>
           <a:effectLst>
-            <a:outerShdw sx="100000" sy="100000" kx="0" ky="0" algn="bl" rotWithShape="0" blurRad="76200" dist="25400" dir="8100000">
+            <a:outerShdw blurRad="76200" dist="25400" dir="8100000" algn="bl" rotWithShape="0">
               <a:srgbClr val="000000">
                 <a:alpha val="8000"/>
               </a:srgbClr>
@@ -12542,7 +12288,7 @@
           <a:bodyPr wrap="square" lIns="0" tIns="0" rIns="0" bIns="0" rtlCol="0" anchor="ctr"/>
           <a:lstStyle/>
           <a:p>
-            <a:pPr indent="0" marL="0">
+            <a:pPr marL="0" indent="0">
               <a:buNone/>
             </a:pPr>
             <a:r>
@@ -12601,7 +12347,7 @@
           <a:bodyPr wrap="square" lIns="0" tIns="0" rIns="0" bIns="0" rtlCol="0" anchor="ctr"/>
           <a:lstStyle/>
           <a:p>
-            <a:pPr algn="ctr" indent="0" marL="0">
+            <a:pPr marL="0" indent="0" algn="ctr">
               <a:buNone/>
             </a:pPr>
             <a:r>
@@ -12638,7 +12384,7 @@
           </a:solidFill>
           <a:ln/>
           <a:effectLst>
-            <a:outerShdw sx="100000" sy="100000" kx="0" ky="0" algn="bl" rotWithShape="0" blurRad="76200" dist="25400" dir="8100000">
+            <a:outerShdw blurRad="76200" dist="25400" dir="8100000" algn="bl" rotWithShape="0">
               <a:srgbClr val="000000">
                 <a:alpha val="8000"/>
               </a:srgbClr>
@@ -12667,7 +12413,7 @@
           <a:bodyPr wrap="square" lIns="0" tIns="0" rIns="0" bIns="0" rtlCol="0" anchor="ctr"/>
           <a:lstStyle/>
           <a:p>
-            <a:pPr indent="0" marL="0">
+            <a:pPr marL="0" indent="0">
               <a:buNone/>
             </a:pPr>
             <a:r>
@@ -12726,7 +12472,7 @@
           <a:bodyPr wrap="square" lIns="0" tIns="0" rIns="0" bIns="0" rtlCol="0" anchor="ctr"/>
           <a:lstStyle/>
           <a:p>
-            <a:pPr algn="ctr" indent="0" marL="0">
+            <a:pPr marL="0" indent="0" algn="ctr">
               <a:buNone/>
             </a:pPr>
             <a:r>
@@ -12763,7 +12509,7 @@
           </a:solidFill>
           <a:ln/>
           <a:effectLst>
-            <a:outerShdw sx="100000" sy="100000" kx="0" ky="0" algn="bl" rotWithShape="0" blurRad="76200" dist="25400" dir="8100000">
+            <a:outerShdw blurRad="76200" dist="25400" dir="8100000" algn="bl" rotWithShape="0">
               <a:srgbClr val="000000">
                 <a:alpha val="8000"/>
               </a:srgbClr>
@@ -12792,7 +12538,7 @@
           <a:bodyPr wrap="square" lIns="0" tIns="0" rIns="0" bIns="0" rtlCol="0" anchor="ctr"/>
           <a:lstStyle/>
           <a:p>
-            <a:pPr indent="0" marL="0">
+            <a:pPr marL="0" indent="0">
               <a:buNone/>
             </a:pPr>
             <a:r>
@@ -12851,7 +12597,7 @@
           <a:bodyPr wrap="square" lIns="0" tIns="0" rIns="0" bIns="0" rtlCol="0" anchor="ctr"/>
           <a:lstStyle/>
           <a:p>
-            <a:pPr algn="ctr" indent="0" marL="0">
+            <a:pPr marL="0" indent="0" algn="ctr">
               <a:buNone/>
             </a:pPr>
             <a:r>
@@ -12888,7 +12634,7 @@
           </a:solidFill>
           <a:ln/>
           <a:effectLst>
-            <a:outerShdw sx="100000" sy="100000" kx="0" ky="0" algn="bl" rotWithShape="0" blurRad="76200" dist="25400" dir="8100000">
+            <a:outerShdw blurRad="76200" dist="25400" dir="8100000" algn="bl" rotWithShape="0">
               <a:srgbClr val="000000">
                 <a:alpha val="8000"/>
               </a:srgbClr>
@@ -12917,7 +12663,7 @@
           <a:bodyPr wrap="square" lIns="0" tIns="0" rIns="0" bIns="0" rtlCol="0" anchor="ctr"/>
           <a:lstStyle/>
           <a:p>
-            <a:pPr indent="0" marL="0">
+            <a:pPr marL="0" indent="0">
               <a:buNone/>
             </a:pPr>
             <a:r>
@@ -12976,7 +12722,7 @@
           <a:bodyPr wrap="square" lIns="0" tIns="0" rIns="0" bIns="0" rtlCol="0" anchor="ctr"/>
           <a:lstStyle/>
           <a:p>
-            <a:pPr algn="ctr" indent="0" marL="0">
+            <a:pPr marL="0" indent="0" algn="ctr">
               <a:buNone/>
             </a:pPr>
             <a:r>
@@ -13013,7 +12759,7 @@
           </a:solidFill>
           <a:ln/>
           <a:effectLst>
-            <a:outerShdw sx="100000" sy="100000" kx="0" ky="0" algn="bl" rotWithShape="0" blurRad="76200" dist="25400" dir="8100000">
+            <a:outerShdw blurRad="76200" dist="25400" dir="8100000" algn="bl" rotWithShape="0">
               <a:srgbClr val="000000">
                 <a:alpha val="8000"/>
               </a:srgbClr>
@@ -13042,7 +12788,7 @@
           <a:bodyPr wrap="square" lIns="0" tIns="0" rIns="0" bIns="0" rtlCol="0" anchor="ctr"/>
           <a:lstStyle/>
           <a:p>
-            <a:pPr indent="0" marL="0">
+            <a:pPr marL="0" indent="0">
               <a:buNone/>
             </a:pPr>
             <a:r>
@@ -13101,7 +12847,7 @@
           <a:bodyPr wrap="square" lIns="0" tIns="0" rIns="0" bIns="0" rtlCol="0" anchor="ctr"/>
           <a:lstStyle/>
           <a:p>
-            <a:pPr algn="ctr" indent="0" marL="0">
+            <a:pPr marL="0" indent="0" algn="ctr">
               <a:buNone/>
             </a:pPr>
             <a:r>
@@ -13138,7 +12884,7 @@
           </a:solidFill>
           <a:ln/>
           <a:effectLst>
-            <a:outerShdw sx="100000" sy="100000" kx="0" ky="0" algn="bl" rotWithShape="0" blurRad="76200" dist="25400" dir="8100000">
+            <a:outerShdw blurRad="76200" dist="25400" dir="8100000" algn="bl" rotWithShape="0">
               <a:srgbClr val="000000">
                 <a:alpha val="8000"/>
               </a:srgbClr>
@@ -13167,7 +12913,7 @@
           <a:bodyPr wrap="square" lIns="0" tIns="0" rIns="0" bIns="0" rtlCol="0" anchor="ctr"/>
           <a:lstStyle/>
           <a:p>
-            <a:pPr indent="0" marL="0">
+            <a:pPr marL="0" indent="0">
               <a:buNone/>
             </a:pPr>
             <a:r>
@@ -13201,6 +12947,7 @@
         <a:solidFill>
           <a:srgbClr val="FFFFFF"/>
         </a:solidFill>
+        <a:effectLst/>
       </p:bgPr>
     </p:bg>
     <p:spTree>
@@ -13258,7 +13005,7 @@
           <a:bodyPr wrap="square" lIns="0" tIns="0" rIns="0" bIns="0" rtlCol="0" anchor="ctr"/>
           <a:lstStyle/>
           <a:p>
-            <a:pPr indent="0" marL="0">
+            <a:pPr marL="0" indent="0">
               <a:buNone/>
             </a:pPr>
             <a:r>
@@ -13295,7 +13042,7 @@
           </a:solidFill>
           <a:ln/>
           <a:effectLst>
-            <a:outerShdw sx="100000" sy="100000" kx="0" ky="0" algn="bl" rotWithShape="0" blurRad="76200" dist="25400" dir="8100000">
+            <a:outerShdw blurRad="76200" dist="25400" dir="8100000" algn="bl" rotWithShape="0">
               <a:srgbClr val="000000">
                 <a:alpha val="8000"/>
               </a:srgbClr>
@@ -13344,7 +13091,7 @@
           <a:bodyPr wrap="square" lIns="0" tIns="0" rIns="0" bIns="0" rtlCol="0" anchor="ctr"/>
           <a:lstStyle/>
           <a:p>
-            <a:pPr indent="0" marL="0">
+            <a:pPr marL="0" indent="0">
               <a:buNone/>
             </a:pPr>
             <a:r>
@@ -13383,7 +13130,7 @@
           <a:bodyPr wrap="square" lIns="0" tIns="0" rIns="0" bIns="0" rtlCol="0" anchor="ctr"/>
           <a:lstStyle/>
           <a:p>
-            <a:pPr indent="0" marL="0">
+            <a:pPr marL="0" indent="0">
               <a:buNone/>
             </a:pPr>
             <a:r>
@@ -13422,7 +13169,7 @@
           <a:bodyPr wrap="square" lIns="0" tIns="0" rIns="0" bIns="0" rtlCol="0" anchor="ctr"/>
           <a:lstStyle/>
           <a:p>
-            <a:pPr indent="0" marL="0">
+            <a:pPr marL="0" indent="0">
               <a:buNone/>
             </a:pPr>
             <a:r>
@@ -13461,7 +13208,7 @@
           <a:bodyPr wrap="square" lIns="0" tIns="0" rIns="0" bIns="0" rtlCol="0" anchor="ctr"/>
           <a:lstStyle/>
           <a:p>
-            <a:pPr indent="0" marL="0">
+            <a:pPr marL="0" indent="0">
               <a:buNone/>
             </a:pPr>
             <a:r>
@@ -13500,7 +13247,7 @@
           <a:bodyPr wrap="square" lIns="0" tIns="0" rIns="0" bIns="0" rtlCol="0" anchor="ctr"/>
           <a:lstStyle/>
           <a:p>
-            <a:pPr indent="0" marL="0">
+            <a:pPr marL="0" indent="0">
               <a:buNone/>
             </a:pPr>
             <a:r>
@@ -13539,7 +13286,7 @@
           <a:bodyPr wrap="square" lIns="0" tIns="0" rIns="0" bIns="0" rtlCol="0" anchor="ctr"/>
           <a:lstStyle/>
           <a:p>
-            <a:pPr indent="0" marL="0">
+            <a:pPr marL="0" indent="0">
               <a:buNone/>
             </a:pPr>
             <a:r>
@@ -13578,7 +13325,7 @@
           <a:bodyPr wrap="square" lIns="0" tIns="0" rIns="0" bIns="0" rtlCol="0" anchor="ctr"/>
           <a:lstStyle/>
           <a:p>
-            <a:pPr indent="0" marL="0">
+            <a:pPr marL="0" indent="0">
               <a:buNone/>
             </a:pPr>
             <a:r>
@@ -13617,7 +13364,7 @@
           <a:bodyPr wrap="square" lIns="0" tIns="0" rIns="0" bIns="0" rtlCol="0" anchor="ctr"/>
           <a:lstStyle/>
           <a:p>
-            <a:pPr indent="0" marL="0">
+            <a:pPr marL="0" indent="0">
               <a:buNone/>
             </a:pPr>
             <a:r>
@@ -13656,7 +13403,7 @@
           <a:bodyPr wrap="square" lIns="0" tIns="0" rIns="0" bIns="0" rtlCol="0" anchor="ctr"/>
           <a:lstStyle/>
           <a:p>
-            <a:pPr indent="0" marL="0">
+            <a:pPr marL="0" indent="0">
               <a:buNone/>
             </a:pPr>
             <a:r>
@@ -13693,7 +13440,7 @@
           </a:solidFill>
           <a:ln/>
           <a:effectLst>
-            <a:outerShdw sx="100000" sy="100000" kx="0" ky="0" algn="bl" rotWithShape="0" blurRad="76200" dist="25400" dir="8100000">
+            <a:outerShdw blurRad="76200" dist="25400" dir="8100000" algn="bl" rotWithShape="0">
               <a:srgbClr val="000000">
                 <a:alpha val="8000"/>
               </a:srgbClr>
@@ -13742,7 +13489,7 @@
           <a:bodyPr wrap="square" lIns="0" tIns="0" rIns="0" bIns="0" rtlCol="0" anchor="ctr"/>
           <a:lstStyle/>
           <a:p>
-            <a:pPr indent="0" marL="0">
+            <a:pPr marL="0" indent="0">
               <a:buNone/>
             </a:pPr>
             <a:r>
@@ -13953,7 +13700,7 @@
           <a:bodyPr wrap="square" lIns="0" tIns="0" rIns="0" bIns="0" rtlCol="0" anchor="ctr"/>
           <a:lstStyle/>
           <a:p>
-            <a:pPr indent="0" marL="0">
+            <a:pPr marL="0" indent="0">
               <a:buNone/>
             </a:pPr>
             <a:r>
@@ -13990,7 +13737,7 @@
           </a:solidFill>
           <a:ln/>
           <a:effectLst>
-            <a:outerShdw sx="100000" sy="100000" kx="0" ky="0" algn="bl" rotWithShape="0" blurRad="76200" dist="25400" dir="8100000">
+            <a:outerShdw blurRad="76200" dist="25400" dir="8100000" algn="bl" rotWithShape="0">
               <a:srgbClr val="000000">
                 <a:alpha val="8000"/>
               </a:srgbClr>
@@ -14019,7 +13766,7 @@
           <a:bodyPr wrap="square" lIns="0" tIns="0" rIns="0" bIns="0" rtlCol="0" anchor="ctr"/>
           <a:lstStyle/>
           <a:p>
-            <a:pPr algn="ctr" indent="0" marL="0">
+            <a:pPr marL="0" indent="0" algn="ctr">
               <a:buNone/>
             </a:pPr>
             <a:r>
@@ -14031,7 +13778,7 @@
                 <a:ea typeface="Georgia" pitchFamily="34" charset="-122"/>
                 <a:cs typeface="Georgia" pitchFamily="34" charset="-120"/>
               </a:rPr>
-              <a:t>17</a:t>
+              <a:t>29</a:t>
             </a:r>
             <a:endParaRPr lang="en-US" sz="2800" dirty="0"/>
           </a:p>
@@ -14058,7 +13805,7 @@
           <a:bodyPr wrap="square" lIns="0" tIns="0" rIns="0" bIns="0" rtlCol="0" anchor="ctr"/>
           <a:lstStyle/>
           <a:p>
-            <a:pPr algn="ctr" indent="0" marL="0">
+            <a:pPr marL="0" indent="0" algn="ctr">
               <a:buNone/>
             </a:pPr>
             <a:r>
@@ -14095,7 +13842,7 @@
           </a:solidFill>
           <a:ln/>
           <a:effectLst>
-            <a:outerShdw sx="100000" sy="100000" kx="0" ky="0" algn="bl" rotWithShape="0" blurRad="76200" dist="25400" dir="8100000">
+            <a:outerShdw blurRad="76200" dist="25400" dir="8100000" algn="bl" rotWithShape="0">
               <a:srgbClr val="000000">
                 <a:alpha val="8000"/>
               </a:srgbClr>
@@ -14124,7 +13871,7 @@
           <a:bodyPr wrap="square" lIns="0" tIns="0" rIns="0" bIns="0" rtlCol="0" anchor="ctr"/>
           <a:lstStyle/>
           <a:p>
-            <a:pPr algn="ctr" indent="0" marL="0">
+            <a:pPr marL="0" indent="0" algn="ctr">
               <a:buNone/>
             </a:pPr>
             <a:r>
@@ -14136,7 +13883,7 @@
                 <a:ea typeface="Georgia" pitchFamily="34" charset="-122"/>
                 <a:cs typeface="Georgia" pitchFamily="34" charset="-120"/>
               </a:rPr>
-              <a:t>17</a:t>
+              <a:t>29</a:t>
             </a:r>
             <a:endParaRPr lang="en-US" sz="2800" dirty="0"/>
           </a:p>
@@ -14163,7 +13910,7 @@
           <a:bodyPr wrap="square" lIns="0" tIns="0" rIns="0" bIns="0" rtlCol="0" anchor="ctr"/>
           <a:lstStyle/>
           <a:p>
-            <a:pPr algn="ctr" indent="0" marL="0">
+            <a:pPr marL="0" indent="0" algn="ctr">
               <a:buNone/>
             </a:pPr>
             <a:r>
@@ -14200,7 +13947,7 @@
           </a:solidFill>
           <a:ln/>
           <a:effectLst>
-            <a:outerShdw sx="100000" sy="100000" kx="0" ky="0" algn="bl" rotWithShape="0" blurRad="76200" dist="25400" dir="8100000">
+            <a:outerShdw blurRad="76200" dist="25400" dir="8100000" algn="bl" rotWithShape="0">
               <a:srgbClr val="000000">
                 <a:alpha val="8000"/>
               </a:srgbClr>
@@ -14229,7 +13976,7 @@
           <a:bodyPr wrap="square" lIns="0" tIns="0" rIns="0" bIns="0" rtlCol="0" anchor="ctr"/>
           <a:lstStyle/>
           <a:p>
-            <a:pPr algn="ctr" indent="0" marL="0">
+            <a:pPr marL="0" indent="0" algn="ctr">
               <a:buNone/>
             </a:pPr>
             <a:r>
@@ -14268,7 +14015,7 @@
           <a:bodyPr wrap="square" lIns="0" tIns="0" rIns="0" bIns="0" rtlCol="0" anchor="ctr"/>
           <a:lstStyle/>
           <a:p>
-            <a:pPr algn="ctr" indent="0" marL="0">
+            <a:pPr marL="0" indent="0" algn="ctr">
               <a:buNone/>
             </a:pPr>
             <a:r>
@@ -14305,7 +14052,7 @@
           </a:solidFill>
           <a:ln/>
           <a:effectLst>
-            <a:outerShdw sx="100000" sy="100000" kx="0" ky="0" algn="bl" rotWithShape="0" blurRad="76200" dist="25400" dir="8100000">
+            <a:outerShdw blurRad="76200" dist="25400" dir="8100000" algn="bl" rotWithShape="0">
               <a:srgbClr val="000000">
                 <a:alpha val="8000"/>
               </a:srgbClr>
@@ -14334,7 +14081,7 @@
           <a:bodyPr wrap="square" lIns="0" tIns="0" rIns="0" bIns="0" rtlCol="0" anchor="ctr"/>
           <a:lstStyle/>
           <a:p>
-            <a:pPr algn="ctr" indent="0" marL="0">
+            <a:pPr marL="0" indent="0" algn="ctr">
               <a:buNone/>
             </a:pPr>
             <a:r>
@@ -14373,7 +14120,7 @@
           <a:bodyPr wrap="square" lIns="0" tIns="0" rIns="0" bIns="0" rtlCol="0" anchor="ctr"/>
           <a:lstStyle/>
           <a:p>
-            <a:pPr algn="ctr" indent="0" marL="0">
+            <a:pPr marL="0" indent="0" algn="ctr">
               <a:buNone/>
             </a:pPr>
             <a:r>
@@ -14407,6 +14154,7 @@
         <a:solidFill>
           <a:srgbClr val="F5F0EB"/>
         </a:solidFill>
+        <a:effectLst/>
       </p:bgPr>
     </p:bg>
     <p:spTree>
@@ -14464,7 +14212,7 @@
           <a:bodyPr wrap="square" lIns="0" tIns="0" rIns="0" bIns="0" rtlCol="0" anchor="ctr"/>
           <a:lstStyle/>
           <a:p>
-            <a:pPr indent="0" marL="0">
+            <a:pPr marL="0" indent="0">
               <a:buNone/>
             </a:pPr>
             <a:r>
@@ -14503,7 +14251,7 @@
           <a:bodyPr wrap="square" lIns="0" tIns="0" rIns="0" bIns="0" rtlCol="0" anchor="ctr"/>
           <a:lstStyle/>
           <a:p>
-            <a:pPr indent="0" marL="0">
+            <a:pPr marL="0" indent="0">
               <a:buNone/>
             </a:pPr>
             <a:r>
@@ -14542,7 +14290,7 @@
           <a:bodyPr wrap="square" lIns="0" tIns="0" rIns="0" bIns="0" rtlCol="0" anchor="ctr"/>
           <a:lstStyle/>
           <a:p>
-            <a:pPr indent="0" marL="0">
+            <a:pPr marL="0" indent="0">
               <a:buNone/>
             </a:pPr>
             <a:r>
@@ -14601,7 +14349,7 @@
           <a:bodyPr wrap="square" lIns="0" tIns="0" rIns="0" bIns="0" rtlCol="0" anchor="ctr"/>
           <a:lstStyle/>
           <a:p>
-            <a:pPr indent="0" marL="0">
+            <a:pPr marL="0" indent="0">
               <a:buNone/>
             </a:pPr>
             <a:r>
@@ -14640,7 +14388,7 @@
           <a:bodyPr wrap="square" lIns="0" tIns="0" rIns="0" bIns="0" rtlCol="0" anchor="ctr"/>
           <a:lstStyle/>
           <a:p>
-            <a:pPr indent="0" marL="0">
+            <a:pPr marL="0" indent="0">
               <a:buNone/>
             </a:pPr>
             <a:r>
@@ -14699,7 +14447,7 @@
           <a:bodyPr wrap="square" lIns="0" tIns="0" rIns="0" bIns="0" rtlCol="0" anchor="ctr"/>
           <a:lstStyle/>
           <a:p>
-            <a:pPr indent="0" marL="0">
+            <a:pPr marL="0" indent="0">
               <a:buNone/>
             </a:pPr>
             <a:r>
@@ -14738,7 +14486,7 @@
           <a:bodyPr wrap="square" lIns="0" tIns="0" rIns="0" bIns="0" rtlCol="0" anchor="ctr"/>
           <a:lstStyle/>
           <a:p>
-            <a:pPr indent="0" marL="0">
+            <a:pPr marL="0" indent="0">
               <a:buNone/>
             </a:pPr>
             <a:r>
@@ -14797,7 +14545,7 @@
           <a:bodyPr wrap="square" lIns="0" tIns="0" rIns="0" bIns="0" rtlCol="0" anchor="ctr"/>
           <a:lstStyle/>
           <a:p>
-            <a:pPr indent="0" marL="0">
+            <a:pPr marL="0" indent="0">
               <a:buNone/>
             </a:pPr>
             <a:r>
@@ -14836,7 +14584,7 @@
           <a:bodyPr wrap="square" lIns="0" tIns="0" rIns="0" bIns="0" rtlCol="0" anchor="ctr"/>
           <a:lstStyle/>
           <a:p>
-            <a:pPr indent="0" marL="0">
+            <a:pPr marL="0" indent="0">
               <a:buNone/>
             </a:pPr>
             <a:r>
@@ -14895,7 +14643,7 @@
           <a:bodyPr wrap="square" lIns="0" tIns="0" rIns="0" bIns="0" rtlCol="0" anchor="ctr"/>
           <a:lstStyle/>
           <a:p>
-            <a:pPr indent="0" marL="0">
+            <a:pPr marL="0" indent="0">
               <a:buNone/>
             </a:pPr>
             <a:r>
@@ -14934,7 +14682,7 @@
           <a:bodyPr wrap="square" lIns="0" tIns="0" rIns="0" bIns="0" rtlCol="0" anchor="ctr"/>
           <a:lstStyle/>
           <a:p>
-            <a:pPr indent="0" marL="0">
+            <a:pPr marL="0" indent="0">
               <a:buNone/>
             </a:pPr>
             <a:r>
@@ -14993,7 +14741,7 @@
           <a:bodyPr wrap="square" lIns="0" tIns="0" rIns="0" bIns="0" rtlCol="0" anchor="ctr"/>
           <a:lstStyle/>
           <a:p>
-            <a:pPr indent="0" marL="0">
+            <a:pPr marL="0" indent="0">
               <a:buNone/>
             </a:pPr>
             <a:r>
@@ -15032,7 +14780,7 @@
           <a:bodyPr wrap="square" lIns="0" tIns="0" rIns="0" bIns="0" rtlCol="0" anchor="ctr"/>
           <a:lstStyle/>
           <a:p>
-            <a:pPr indent="0" marL="0">
+            <a:pPr marL="0" indent="0">
               <a:buNone/>
             </a:pPr>
             <a:r>
@@ -15091,7 +14839,7 @@
           <a:bodyPr wrap="square" lIns="0" tIns="0" rIns="0" bIns="0" rtlCol="0" anchor="ctr"/>
           <a:lstStyle/>
           <a:p>
-            <a:pPr indent="0" marL="0">
+            <a:pPr marL="0" indent="0">
               <a:buNone/>
             </a:pPr>
             <a:r>
@@ -15130,7 +14878,7 @@
           <a:bodyPr wrap="square" lIns="0" tIns="0" rIns="0" bIns="0" rtlCol="0" anchor="ctr"/>
           <a:lstStyle/>
           <a:p>
-            <a:pPr indent="0" marL="0">
+            <a:pPr marL="0" indent="0">
               <a:buNone/>
             </a:pPr>
             <a:r>
@@ -15189,7 +14937,7 @@
           <a:bodyPr wrap="square" lIns="0" tIns="0" rIns="0" bIns="0" rtlCol="0" anchor="ctr"/>
           <a:lstStyle/>
           <a:p>
-            <a:pPr indent="0" marL="0">
+            <a:pPr marL="0" indent="0">
               <a:buNone/>
             </a:pPr>
             <a:r>
@@ -15228,7 +14976,7 @@
           <a:bodyPr wrap="square" lIns="0" tIns="0" rIns="0" bIns="0" rtlCol="0" anchor="ctr"/>
           <a:lstStyle/>
           <a:p>
-            <a:pPr indent="0" marL="0">
+            <a:pPr marL="0" indent="0">
               <a:buNone/>
             </a:pPr>
             <a:r>
@@ -15287,7 +15035,7 @@
           <a:bodyPr wrap="square" lIns="0" tIns="0" rIns="0" bIns="0" rtlCol="0" anchor="ctr"/>
           <a:lstStyle/>
           <a:p>
-            <a:pPr indent="0" marL="0">
+            <a:pPr marL="0" indent="0">
               <a:buNone/>
             </a:pPr>
             <a:r>
@@ -15326,7 +15074,7 @@
           <a:bodyPr wrap="square" lIns="0" tIns="0" rIns="0" bIns="0" rtlCol="0" anchor="ctr"/>
           <a:lstStyle/>
           <a:p>
-            <a:pPr indent="0" marL="0">
+            <a:pPr marL="0" indent="0">
               <a:buNone/>
             </a:pPr>
             <a:r>
@@ -15385,7 +15133,7 @@
           <a:bodyPr wrap="square" lIns="0" tIns="0" rIns="0" bIns="0" rtlCol="0" anchor="ctr"/>
           <a:lstStyle/>
           <a:p>
-            <a:pPr indent="0" marL="0">
+            <a:pPr marL="0" indent="0">
               <a:buNone/>
             </a:pPr>
             <a:r>
@@ -15424,7 +15172,7 @@
           <a:bodyPr wrap="square" lIns="0" tIns="0" rIns="0" bIns="0" rtlCol="0" anchor="ctr"/>
           <a:lstStyle/>
           <a:p>
-            <a:pPr indent="0" marL="0">
+            <a:pPr marL="0" indent="0">
               <a:buNone/>
             </a:pPr>
             <a:r>
@@ -15483,7 +15231,7 @@
           <a:bodyPr wrap="square" lIns="0" tIns="0" rIns="0" bIns="0" rtlCol="0" anchor="ctr"/>
           <a:lstStyle/>
           <a:p>
-            <a:pPr indent="0" marL="0">
+            <a:pPr marL="0" indent="0">
               <a:buNone/>
             </a:pPr>
             <a:r>
@@ -15522,7 +15270,7 @@
           <a:bodyPr wrap="square" lIns="0" tIns="0" rIns="0" bIns="0" rtlCol="0" anchor="ctr"/>
           <a:lstStyle/>
           <a:p>
-            <a:pPr indent="0" marL="0">
+            <a:pPr marL="0" indent="0">
               <a:buNone/>
             </a:pPr>
             <a:r>
@@ -15581,7 +15329,7 @@
           <a:bodyPr wrap="square" lIns="0" tIns="0" rIns="0" bIns="0" rtlCol="0" anchor="ctr"/>
           <a:lstStyle/>
           <a:p>
-            <a:pPr indent="0" marL="0">
+            <a:pPr marL="0" indent="0">
               <a:buNone/>
             </a:pPr>
             <a:r>
@@ -15620,7 +15368,7 @@
           <a:bodyPr wrap="square" lIns="0" tIns="0" rIns="0" bIns="0" rtlCol="0" anchor="ctr"/>
           <a:lstStyle/>
           <a:p>
-            <a:pPr indent="0" marL="0">
+            <a:pPr marL="0" indent="0">
               <a:buNone/>
             </a:pPr>
             <a:r>
@@ -15654,6 +15402,7 @@
         <a:solidFill>
           <a:srgbClr val="F5F0EB"/>
         </a:solidFill>
+        <a:effectLst/>
       </p:bgPr>
     </p:bg>
     <p:spTree>
@@ -15711,7 +15460,7 @@
           <a:bodyPr wrap="square" lIns="0" tIns="0" rIns="0" bIns="0" rtlCol="0" anchor="ctr"/>
           <a:lstStyle/>
           <a:p>
-            <a:pPr indent="0" marL="0">
+            <a:pPr marL="0" indent="0">
               <a:buNone/>
             </a:pPr>
             <a:r>
@@ -15745,18 +15494,48 @@
         </p:nvGraphicFramePr>
         <p:xfrm>
           <a:off x="365760" y="1005840"/>
-          <a:ext cx="8412480" cy="914400"/>
+          <a:ext cx="6400800" cy="3337560"/>
         </p:xfrm>
         <a:graphic>
           <a:graphicData uri="http://schemas.openxmlformats.org/drawingml/2006/table">
             <a:tbl>
               <a:tblPr/>
               <a:tblGrid>
-                <a:gridCol w="640080"/>
-                <a:gridCol w="1188720"/>
-                <a:gridCol w="1828800"/>
-                <a:gridCol w="2286000"/>
-                <a:gridCol w="457200"/>
+                <a:gridCol w="640080">
+                  <a:extLst>
+                    <a:ext uri="{9D8B030D-6E8A-4147-A177-3AD203B41FA5}">
+                      <a16:colId xmlns:a16="http://schemas.microsoft.com/office/drawing/2014/main" val="20000"/>
+                    </a:ext>
+                  </a:extLst>
+                </a:gridCol>
+                <a:gridCol w="1188720">
+                  <a:extLst>
+                    <a:ext uri="{9D8B030D-6E8A-4147-A177-3AD203B41FA5}">
+                      <a16:colId xmlns:a16="http://schemas.microsoft.com/office/drawing/2014/main" val="20001"/>
+                    </a:ext>
+                  </a:extLst>
+                </a:gridCol>
+                <a:gridCol w="1828800">
+                  <a:extLst>
+                    <a:ext uri="{9D8B030D-6E8A-4147-A177-3AD203B41FA5}">
+                      <a16:colId xmlns:a16="http://schemas.microsoft.com/office/drawing/2014/main" val="20002"/>
+                    </a:ext>
+                  </a:extLst>
+                </a:gridCol>
+                <a:gridCol w="2286000">
+                  <a:extLst>
+                    <a:ext uri="{9D8B030D-6E8A-4147-A177-3AD203B41FA5}">
+                      <a16:colId xmlns:a16="http://schemas.microsoft.com/office/drawing/2014/main" val="20003"/>
+                    </a:ext>
+                  </a:extLst>
+                </a:gridCol>
+                <a:gridCol w="457200">
+                  <a:extLst>
+                    <a:ext uri="{9D8B030D-6E8A-4147-A177-3AD203B41FA5}">
+                      <a16:colId xmlns:a16="http://schemas.microsoft.com/office/drawing/2014/main" val="20004"/>
+                    </a:ext>
+                  </a:extLst>
+                </a:gridCol>
               </a:tblGrid>
               <a:tr h="320040">
                 <a:tc>
@@ -15764,7 +15543,7 @@
                     <a:bodyPr/>
                     <a:lstStyle/>
                     <a:p>
-                      <a:pPr algn="ctr" indent="0" marL="0">
+                      <a:pPr marL="0" indent="0" algn="ctr">
                         <a:buNone/>
                       </a:pPr>
                       <a:r>
@@ -15785,7 +15564,7 @@
                       </a:endParaRPr>
                     </a:p>
                   </a:txBody>
-                  <a:tcPr marL="91440" marR="91440" marT="45720" marB="45720" anchor="ctr">
+                  <a:tcPr anchor="ctr">
                     <a:lnL w="6350" cap="flat" cmpd="sng" algn="ctr">
                       <a:solidFill>
                         <a:srgbClr val="E5E7EB"/>
@@ -15832,7 +15611,7 @@
                     <a:bodyPr/>
                     <a:lstStyle/>
                     <a:p>
-                      <a:pPr algn="ctr" indent="0" marL="0">
+                      <a:pPr marL="0" indent="0" algn="ctr">
                         <a:buNone/>
                       </a:pPr>
                       <a:r>
@@ -15853,7 +15632,7 @@
                       </a:endParaRPr>
                     </a:p>
                   </a:txBody>
-                  <a:tcPr marL="91440" marR="91440" marT="45720" marB="45720" anchor="ctr">
+                  <a:tcPr anchor="ctr">
                     <a:lnL w="6350" cap="flat" cmpd="sng" algn="ctr">
                       <a:solidFill>
                         <a:srgbClr val="E5E7EB"/>
@@ -15900,7 +15679,7 @@
                     <a:bodyPr/>
                     <a:lstStyle/>
                     <a:p>
-                      <a:pPr algn="ctr" indent="0" marL="0">
+                      <a:pPr marL="0" indent="0" algn="ctr">
                         <a:buNone/>
                       </a:pPr>
                       <a:r>
@@ -15921,7 +15700,7 @@
                       </a:endParaRPr>
                     </a:p>
                   </a:txBody>
-                  <a:tcPr marL="91440" marR="91440" marT="45720" marB="45720" anchor="ctr">
+                  <a:tcPr anchor="ctr">
                     <a:lnL w="6350" cap="flat" cmpd="sng" algn="ctr">
                       <a:solidFill>
                         <a:srgbClr val="E5E7EB"/>
@@ -15968,7 +15747,7 @@
                     <a:bodyPr/>
                     <a:lstStyle/>
                     <a:p>
-                      <a:pPr algn="ctr" indent="0" marL="0">
+                      <a:pPr marL="0" indent="0" algn="ctr">
                         <a:buNone/>
                       </a:pPr>
                       <a:r>
@@ -15989,7 +15768,7 @@
                       </a:endParaRPr>
                     </a:p>
                   </a:txBody>
-                  <a:tcPr marL="91440" marR="91440" marT="45720" marB="45720" anchor="ctr">
+                  <a:tcPr anchor="ctr">
                     <a:lnL w="6350" cap="flat" cmpd="sng" algn="ctr">
                       <a:solidFill>
                         <a:srgbClr val="E5E7EB"/>
@@ -16036,7 +15815,7 @@
                     <a:bodyPr/>
                     <a:lstStyle/>
                     <a:p>
-                      <a:pPr algn="ctr" indent="0" marL="0">
+                      <a:pPr marL="0" indent="0" algn="ctr">
                         <a:buNone/>
                       </a:pPr>
                       <a:r>
@@ -16057,7 +15836,7 @@
                       </a:endParaRPr>
                     </a:p>
                   </a:txBody>
-                  <a:tcPr marL="91440" marR="91440" marT="45720" marB="45720" anchor="ctr">
+                  <a:tcPr anchor="ctr">
                     <a:lnL w="6350" cap="flat" cmpd="sng" algn="ctr">
                       <a:solidFill>
                         <a:srgbClr val="E5E7EB"/>
@@ -16099,6 +15878,11 @@
                     </a:solidFill>
                   </a:tcPr>
                 </a:tc>
+                <a:extLst>
+                  <a:ext uri="{0D108BD9-81ED-4DB2-BD59-A6C34878D82A}">
+                    <a16:rowId xmlns:a16="http://schemas.microsoft.com/office/drawing/2014/main" val="10000"/>
+                  </a:ext>
+                </a:extLst>
               </a:tr>
               <a:tr h="274320">
                 <a:tc>
@@ -16106,7 +15890,7 @@
                     <a:bodyPr/>
                     <a:lstStyle/>
                     <a:p>
-                      <a:pPr algn="ctr" indent="0" marL="0">
+                      <a:pPr marL="0" indent="0" algn="ctr">
                         <a:buNone/>
                       </a:pPr>
                       <a:r>
@@ -16127,7 +15911,7 @@
                       </a:endParaRPr>
                     </a:p>
                   </a:txBody>
-                  <a:tcPr marL="91440" marR="91440" marT="45720" marB="45720" anchor="ctr">
+                  <a:tcPr anchor="ctr">
                     <a:lnL w="6350" cap="flat" cmpd="sng" algn="ctr">
                       <a:solidFill>
                         <a:srgbClr val="E5E7EB"/>
@@ -16171,7 +15955,7 @@
                     <a:bodyPr/>
                     <a:lstStyle/>
                     <a:p>
-                      <a:pPr algn="ctr" indent="0" marL="0">
+                      <a:pPr marL="0" indent="0" algn="ctr">
                         <a:buNone/>
                       </a:pPr>
                       <a:r>
@@ -16192,7 +15976,7 @@
                       </a:endParaRPr>
                     </a:p>
                   </a:txBody>
-                  <a:tcPr marL="91440" marR="91440" marT="45720" marB="45720" anchor="ctr">
+                  <a:tcPr anchor="ctr">
                     <a:lnL w="6350" cap="flat" cmpd="sng" algn="ctr">
                       <a:solidFill>
                         <a:srgbClr val="E5E7EB"/>
@@ -16236,7 +16020,7 @@
                     <a:bodyPr/>
                     <a:lstStyle/>
                     <a:p>
-                      <a:pPr algn="ctr" indent="0" marL="0">
+                      <a:pPr marL="0" indent="0" algn="ctr">
                         <a:buNone/>
                       </a:pPr>
                       <a:r>
@@ -16257,7 +16041,7 @@
                       </a:endParaRPr>
                     </a:p>
                   </a:txBody>
-                  <a:tcPr marL="91440" marR="91440" marT="45720" marB="45720" anchor="ctr">
+                  <a:tcPr anchor="ctr">
                     <a:lnL w="6350" cap="flat" cmpd="sng" algn="ctr">
                       <a:solidFill>
                         <a:srgbClr val="E5E7EB"/>
@@ -16301,7 +16085,7 @@
                     <a:bodyPr/>
                     <a:lstStyle/>
                     <a:p>
-                      <a:pPr algn="ctr" indent="0" marL="0">
+                      <a:pPr marL="0" indent="0" algn="ctr">
                         <a:buNone/>
                       </a:pPr>
                       <a:r>
@@ -16322,7 +16106,7 @@
                       </a:endParaRPr>
                     </a:p>
                   </a:txBody>
-                  <a:tcPr marL="91440" marR="91440" marT="45720" marB="45720" anchor="ctr">
+                  <a:tcPr anchor="ctr">
                     <a:lnL w="6350" cap="flat" cmpd="sng" algn="ctr">
                       <a:solidFill>
                         <a:srgbClr val="E5E7EB"/>
@@ -16366,7 +16150,7 @@
                     <a:bodyPr/>
                     <a:lstStyle/>
                     <a:p>
-                      <a:pPr algn="ctr" indent="0" marL="0">
+                      <a:pPr marL="0" indent="0" algn="ctr">
                         <a:buNone/>
                       </a:pPr>
                       <a:r>
@@ -16387,7 +16171,7 @@
                       </a:endParaRPr>
                     </a:p>
                   </a:txBody>
-                  <a:tcPr marL="91440" marR="91440" marT="45720" marB="45720" anchor="ctr">
+                  <a:tcPr anchor="ctr">
                     <a:lnL w="6350" cap="flat" cmpd="sng" algn="ctr">
                       <a:solidFill>
                         <a:srgbClr val="E5E7EB"/>
@@ -16426,6 +16210,11 @@
                     </a:lnB>
                   </a:tcPr>
                 </a:tc>
+                <a:extLst>
+                  <a:ext uri="{0D108BD9-81ED-4DB2-BD59-A6C34878D82A}">
+                    <a16:rowId xmlns:a16="http://schemas.microsoft.com/office/drawing/2014/main" val="10001"/>
+                  </a:ext>
+                </a:extLst>
               </a:tr>
               <a:tr h="274320">
                 <a:tc>
@@ -16433,7 +16222,7 @@
                     <a:bodyPr/>
                     <a:lstStyle/>
                     <a:p>
-                      <a:pPr algn="ctr" indent="0" marL="0">
+                      <a:pPr marL="0" indent="0" algn="ctr">
                         <a:buNone/>
                       </a:pPr>
                       <a:r>
@@ -16454,7 +16243,7 @@
                       </a:endParaRPr>
                     </a:p>
                   </a:txBody>
-                  <a:tcPr marL="91440" marR="91440" marT="45720" marB="45720" anchor="ctr">
+                  <a:tcPr anchor="ctr">
                     <a:lnL w="6350" cap="flat" cmpd="sng" algn="ctr">
                       <a:solidFill>
                         <a:srgbClr val="E5E7EB"/>
@@ -16498,7 +16287,7 @@
                     <a:bodyPr/>
                     <a:lstStyle/>
                     <a:p>
-                      <a:pPr algn="ctr" indent="0" marL="0">
+                      <a:pPr marL="0" indent="0" algn="ctr">
                         <a:buNone/>
                       </a:pPr>
                       <a:r>
@@ -16519,7 +16308,7 @@
                       </a:endParaRPr>
                     </a:p>
                   </a:txBody>
-                  <a:tcPr marL="91440" marR="91440" marT="45720" marB="45720" anchor="ctr">
+                  <a:tcPr anchor="ctr">
                     <a:lnL w="6350" cap="flat" cmpd="sng" algn="ctr">
                       <a:solidFill>
                         <a:srgbClr val="E5E7EB"/>
@@ -16563,7 +16352,7 @@
                     <a:bodyPr/>
                     <a:lstStyle/>
                     <a:p>
-                      <a:pPr algn="ctr" indent="0" marL="0">
+                      <a:pPr marL="0" indent="0" algn="ctr">
                         <a:buNone/>
                       </a:pPr>
                       <a:r>
@@ -16584,7 +16373,7 @@
                       </a:endParaRPr>
                     </a:p>
                   </a:txBody>
-                  <a:tcPr marL="91440" marR="91440" marT="45720" marB="45720" anchor="ctr">
+                  <a:tcPr anchor="ctr">
                     <a:lnL w="6350" cap="flat" cmpd="sng" algn="ctr">
                       <a:solidFill>
                         <a:srgbClr val="E5E7EB"/>
@@ -16628,7 +16417,7 @@
                     <a:bodyPr/>
                     <a:lstStyle/>
                     <a:p>
-                      <a:pPr algn="ctr" indent="0" marL="0">
+                      <a:pPr marL="0" indent="0" algn="ctr">
                         <a:buNone/>
                       </a:pPr>
                       <a:r>
@@ -16649,7 +16438,7 @@
                       </a:endParaRPr>
                     </a:p>
                   </a:txBody>
-                  <a:tcPr marL="91440" marR="91440" marT="45720" marB="45720" anchor="ctr">
+                  <a:tcPr anchor="ctr">
                     <a:lnL w="6350" cap="flat" cmpd="sng" algn="ctr">
                       <a:solidFill>
                         <a:srgbClr val="E5E7EB"/>
@@ -16693,7 +16482,7 @@
                     <a:bodyPr/>
                     <a:lstStyle/>
                     <a:p>
-                      <a:pPr algn="ctr" indent="0" marL="0">
+                      <a:pPr marL="0" indent="0" algn="ctr">
                         <a:buNone/>
                       </a:pPr>
                       <a:r>
@@ -16714,7 +16503,7 @@
                       </a:endParaRPr>
                     </a:p>
                   </a:txBody>
-                  <a:tcPr marL="91440" marR="91440" marT="45720" marB="45720" anchor="ctr">
+                  <a:tcPr anchor="ctr">
                     <a:lnL w="6350" cap="flat" cmpd="sng" algn="ctr">
                       <a:solidFill>
                         <a:srgbClr val="E5E7EB"/>
@@ -16753,6 +16542,11 @@
                     </a:lnB>
                   </a:tcPr>
                 </a:tc>
+                <a:extLst>
+                  <a:ext uri="{0D108BD9-81ED-4DB2-BD59-A6C34878D82A}">
+                    <a16:rowId xmlns:a16="http://schemas.microsoft.com/office/drawing/2014/main" val="10002"/>
+                  </a:ext>
+                </a:extLst>
               </a:tr>
               <a:tr h="274320">
                 <a:tc>
@@ -16760,7 +16554,7 @@
                     <a:bodyPr/>
                     <a:lstStyle/>
                     <a:p>
-                      <a:pPr algn="ctr" indent="0" marL="0">
+                      <a:pPr marL="0" indent="0" algn="ctr">
                         <a:buNone/>
                       </a:pPr>
                       <a:r>
@@ -16781,7 +16575,7 @@
                       </a:endParaRPr>
                     </a:p>
                   </a:txBody>
-                  <a:tcPr marL="91440" marR="91440" marT="45720" marB="45720" anchor="ctr">
+                  <a:tcPr anchor="ctr">
                     <a:lnL w="6350" cap="flat" cmpd="sng" algn="ctr">
                       <a:solidFill>
                         <a:srgbClr val="E5E7EB"/>
@@ -16825,7 +16619,7 @@
                     <a:bodyPr/>
                     <a:lstStyle/>
                     <a:p>
-                      <a:pPr algn="ctr" indent="0" marL="0">
+                      <a:pPr marL="0" indent="0" algn="ctr">
                         <a:buNone/>
                       </a:pPr>
                       <a:r>
@@ -16846,7 +16640,7 @@
                       </a:endParaRPr>
                     </a:p>
                   </a:txBody>
-                  <a:tcPr marL="91440" marR="91440" marT="45720" marB="45720" anchor="ctr">
+                  <a:tcPr anchor="ctr">
                     <a:lnL w="6350" cap="flat" cmpd="sng" algn="ctr">
                       <a:solidFill>
                         <a:srgbClr val="E5E7EB"/>
@@ -16890,7 +16684,7 @@
                     <a:bodyPr/>
                     <a:lstStyle/>
                     <a:p>
-                      <a:pPr algn="ctr" indent="0" marL="0">
+                      <a:pPr marL="0" indent="0" algn="ctr">
                         <a:buNone/>
                       </a:pPr>
                       <a:r>
@@ -16911,7 +16705,7 @@
                       </a:endParaRPr>
                     </a:p>
                   </a:txBody>
-                  <a:tcPr marL="91440" marR="91440" marT="45720" marB="45720" anchor="ctr">
+                  <a:tcPr anchor="ctr">
                     <a:lnL w="6350" cap="flat" cmpd="sng" algn="ctr">
                       <a:solidFill>
                         <a:srgbClr val="E5E7EB"/>
@@ -16955,7 +16749,7 @@
                     <a:bodyPr/>
                     <a:lstStyle/>
                     <a:p>
-                      <a:pPr algn="ctr" indent="0" marL="0">
+                      <a:pPr marL="0" indent="0" algn="ctr">
                         <a:buNone/>
                       </a:pPr>
                       <a:r>
@@ -16976,7 +16770,7 @@
                       </a:endParaRPr>
                     </a:p>
                   </a:txBody>
-                  <a:tcPr marL="91440" marR="91440" marT="45720" marB="45720" anchor="ctr">
+                  <a:tcPr anchor="ctr">
                     <a:lnL w="6350" cap="flat" cmpd="sng" algn="ctr">
                       <a:solidFill>
                         <a:srgbClr val="E5E7EB"/>
@@ -17020,7 +16814,7 @@
                     <a:bodyPr/>
                     <a:lstStyle/>
                     <a:p>
-                      <a:pPr algn="ctr" indent="0" marL="0">
+                      <a:pPr marL="0" indent="0" algn="ctr">
                         <a:buNone/>
                       </a:pPr>
                       <a:r>
@@ -17041,7 +16835,7 @@
                       </a:endParaRPr>
                     </a:p>
                   </a:txBody>
-                  <a:tcPr marL="91440" marR="91440" marT="45720" marB="45720" anchor="ctr">
+                  <a:tcPr anchor="ctr">
                     <a:lnL w="6350" cap="flat" cmpd="sng" algn="ctr">
                       <a:solidFill>
                         <a:srgbClr val="E5E7EB"/>
@@ -17080,6 +16874,11 @@
                     </a:lnB>
                   </a:tcPr>
                 </a:tc>
+                <a:extLst>
+                  <a:ext uri="{0D108BD9-81ED-4DB2-BD59-A6C34878D82A}">
+                    <a16:rowId xmlns:a16="http://schemas.microsoft.com/office/drawing/2014/main" val="10003"/>
+                  </a:ext>
+                </a:extLst>
               </a:tr>
               <a:tr h="274320">
                 <a:tc>
@@ -17087,7 +16886,7 @@
                     <a:bodyPr/>
                     <a:lstStyle/>
                     <a:p>
-                      <a:pPr algn="ctr" indent="0" marL="0">
+                      <a:pPr marL="0" indent="0" algn="ctr">
                         <a:buNone/>
                       </a:pPr>
                       <a:r>
@@ -17108,7 +16907,7 @@
                       </a:endParaRPr>
                     </a:p>
                   </a:txBody>
-                  <a:tcPr marL="91440" marR="91440" marT="45720" marB="45720" anchor="ctr">
+                  <a:tcPr anchor="ctr">
                     <a:lnL w="6350" cap="flat" cmpd="sng" algn="ctr">
                       <a:solidFill>
                         <a:srgbClr val="E5E7EB"/>
@@ -17152,7 +16951,7 @@
                     <a:bodyPr/>
                     <a:lstStyle/>
                     <a:p>
-                      <a:pPr algn="ctr" indent="0" marL="0">
+                      <a:pPr marL="0" indent="0" algn="ctr">
                         <a:buNone/>
                       </a:pPr>
                       <a:r>
@@ -17173,7 +16972,7 @@
                       </a:endParaRPr>
                     </a:p>
                   </a:txBody>
-                  <a:tcPr marL="91440" marR="91440" marT="45720" marB="45720" anchor="ctr">
+                  <a:tcPr anchor="ctr">
                     <a:lnL w="6350" cap="flat" cmpd="sng" algn="ctr">
                       <a:solidFill>
                         <a:srgbClr val="E5E7EB"/>
@@ -17217,7 +17016,7 @@
                     <a:bodyPr/>
                     <a:lstStyle/>
                     <a:p>
-                      <a:pPr algn="ctr" indent="0" marL="0">
+                      <a:pPr marL="0" indent="0" algn="ctr">
                         <a:buNone/>
                       </a:pPr>
                       <a:r>
@@ -17238,7 +17037,7 @@
                       </a:endParaRPr>
                     </a:p>
                   </a:txBody>
-                  <a:tcPr marL="91440" marR="91440" marT="45720" marB="45720" anchor="ctr">
+                  <a:tcPr anchor="ctr">
                     <a:lnL w="6350" cap="flat" cmpd="sng" algn="ctr">
                       <a:solidFill>
                         <a:srgbClr val="E5E7EB"/>
@@ -17282,7 +17081,7 @@
                     <a:bodyPr/>
                     <a:lstStyle/>
                     <a:p>
-                      <a:pPr algn="ctr" indent="0" marL="0">
+                      <a:pPr marL="0" indent="0" algn="ctr">
                         <a:buNone/>
                       </a:pPr>
                       <a:r>
@@ -17303,7 +17102,7 @@
                       </a:endParaRPr>
                     </a:p>
                   </a:txBody>
-                  <a:tcPr marL="91440" marR="91440" marT="45720" marB="45720" anchor="ctr">
+                  <a:tcPr anchor="ctr">
                     <a:lnL w="6350" cap="flat" cmpd="sng" algn="ctr">
                       <a:solidFill>
                         <a:srgbClr val="E5E7EB"/>
@@ -17347,7 +17146,7 @@
                     <a:bodyPr/>
                     <a:lstStyle/>
                     <a:p>
-                      <a:pPr algn="ctr" indent="0" marL="0">
+                      <a:pPr marL="0" indent="0" algn="ctr">
                         <a:buNone/>
                       </a:pPr>
                       <a:r>
@@ -17368,7 +17167,7 @@
                       </a:endParaRPr>
                     </a:p>
                   </a:txBody>
-                  <a:tcPr marL="91440" marR="91440" marT="45720" marB="45720" anchor="ctr">
+                  <a:tcPr anchor="ctr">
                     <a:lnL w="6350" cap="flat" cmpd="sng" algn="ctr">
                       <a:solidFill>
                         <a:srgbClr val="E5E7EB"/>
@@ -17407,6 +17206,11 @@
                     </a:lnB>
                   </a:tcPr>
                 </a:tc>
+                <a:extLst>
+                  <a:ext uri="{0D108BD9-81ED-4DB2-BD59-A6C34878D82A}">
+                    <a16:rowId xmlns:a16="http://schemas.microsoft.com/office/drawing/2014/main" val="10004"/>
+                  </a:ext>
+                </a:extLst>
               </a:tr>
               <a:tr h="274320">
                 <a:tc>
@@ -17414,7 +17218,7 @@
                     <a:bodyPr/>
                     <a:lstStyle/>
                     <a:p>
-                      <a:pPr algn="ctr" indent="0" marL="0">
+                      <a:pPr marL="0" indent="0" algn="ctr">
                         <a:buNone/>
                       </a:pPr>
                       <a:r>
@@ -17435,7 +17239,7 @@
                       </a:endParaRPr>
                     </a:p>
                   </a:txBody>
-                  <a:tcPr marL="91440" marR="91440" marT="45720" marB="45720" anchor="ctr">
+                  <a:tcPr anchor="ctr">
                     <a:lnL w="6350" cap="flat" cmpd="sng" algn="ctr">
                       <a:solidFill>
                         <a:srgbClr val="E5E7EB"/>
@@ -17479,7 +17283,7 @@
                     <a:bodyPr/>
                     <a:lstStyle/>
                     <a:p>
-                      <a:pPr algn="ctr" indent="0" marL="0">
+                      <a:pPr marL="0" indent="0" algn="ctr">
                         <a:buNone/>
                       </a:pPr>
                       <a:r>
@@ -17500,7 +17304,7 @@
                       </a:endParaRPr>
                     </a:p>
                   </a:txBody>
-                  <a:tcPr marL="91440" marR="91440" marT="45720" marB="45720" anchor="ctr">
+                  <a:tcPr anchor="ctr">
                     <a:lnL w="6350" cap="flat" cmpd="sng" algn="ctr">
                       <a:solidFill>
                         <a:srgbClr val="E5E7EB"/>
@@ -17544,7 +17348,7 @@
                     <a:bodyPr/>
                     <a:lstStyle/>
                     <a:p>
-                      <a:pPr algn="ctr" indent="0" marL="0">
+                      <a:pPr marL="0" indent="0" algn="ctr">
                         <a:buNone/>
                       </a:pPr>
                       <a:r>
@@ -17565,7 +17369,7 @@
                       </a:endParaRPr>
                     </a:p>
                   </a:txBody>
-                  <a:tcPr marL="91440" marR="91440" marT="45720" marB="45720" anchor="ctr">
+                  <a:tcPr anchor="ctr">
                     <a:lnL w="6350" cap="flat" cmpd="sng" algn="ctr">
                       <a:solidFill>
                         <a:srgbClr val="E5E7EB"/>
@@ -17609,7 +17413,7 @@
                     <a:bodyPr/>
                     <a:lstStyle/>
                     <a:p>
-                      <a:pPr algn="ctr" indent="0" marL="0">
+                      <a:pPr marL="0" indent="0" algn="ctr">
                         <a:buNone/>
                       </a:pPr>
                       <a:r>
@@ -17630,7 +17434,7 @@
                       </a:endParaRPr>
                     </a:p>
                   </a:txBody>
-                  <a:tcPr marL="91440" marR="91440" marT="45720" marB="45720" anchor="ctr">
+                  <a:tcPr anchor="ctr">
                     <a:lnL w="6350" cap="flat" cmpd="sng" algn="ctr">
                       <a:solidFill>
                         <a:srgbClr val="E5E7EB"/>
@@ -17674,7 +17478,7 @@
                     <a:bodyPr/>
                     <a:lstStyle/>
                     <a:p>
-                      <a:pPr algn="ctr" indent="0" marL="0">
+                      <a:pPr marL="0" indent="0" algn="ctr">
                         <a:buNone/>
                       </a:pPr>
                       <a:r>
@@ -17695,7 +17499,7 @@
                       </a:endParaRPr>
                     </a:p>
                   </a:txBody>
-                  <a:tcPr marL="91440" marR="91440" marT="45720" marB="45720" anchor="ctr">
+                  <a:tcPr anchor="ctr">
                     <a:lnL w="6350" cap="flat" cmpd="sng" algn="ctr">
                       <a:solidFill>
                         <a:srgbClr val="E5E7EB"/>
@@ -17734,6 +17538,11 @@
                     </a:lnB>
                   </a:tcPr>
                 </a:tc>
+                <a:extLst>
+                  <a:ext uri="{0D108BD9-81ED-4DB2-BD59-A6C34878D82A}">
+                    <a16:rowId xmlns:a16="http://schemas.microsoft.com/office/drawing/2014/main" val="10005"/>
+                  </a:ext>
+                </a:extLst>
               </a:tr>
               <a:tr h="274320">
                 <a:tc>
@@ -17741,7 +17550,7 @@
                     <a:bodyPr/>
                     <a:lstStyle/>
                     <a:p>
-                      <a:pPr algn="ctr" indent="0" marL="0">
+                      <a:pPr marL="0" indent="0" algn="ctr">
                         <a:buNone/>
                       </a:pPr>
                       <a:r>
@@ -17762,7 +17571,7 @@
                       </a:endParaRPr>
                     </a:p>
                   </a:txBody>
-                  <a:tcPr marL="91440" marR="91440" marT="45720" marB="45720" anchor="ctr">
+                  <a:tcPr anchor="ctr">
                     <a:lnL w="6350" cap="flat" cmpd="sng" algn="ctr">
                       <a:solidFill>
                         <a:srgbClr val="E5E7EB"/>
@@ -17806,7 +17615,7 @@
                     <a:bodyPr/>
                     <a:lstStyle/>
                     <a:p>
-                      <a:pPr algn="ctr" indent="0" marL="0">
+                      <a:pPr marL="0" indent="0" algn="ctr">
                         <a:buNone/>
                       </a:pPr>
                       <a:r>
@@ -17827,7 +17636,7 @@
                       </a:endParaRPr>
                     </a:p>
                   </a:txBody>
-                  <a:tcPr marL="91440" marR="91440" marT="45720" marB="45720" anchor="ctr">
+                  <a:tcPr anchor="ctr">
                     <a:lnL w="6350" cap="flat" cmpd="sng" algn="ctr">
                       <a:solidFill>
                         <a:srgbClr val="E5E7EB"/>
@@ -17871,7 +17680,7 @@
                     <a:bodyPr/>
                     <a:lstStyle/>
                     <a:p>
-                      <a:pPr algn="ctr" indent="0" marL="0">
+                      <a:pPr marL="0" indent="0" algn="ctr">
                         <a:buNone/>
                       </a:pPr>
                       <a:r>
@@ -17892,7 +17701,7 @@
                       </a:endParaRPr>
                     </a:p>
                   </a:txBody>
-                  <a:tcPr marL="91440" marR="91440" marT="45720" marB="45720" anchor="ctr">
+                  <a:tcPr anchor="ctr">
                     <a:lnL w="6350" cap="flat" cmpd="sng" algn="ctr">
                       <a:solidFill>
                         <a:srgbClr val="E5E7EB"/>
@@ -17936,7 +17745,7 @@
                     <a:bodyPr/>
                     <a:lstStyle/>
                     <a:p>
-                      <a:pPr algn="ctr" indent="0" marL="0">
+                      <a:pPr marL="0" indent="0" algn="ctr">
                         <a:buNone/>
                       </a:pPr>
                       <a:r>
@@ -17957,7 +17766,7 @@
                       </a:endParaRPr>
                     </a:p>
                   </a:txBody>
-                  <a:tcPr marL="91440" marR="91440" marT="45720" marB="45720" anchor="ctr">
+                  <a:tcPr anchor="ctr">
                     <a:lnL w="6350" cap="flat" cmpd="sng" algn="ctr">
                       <a:solidFill>
                         <a:srgbClr val="E5E7EB"/>
@@ -18001,7 +17810,7 @@
                     <a:bodyPr/>
                     <a:lstStyle/>
                     <a:p>
-                      <a:pPr algn="ctr" indent="0" marL="0">
+                      <a:pPr marL="0" indent="0" algn="ctr">
                         <a:buNone/>
                       </a:pPr>
                       <a:r>
@@ -18022,7 +17831,7 @@
                       </a:endParaRPr>
                     </a:p>
                   </a:txBody>
-                  <a:tcPr marL="91440" marR="91440" marT="45720" marB="45720" anchor="ctr">
+                  <a:tcPr anchor="ctr">
                     <a:lnL w="6350" cap="flat" cmpd="sng" algn="ctr">
                       <a:solidFill>
                         <a:srgbClr val="E5E7EB"/>
@@ -18061,6 +17870,11 @@
                     </a:lnB>
                   </a:tcPr>
                 </a:tc>
+                <a:extLst>
+                  <a:ext uri="{0D108BD9-81ED-4DB2-BD59-A6C34878D82A}">
+                    <a16:rowId xmlns:a16="http://schemas.microsoft.com/office/drawing/2014/main" val="10006"/>
+                  </a:ext>
+                </a:extLst>
               </a:tr>
               <a:tr h="274320">
                 <a:tc>
@@ -18068,7 +17882,7 @@
                     <a:bodyPr/>
                     <a:lstStyle/>
                     <a:p>
-                      <a:pPr algn="ctr" indent="0" marL="0">
+                      <a:pPr marL="0" indent="0" algn="ctr">
                         <a:buNone/>
                       </a:pPr>
                       <a:r>
@@ -18089,7 +17903,7 @@
                       </a:endParaRPr>
                     </a:p>
                   </a:txBody>
-                  <a:tcPr marL="91440" marR="91440" marT="45720" marB="45720" anchor="ctr">
+                  <a:tcPr anchor="ctr">
                     <a:lnL w="6350" cap="flat" cmpd="sng" algn="ctr">
                       <a:solidFill>
                         <a:srgbClr val="E5E7EB"/>
@@ -18133,7 +17947,7 @@
                     <a:bodyPr/>
                     <a:lstStyle/>
                     <a:p>
-                      <a:pPr algn="ctr" indent="0" marL="0">
+                      <a:pPr marL="0" indent="0" algn="ctr">
                         <a:buNone/>
                       </a:pPr>
                       <a:r>
@@ -18154,7 +17968,7 @@
                       </a:endParaRPr>
                     </a:p>
                   </a:txBody>
-                  <a:tcPr marL="91440" marR="91440" marT="45720" marB="45720" anchor="ctr">
+                  <a:tcPr anchor="ctr">
                     <a:lnL w="6350" cap="flat" cmpd="sng" algn="ctr">
                       <a:solidFill>
                         <a:srgbClr val="E5E7EB"/>
@@ -18198,7 +18012,7 @@
                     <a:bodyPr/>
                     <a:lstStyle/>
                     <a:p>
-                      <a:pPr algn="ctr" indent="0" marL="0">
+                      <a:pPr marL="0" indent="0" algn="ctr">
                         <a:buNone/>
                       </a:pPr>
                       <a:r>
@@ -18219,7 +18033,7 @@
                       </a:endParaRPr>
                     </a:p>
                   </a:txBody>
-                  <a:tcPr marL="91440" marR="91440" marT="45720" marB="45720" anchor="ctr">
+                  <a:tcPr anchor="ctr">
                     <a:lnL w="6350" cap="flat" cmpd="sng" algn="ctr">
                       <a:solidFill>
                         <a:srgbClr val="E5E7EB"/>
@@ -18263,7 +18077,7 @@
                     <a:bodyPr/>
                     <a:lstStyle/>
                     <a:p>
-                      <a:pPr algn="ctr" indent="0" marL="0">
+                      <a:pPr marL="0" indent="0" algn="ctr">
                         <a:buNone/>
                       </a:pPr>
                       <a:r>
@@ -18284,7 +18098,7 @@
                       </a:endParaRPr>
                     </a:p>
                   </a:txBody>
-                  <a:tcPr marL="91440" marR="91440" marT="45720" marB="45720" anchor="ctr">
+                  <a:tcPr anchor="ctr">
                     <a:lnL w="6350" cap="flat" cmpd="sng" algn="ctr">
                       <a:solidFill>
                         <a:srgbClr val="E5E7EB"/>
@@ -18328,7 +18142,7 @@
                     <a:bodyPr/>
                     <a:lstStyle/>
                     <a:p>
-                      <a:pPr algn="ctr" indent="0" marL="0">
+                      <a:pPr marL="0" indent="0" algn="ctr">
                         <a:buNone/>
                       </a:pPr>
                       <a:r>
@@ -18349,7 +18163,7 @@
                       </a:endParaRPr>
                     </a:p>
                   </a:txBody>
-                  <a:tcPr marL="91440" marR="91440" marT="45720" marB="45720" anchor="ctr">
+                  <a:tcPr anchor="ctr">
                     <a:lnL w="6350" cap="flat" cmpd="sng" algn="ctr">
                       <a:solidFill>
                         <a:srgbClr val="E5E7EB"/>
@@ -18388,6 +18202,11 @@
                     </a:lnB>
                   </a:tcPr>
                 </a:tc>
+                <a:extLst>
+                  <a:ext uri="{0D108BD9-81ED-4DB2-BD59-A6C34878D82A}">
+                    <a16:rowId xmlns:a16="http://schemas.microsoft.com/office/drawing/2014/main" val="10007"/>
+                  </a:ext>
+                </a:extLst>
               </a:tr>
               <a:tr h="274320">
                 <a:tc>
@@ -18395,7 +18214,7 @@
                     <a:bodyPr/>
                     <a:lstStyle/>
                     <a:p>
-                      <a:pPr algn="ctr" indent="0" marL="0">
+                      <a:pPr marL="0" indent="0" algn="ctr">
                         <a:buNone/>
                       </a:pPr>
                       <a:r>
@@ -18416,7 +18235,7 @@
                       </a:endParaRPr>
                     </a:p>
                   </a:txBody>
-                  <a:tcPr marL="91440" marR="91440" marT="45720" marB="45720" anchor="ctr">
+                  <a:tcPr anchor="ctr">
                     <a:lnL w="6350" cap="flat" cmpd="sng" algn="ctr">
                       <a:solidFill>
                         <a:srgbClr val="E5E7EB"/>
@@ -18460,7 +18279,7 @@
                     <a:bodyPr/>
                     <a:lstStyle/>
                     <a:p>
-                      <a:pPr algn="ctr" indent="0" marL="0">
+                      <a:pPr marL="0" indent="0" algn="ctr">
                         <a:buNone/>
                       </a:pPr>
                       <a:r>
@@ -18481,7 +18300,7 @@
                       </a:endParaRPr>
                     </a:p>
                   </a:txBody>
-                  <a:tcPr marL="91440" marR="91440" marT="45720" marB="45720" anchor="ctr">
+                  <a:tcPr anchor="ctr">
                     <a:lnL w="6350" cap="flat" cmpd="sng" algn="ctr">
                       <a:solidFill>
                         <a:srgbClr val="E5E7EB"/>
@@ -18525,7 +18344,7 @@
                     <a:bodyPr/>
                     <a:lstStyle/>
                     <a:p>
-                      <a:pPr algn="ctr" indent="0" marL="0">
+                      <a:pPr marL="0" indent="0" algn="ctr">
                         <a:buNone/>
                       </a:pPr>
                       <a:r>
@@ -18546,7 +18365,7 @@
                       </a:endParaRPr>
                     </a:p>
                   </a:txBody>
-                  <a:tcPr marL="91440" marR="91440" marT="45720" marB="45720" anchor="ctr">
+                  <a:tcPr anchor="ctr">
                     <a:lnL w="6350" cap="flat" cmpd="sng" algn="ctr">
                       <a:solidFill>
                         <a:srgbClr val="E5E7EB"/>
@@ -18590,7 +18409,7 @@
                     <a:bodyPr/>
                     <a:lstStyle/>
                     <a:p>
-                      <a:pPr algn="ctr" indent="0" marL="0">
+                      <a:pPr marL="0" indent="0" algn="ctr">
                         <a:buNone/>
                       </a:pPr>
                       <a:r>
@@ -18611,7 +18430,7 @@
                       </a:endParaRPr>
                     </a:p>
                   </a:txBody>
-                  <a:tcPr marL="91440" marR="91440" marT="45720" marB="45720" anchor="ctr">
+                  <a:tcPr anchor="ctr">
                     <a:lnL w="6350" cap="flat" cmpd="sng" algn="ctr">
                       <a:solidFill>
                         <a:srgbClr val="E5E7EB"/>
@@ -18655,7 +18474,7 @@
                     <a:bodyPr/>
                     <a:lstStyle/>
                     <a:p>
-                      <a:pPr algn="ctr" indent="0" marL="0">
+                      <a:pPr marL="0" indent="0" algn="ctr">
                         <a:buNone/>
                       </a:pPr>
                       <a:r>
@@ -18676,7 +18495,7 @@
                       </a:endParaRPr>
                     </a:p>
                   </a:txBody>
-                  <a:tcPr marL="91440" marR="91440" marT="45720" marB="45720" anchor="ctr">
+                  <a:tcPr anchor="ctr">
                     <a:lnL w="6350" cap="flat" cmpd="sng" algn="ctr">
                       <a:solidFill>
                         <a:srgbClr val="E5E7EB"/>
@@ -18715,6 +18534,11 @@
                     </a:lnB>
                   </a:tcPr>
                 </a:tc>
+                <a:extLst>
+                  <a:ext uri="{0D108BD9-81ED-4DB2-BD59-A6C34878D82A}">
+                    <a16:rowId xmlns:a16="http://schemas.microsoft.com/office/drawing/2014/main" val="10008"/>
+                  </a:ext>
+                </a:extLst>
               </a:tr>
               <a:tr h="274320">
                 <a:tc>
@@ -18722,7 +18546,7 @@
                     <a:bodyPr/>
                     <a:lstStyle/>
                     <a:p>
-                      <a:pPr algn="ctr" indent="0" marL="0">
+                      <a:pPr marL="0" indent="0" algn="ctr">
                         <a:buNone/>
                       </a:pPr>
                       <a:r>
@@ -18743,7 +18567,7 @@
                       </a:endParaRPr>
                     </a:p>
                   </a:txBody>
-                  <a:tcPr marL="91440" marR="91440" marT="45720" marB="45720" anchor="ctr">
+                  <a:tcPr anchor="ctr">
                     <a:lnL w="6350" cap="flat" cmpd="sng" algn="ctr">
                       <a:solidFill>
                         <a:srgbClr val="E5E7EB"/>
@@ -18787,7 +18611,7 @@
                     <a:bodyPr/>
                     <a:lstStyle/>
                     <a:p>
-                      <a:pPr algn="ctr" indent="0" marL="0">
+                      <a:pPr marL="0" indent="0" algn="ctr">
                         <a:buNone/>
                       </a:pPr>
                       <a:r>
@@ -18808,7 +18632,7 @@
                       </a:endParaRPr>
                     </a:p>
                   </a:txBody>
-                  <a:tcPr marL="91440" marR="91440" marT="45720" marB="45720" anchor="ctr">
+                  <a:tcPr anchor="ctr">
                     <a:lnL w="6350" cap="flat" cmpd="sng" algn="ctr">
                       <a:solidFill>
                         <a:srgbClr val="E5E7EB"/>
@@ -18852,7 +18676,7 @@
                     <a:bodyPr/>
                     <a:lstStyle/>
                     <a:p>
-                      <a:pPr algn="ctr" indent="0" marL="0">
+                      <a:pPr marL="0" indent="0" algn="ctr">
                         <a:buNone/>
                       </a:pPr>
                       <a:r>
@@ -18873,7 +18697,7 @@
                       </a:endParaRPr>
                     </a:p>
                   </a:txBody>
-                  <a:tcPr marL="91440" marR="91440" marT="45720" marB="45720" anchor="ctr">
+                  <a:tcPr anchor="ctr">
                     <a:lnL w="6350" cap="flat" cmpd="sng" algn="ctr">
                       <a:solidFill>
                         <a:srgbClr val="E5E7EB"/>
@@ -18917,7 +18741,7 @@
                     <a:bodyPr/>
                     <a:lstStyle/>
                     <a:p>
-                      <a:pPr algn="ctr" indent="0" marL="0">
+                      <a:pPr marL="0" indent="0" algn="ctr">
                         <a:buNone/>
                       </a:pPr>
                       <a:r>
@@ -18938,7 +18762,7 @@
                       </a:endParaRPr>
                     </a:p>
                   </a:txBody>
-                  <a:tcPr marL="91440" marR="91440" marT="45720" marB="45720" anchor="ctr">
+                  <a:tcPr anchor="ctr">
                     <a:lnL w="6350" cap="flat" cmpd="sng" algn="ctr">
                       <a:solidFill>
                         <a:srgbClr val="E5E7EB"/>
@@ -18982,7 +18806,7 @@
                     <a:bodyPr/>
                     <a:lstStyle/>
                     <a:p>
-                      <a:pPr algn="ctr" indent="0" marL="0">
+                      <a:pPr marL="0" indent="0" algn="ctr">
                         <a:buNone/>
                       </a:pPr>
                       <a:r>
@@ -19003,7 +18827,7 @@
                       </a:endParaRPr>
                     </a:p>
                   </a:txBody>
-                  <a:tcPr marL="91440" marR="91440" marT="45720" marB="45720" anchor="ctr">
+                  <a:tcPr anchor="ctr">
                     <a:lnL w="6350" cap="flat" cmpd="sng" algn="ctr">
                       <a:solidFill>
                         <a:srgbClr val="E5E7EB"/>
@@ -19042,6 +18866,11 @@
                     </a:lnB>
                   </a:tcPr>
                 </a:tc>
+                <a:extLst>
+                  <a:ext uri="{0D108BD9-81ED-4DB2-BD59-A6C34878D82A}">
+                    <a16:rowId xmlns:a16="http://schemas.microsoft.com/office/drawing/2014/main" val="10009"/>
+                  </a:ext>
+                </a:extLst>
               </a:tr>
               <a:tr h="274320">
                 <a:tc>
@@ -19049,7 +18878,7 @@
                     <a:bodyPr/>
                     <a:lstStyle/>
                     <a:p>
-                      <a:pPr algn="ctr" indent="0" marL="0">
+                      <a:pPr marL="0" indent="0" algn="ctr">
                         <a:buNone/>
                       </a:pPr>
                       <a:r>
@@ -19070,7 +18899,7 @@
                       </a:endParaRPr>
                     </a:p>
                   </a:txBody>
-                  <a:tcPr marL="91440" marR="91440" marT="45720" marB="45720" anchor="ctr">
+                  <a:tcPr anchor="ctr">
                     <a:lnL w="6350" cap="flat" cmpd="sng" algn="ctr">
                       <a:solidFill>
                         <a:srgbClr val="E5E7EB"/>
@@ -19114,7 +18943,7 @@
                     <a:bodyPr/>
                     <a:lstStyle/>
                     <a:p>
-                      <a:pPr algn="ctr" indent="0" marL="0">
+                      <a:pPr marL="0" indent="0" algn="ctr">
                         <a:buNone/>
                       </a:pPr>
                       <a:r>
@@ -19135,7 +18964,7 @@
                       </a:endParaRPr>
                     </a:p>
                   </a:txBody>
-                  <a:tcPr marL="91440" marR="91440" marT="45720" marB="45720" anchor="ctr">
+                  <a:tcPr anchor="ctr">
                     <a:lnL w="6350" cap="flat" cmpd="sng" algn="ctr">
                       <a:solidFill>
                         <a:srgbClr val="E5E7EB"/>
@@ -19179,7 +19008,7 @@
                     <a:bodyPr/>
                     <a:lstStyle/>
                     <a:p>
-                      <a:pPr algn="ctr" indent="0" marL="0">
+                      <a:pPr marL="0" indent="0" algn="ctr">
                         <a:buNone/>
                       </a:pPr>
                       <a:r>
@@ -19200,7 +19029,7 @@
                       </a:endParaRPr>
                     </a:p>
                   </a:txBody>
-                  <a:tcPr marL="91440" marR="91440" marT="45720" marB="45720" anchor="ctr">
+                  <a:tcPr anchor="ctr">
                     <a:lnL w="6350" cap="flat" cmpd="sng" algn="ctr">
                       <a:solidFill>
                         <a:srgbClr val="E5E7EB"/>
@@ -19244,7 +19073,7 @@
                     <a:bodyPr/>
                     <a:lstStyle/>
                     <a:p>
-                      <a:pPr algn="ctr" indent="0" marL="0">
+                      <a:pPr marL="0" indent="0" algn="ctr">
                         <a:buNone/>
                       </a:pPr>
                       <a:r>
@@ -19265,7 +19094,7 @@
                       </a:endParaRPr>
                     </a:p>
                   </a:txBody>
-                  <a:tcPr marL="91440" marR="91440" marT="45720" marB="45720" anchor="ctr">
+                  <a:tcPr anchor="ctr">
                     <a:lnL w="6350" cap="flat" cmpd="sng" algn="ctr">
                       <a:solidFill>
                         <a:srgbClr val="E5E7EB"/>
@@ -19309,7 +19138,7 @@
                     <a:bodyPr/>
                     <a:lstStyle/>
                     <a:p>
-                      <a:pPr algn="ctr" indent="0" marL="0">
+                      <a:pPr marL="0" indent="0" algn="ctr">
                         <a:buNone/>
                       </a:pPr>
                       <a:r>
@@ -19330,7 +19159,7 @@
                       </a:endParaRPr>
                     </a:p>
                   </a:txBody>
-                  <a:tcPr marL="91440" marR="91440" marT="45720" marB="45720" anchor="ctr">
+                  <a:tcPr anchor="ctr">
                     <a:lnL w="6350" cap="flat" cmpd="sng" algn="ctr">
                       <a:solidFill>
                         <a:srgbClr val="E5E7EB"/>
@@ -19369,6 +19198,11 @@
                     </a:lnB>
                   </a:tcPr>
                 </a:tc>
+                <a:extLst>
+                  <a:ext uri="{0D108BD9-81ED-4DB2-BD59-A6C34878D82A}">
+                    <a16:rowId xmlns:a16="http://schemas.microsoft.com/office/drawing/2014/main" val="10010"/>
+                  </a:ext>
+                </a:extLst>
               </a:tr>
               <a:tr h="274320">
                 <a:tc>
@@ -19376,7 +19210,7 @@
                     <a:bodyPr/>
                     <a:lstStyle/>
                     <a:p>
-                      <a:pPr algn="ctr" indent="0" marL="0">
+                      <a:pPr marL="0" indent="0" algn="ctr">
                         <a:buNone/>
                       </a:pPr>
                       <a:r>
@@ -19397,7 +19231,7 @@
                       </a:endParaRPr>
                     </a:p>
                   </a:txBody>
-                  <a:tcPr marL="91440" marR="91440" marT="45720" marB="45720" anchor="ctr">
+                  <a:tcPr anchor="ctr">
                     <a:lnL w="6350" cap="flat" cmpd="sng" algn="ctr">
                       <a:solidFill>
                         <a:srgbClr val="E5E7EB"/>
@@ -19441,7 +19275,7 @@
                     <a:bodyPr/>
                     <a:lstStyle/>
                     <a:p>
-                      <a:pPr algn="ctr" indent="0" marL="0">
+                      <a:pPr marL="0" indent="0" algn="ctr">
                         <a:buNone/>
                       </a:pPr>
                       <a:r>
@@ -19462,7 +19296,7 @@
                       </a:endParaRPr>
                     </a:p>
                   </a:txBody>
-                  <a:tcPr marL="91440" marR="91440" marT="45720" marB="45720" anchor="ctr">
+                  <a:tcPr anchor="ctr">
                     <a:lnL w="6350" cap="flat" cmpd="sng" algn="ctr">
                       <a:solidFill>
                         <a:srgbClr val="E5E7EB"/>
@@ -19506,7 +19340,7 @@
                     <a:bodyPr/>
                     <a:lstStyle/>
                     <a:p>
-                      <a:pPr algn="ctr" indent="0" marL="0">
+                      <a:pPr marL="0" indent="0" algn="ctr">
                         <a:buNone/>
                       </a:pPr>
                       <a:r>
@@ -19527,7 +19361,7 @@
                       </a:endParaRPr>
                     </a:p>
                   </a:txBody>
-                  <a:tcPr marL="91440" marR="91440" marT="45720" marB="45720" anchor="ctr">
+                  <a:tcPr anchor="ctr">
                     <a:lnL w="6350" cap="flat" cmpd="sng" algn="ctr">
                       <a:solidFill>
                         <a:srgbClr val="E5E7EB"/>
@@ -19571,7 +19405,7 @@
                     <a:bodyPr/>
                     <a:lstStyle/>
                     <a:p>
-                      <a:pPr algn="ctr" indent="0" marL="0">
+                      <a:pPr marL="0" indent="0" algn="ctr">
                         <a:buNone/>
                       </a:pPr>
                       <a:r>
@@ -19592,7 +19426,7 @@
                       </a:endParaRPr>
                     </a:p>
                   </a:txBody>
-                  <a:tcPr marL="91440" marR="91440" marT="45720" marB="45720" anchor="ctr">
+                  <a:tcPr anchor="ctr">
                     <a:lnL w="6350" cap="flat" cmpd="sng" algn="ctr">
                       <a:solidFill>
                         <a:srgbClr val="E5E7EB"/>
@@ -19636,7 +19470,7 @@
                     <a:bodyPr/>
                     <a:lstStyle/>
                     <a:p>
-                      <a:pPr algn="ctr" indent="0" marL="0">
+                      <a:pPr marL="0" indent="0" algn="ctr">
                         <a:buNone/>
                       </a:pPr>
                       <a:r>
@@ -19657,7 +19491,7 @@
                       </a:endParaRPr>
                     </a:p>
                   </a:txBody>
-                  <a:tcPr marL="91440" marR="91440" marT="45720" marB="45720" anchor="ctr">
+                  <a:tcPr anchor="ctr">
                     <a:lnL w="6350" cap="flat" cmpd="sng" algn="ctr">
                       <a:solidFill>
                         <a:srgbClr val="E5E7EB"/>
@@ -19696,6 +19530,11 @@
                     </a:lnB>
                   </a:tcPr>
                 </a:tc>
+                <a:extLst>
+                  <a:ext uri="{0D108BD9-81ED-4DB2-BD59-A6C34878D82A}">
+                    <a16:rowId xmlns:a16="http://schemas.microsoft.com/office/drawing/2014/main" val="10011"/>
+                  </a:ext>
+                </a:extLst>
               </a:tr>
             </a:tbl>
           </a:graphicData>
@@ -19722,7 +19561,7 @@
           <a:bodyPr wrap="square" lIns="0" tIns="0" rIns="0" bIns="0" rtlCol="0" anchor="ctr"/>
           <a:lstStyle/>
           <a:p>
-            <a:pPr algn="ctr" indent="0" marL="0">
+            <a:pPr marL="0" indent="0" algn="ctr">
               <a:buNone/>
             </a:pPr>
             <a:r>
@@ -19756,6 +19595,7 @@
         <a:solidFill>
           <a:srgbClr val="FFFFFF"/>
         </a:solidFill>
+        <a:effectLst/>
       </p:bgPr>
     </p:bg>
     <p:spTree>
@@ -19813,7 +19653,7 @@
           <a:bodyPr wrap="square" lIns="0" tIns="0" rIns="0" bIns="0" rtlCol="0" anchor="ctr"/>
           <a:lstStyle/>
           <a:p>
-            <a:pPr indent="0" marL="0">
+            <a:pPr marL="0" indent="0">
               <a:buNone/>
             </a:pPr>
             <a:r>
@@ -19850,7 +19690,7 @@
           </a:solidFill>
           <a:ln/>
           <a:effectLst>
-            <a:outerShdw sx="100000" sy="100000" kx="0" ky="0" algn="bl" rotWithShape="0" blurRad="76200" dist="25400" dir="8100000">
+            <a:outerShdw blurRad="76200" dist="25400" dir="8100000" algn="bl" rotWithShape="0">
               <a:srgbClr val="000000">
                 <a:alpha val="8000"/>
               </a:srgbClr>
@@ -19899,7 +19739,7 @@
           <a:bodyPr wrap="square" lIns="0" tIns="0" rIns="0" bIns="0" rtlCol="0" anchor="ctr"/>
           <a:lstStyle/>
           <a:p>
-            <a:pPr indent="0" marL="0">
+            <a:pPr marL="0" indent="0">
               <a:buNone/>
             </a:pPr>
             <a:r>
@@ -19938,7 +19778,7 @@
           <a:bodyPr wrap="square" lIns="0" tIns="0" rIns="0" bIns="0" rtlCol="0" anchor="ctr"/>
           <a:lstStyle/>
           <a:p>
-            <a:pPr indent="0" marL="0">
+            <a:pPr marL="0" indent="0">
               <a:buNone/>
             </a:pPr>
             <a:r>
@@ -19997,7 +19837,7 @@
           <a:bodyPr wrap="square" lIns="0" tIns="0" rIns="0" bIns="0" rtlCol="0" anchor="ctr"/>
           <a:lstStyle/>
           <a:p>
-            <a:pPr algn="ctr" indent="0" marL="0">
+            <a:pPr marL="0" indent="0" algn="ctr">
               <a:buNone/>
             </a:pPr>
             <a:r>
@@ -20036,7 +19876,7 @@
           <a:bodyPr wrap="square" lIns="0" tIns="0" rIns="0" bIns="0" rtlCol="0" anchor="ctr"/>
           <a:lstStyle/>
           <a:p>
-            <a:pPr indent="0" marL="0">
+            <a:pPr marL="0" indent="0">
               <a:buNone/>
             </a:pPr>
             <a:r>
@@ -20075,7 +19915,7 @@
           <a:bodyPr wrap="square" lIns="0" tIns="0" rIns="0" bIns="0" rtlCol="0" anchor="ctr"/>
           <a:lstStyle/>
           <a:p>
-            <a:pPr indent="0" marL="0">
+            <a:pPr marL="0" indent="0">
               <a:buNone/>
             </a:pPr>
             <a:r>
@@ -20112,7 +19952,7 @@
           </a:solidFill>
           <a:ln/>
           <a:effectLst>
-            <a:outerShdw sx="100000" sy="100000" kx="0" ky="0" algn="bl" rotWithShape="0" blurRad="76200" dist="25400" dir="8100000">
+            <a:outerShdw blurRad="76200" dist="25400" dir="8100000" algn="bl" rotWithShape="0">
               <a:srgbClr val="000000">
                 <a:alpha val="8000"/>
               </a:srgbClr>
@@ -20161,7 +20001,7 @@
           <a:bodyPr wrap="square" lIns="0" tIns="0" rIns="0" bIns="0" rtlCol="0" anchor="ctr"/>
           <a:lstStyle/>
           <a:p>
-            <a:pPr indent="0" marL="0">
+            <a:pPr marL="0" indent="0">
               <a:buNone/>
             </a:pPr>
             <a:r>
@@ -20200,7 +20040,7 @@
           <a:bodyPr wrap="square" lIns="0" tIns="0" rIns="0" bIns="0" rtlCol="0" anchor="ctr"/>
           <a:lstStyle/>
           <a:p>
-            <a:pPr indent="0" marL="0">
+            <a:pPr marL="0" indent="0">
               <a:buNone/>
             </a:pPr>
             <a:r>
@@ -20259,7 +20099,7 @@
           <a:bodyPr wrap="square" lIns="0" tIns="0" rIns="0" bIns="0" rtlCol="0" anchor="ctr"/>
           <a:lstStyle/>
           <a:p>
-            <a:pPr algn="ctr" indent="0" marL="0">
+            <a:pPr marL="0" indent="0" algn="ctr">
               <a:buNone/>
             </a:pPr>
             <a:r>
@@ -20298,7 +20138,7 @@
           <a:bodyPr wrap="square" lIns="0" tIns="0" rIns="0" bIns="0" rtlCol="0" anchor="ctr"/>
           <a:lstStyle/>
           <a:p>
-            <a:pPr indent="0" marL="0">
+            <a:pPr marL="0" indent="0">
               <a:buNone/>
             </a:pPr>
             <a:r>
@@ -20337,7 +20177,7 @@
           <a:bodyPr wrap="square" lIns="0" tIns="0" rIns="0" bIns="0" rtlCol="0" anchor="ctr"/>
           <a:lstStyle/>
           <a:p>
-            <a:pPr indent="0" marL="0">
+            <a:pPr marL="0" indent="0">
               <a:buNone/>
             </a:pPr>
             <a:r>
@@ -20374,7 +20214,7 @@
           </a:solidFill>
           <a:ln/>
           <a:effectLst>
-            <a:outerShdw sx="100000" sy="100000" kx="0" ky="0" algn="bl" rotWithShape="0" blurRad="76200" dist="25400" dir="8100000">
+            <a:outerShdw blurRad="76200" dist="25400" dir="8100000" algn="bl" rotWithShape="0">
               <a:srgbClr val="000000">
                 <a:alpha val="8000"/>
               </a:srgbClr>
@@ -20423,7 +20263,7 @@
           <a:bodyPr wrap="square" lIns="0" tIns="0" rIns="0" bIns="0" rtlCol="0" anchor="ctr"/>
           <a:lstStyle/>
           <a:p>
-            <a:pPr indent="0" marL="0">
+            <a:pPr marL="0" indent="0">
               <a:buNone/>
             </a:pPr>
             <a:r>
@@ -20462,7 +20302,7 @@
           <a:bodyPr wrap="square" lIns="0" tIns="0" rIns="0" bIns="0" rtlCol="0" anchor="ctr"/>
           <a:lstStyle/>
           <a:p>
-            <a:pPr indent="0" marL="0">
+            <a:pPr marL="0" indent="0">
               <a:buNone/>
             </a:pPr>
             <a:r>
@@ -20521,7 +20361,7 @@
           <a:bodyPr wrap="square" lIns="0" tIns="0" rIns="0" bIns="0" rtlCol="0" anchor="ctr"/>
           <a:lstStyle/>
           <a:p>
-            <a:pPr algn="ctr" indent="0" marL="0">
+            <a:pPr marL="0" indent="0" algn="ctr">
               <a:buNone/>
             </a:pPr>
             <a:r>
@@ -20560,7 +20400,7 @@
           <a:bodyPr wrap="square" lIns="0" tIns="0" rIns="0" bIns="0" rtlCol="0" anchor="ctr"/>
           <a:lstStyle/>
           <a:p>
-            <a:pPr indent="0" marL="0">
+            <a:pPr marL="0" indent="0">
               <a:buNone/>
             </a:pPr>
             <a:r>
@@ -20599,7 +20439,7 @@
           <a:bodyPr wrap="square" lIns="0" tIns="0" rIns="0" bIns="0" rtlCol="0" anchor="ctr"/>
           <a:lstStyle/>
           <a:p>
-            <a:pPr indent="0" marL="0">
+            <a:pPr marL="0" indent="0">
               <a:buNone/>
             </a:pPr>
             <a:r>
@@ -20658,7 +20498,7 @@
           <a:bodyPr wrap="square" lIns="0" tIns="0" rIns="0" bIns="0" rtlCol="0" anchor="ctr"/>
           <a:lstStyle/>
           <a:p>
-            <a:pPr algn="ctr" indent="0" marL="0">
+            <a:pPr marL="0" indent="0" algn="ctr">
               <a:buNone/>
             </a:pPr>
             <a:r>
@@ -20692,6 +20532,7 @@
         <a:solidFill>
           <a:srgbClr val="F5F0EB"/>
         </a:solidFill>
+        <a:effectLst/>
       </p:bgPr>
     </p:bg>
     <p:spTree>
@@ -20749,7 +20590,7 @@
           <a:bodyPr wrap="square" lIns="0" tIns="0" rIns="0" bIns="0" rtlCol="0" anchor="ctr"/>
           <a:lstStyle/>
           <a:p>
-            <a:pPr indent="0" marL="0">
+            <a:pPr marL="0" indent="0">
               <a:buNone/>
             </a:pPr>
             <a:r>
@@ -20786,7 +20627,7 @@
           </a:solidFill>
           <a:ln/>
           <a:effectLst>
-            <a:outerShdw sx="100000" sy="100000" kx="0" ky="0" algn="bl" rotWithShape="0" blurRad="76200" dist="25400" dir="8100000">
+            <a:outerShdw blurRad="76200" dist="25400" dir="8100000" algn="bl" rotWithShape="0">
               <a:srgbClr val="000000">
                 <a:alpha val="8000"/>
               </a:srgbClr>
@@ -20835,7 +20676,7 @@
           <a:bodyPr wrap="square" lIns="0" tIns="0" rIns="0" bIns="0" rtlCol="0" anchor="ctr"/>
           <a:lstStyle/>
           <a:p>
-            <a:pPr indent="0" marL="0">
+            <a:pPr marL="0" indent="0">
               <a:buNone/>
             </a:pPr>
             <a:r>
@@ -20894,7 +20735,7 @@
           <a:bodyPr wrap="square" lIns="0" tIns="0" rIns="0" bIns="0" rtlCol="0" anchor="ctr"/>
           <a:lstStyle/>
           <a:p>
-            <a:pPr algn="ctr" indent="0" marL="0">
+            <a:pPr marL="0" indent="0" algn="ctr">
               <a:buNone/>
             </a:pPr>
             <a:r>
@@ -20933,7 +20774,7 @@
           <a:bodyPr wrap="square" lIns="0" tIns="0" rIns="0" bIns="0" rtlCol="0" anchor="ctr"/>
           <a:lstStyle/>
           <a:p>
-            <a:pPr indent="0" marL="0">
+            <a:pPr marL="0" indent="0">
               <a:buNone/>
             </a:pPr>
             <a:r>
@@ -20972,7 +20813,7 @@
           <a:bodyPr wrap="square" lIns="0" tIns="0" rIns="0" bIns="0" rtlCol="0" anchor="ctr"/>
           <a:lstStyle/>
           <a:p>
-            <a:pPr indent="0" marL="0">
+            <a:pPr marL="0" indent="0">
               <a:buNone/>
             </a:pPr>
             <a:r>
@@ -21031,7 +20872,7 @@
           <a:bodyPr wrap="square" lIns="0" tIns="0" rIns="0" bIns="0" rtlCol="0" anchor="ctr"/>
           <a:lstStyle/>
           <a:p>
-            <a:pPr algn="ctr" indent="0" marL="0">
+            <a:pPr marL="0" indent="0" algn="ctr">
               <a:buNone/>
             </a:pPr>
             <a:r>
@@ -21070,7 +20911,7 @@
           <a:bodyPr wrap="square" lIns="0" tIns="0" rIns="0" bIns="0" rtlCol="0" anchor="ctr"/>
           <a:lstStyle/>
           <a:p>
-            <a:pPr indent="0" marL="0">
+            <a:pPr marL="0" indent="0">
               <a:buNone/>
             </a:pPr>
             <a:r>
@@ -21109,7 +20950,7 @@
           <a:bodyPr wrap="square" lIns="0" tIns="0" rIns="0" bIns="0" rtlCol="0" anchor="ctr"/>
           <a:lstStyle/>
           <a:p>
-            <a:pPr indent="0" marL="0">
+            <a:pPr marL="0" indent="0">
               <a:buNone/>
             </a:pPr>
             <a:r>
@@ -21168,7 +21009,7 @@
           <a:bodyPr wrap="square" lIns="0" tIns="0" rIns="0" bIns="0" rtlCol="0" anchor="ctr"/>
           <a:lstStyle/>
           <a:p>
-            <a:pPr algn="ctr" indent="0" marL="0">
+            <a:pPr marL="0" indent="0" algn="ctr">
               <a:buNone/>
             </a:pPr>
             <a:r>
@@ -21207,7 +21048,7 @@
           <a:bodyPr wrap="square" lIns="0" tIns="0" rIns="0" bIns="0" rtlCol="0" anchor="ctr"/>
           <a:lstStyle/>
           <a:p>
-            <a:pPr indent="0" marL="0">
+            <a:pPr marL="0" indent="0">
               <a:buNone/>
             </a:pPr>
             <a:r>
@@ -21246,7 +21087,7 @@
           <a:bodyPr wrap="square" lIns="0" tIns="0" rIns="0" bIns="0" rtlCol="0" anchor="ctr"/>
           <a:lstStyle/>
           <a:p>
-            <a:pPr indent="0" marL="0">
+            <a:pPr marL="0" indent="0">
               <a:buNone/>
             </a:pPr>
             <a:r>
@@ -21305,7 +21146,7 @@
           <a:bodyPr wrap="square" lIns="0" tIns="0" rIns="0" bIns="0" rtlCol="0" anchor="ctr"/>
           <a:lstStyle/>
           <a:p>
-            <a:pPr algn="ctr" indent="0" marL="0">
+            <a:pPr marL="0" indent="0" algn="ctr">
               <a:buNone/>
             </a:pPr>
             <a:r>
@@ -21344,7 +21185,7 @@
           <a:bodyPr wrap="square" lIns="0" tIns="0" rIns="0" bIns="0" rtlCol="0" anchor="ctr"/>
           <a:lstStyle/>
           <a:p>
-            <a:pPr indent="0" marL="0">
+            <a:pPr marL="0" indent="0">
               <a:buNone/>
             </a:pPr>
             <a:r>
@@ -21383,7 +21224,7 @@
           <a:bodyPr wrap="square" lIns="0" tIns="0" rIns="0" bIns="0" rtlCol="0" anchor="ctr"/>
           <a:lstStyle/>
           <a:p>
-            <a:pPr indent="0" marL="0">
+            <a:pPr marL="0" indent="0">
               <a:buNone/>
             </a:pPr>
             <a:r>
@@ -21442,7 +21283,7 @@
           <a:bodyPr wrap="square" lIns="0" tIns="0" rIns="0" bIns="0" rtlCol="0" anchor="ctr"/>
           <a:lstStyle/>
           <a:p>
-            <a:pPr algn="ctr" indent="0" marL="0">
+            <a:pPr marL="0" indent="0" algn="ctr">
               <a:buNone/>
             </a:pPr>
             <a:r>
@@ -21481,7 +21322,7 @@
           <a:bodyPr wrap="square" lIns="0" tIns="0" rIns="0" bIns="0" rtlCol="0" anchor="ctr"/>
           <a:lstStyle/>
           <a:p>
-            <a:pPr indent="0" marL="0">
+            <a:pPr marL="0" indent="0">
               <a:buNone/>
             </a:pPr>
             <a:r>
@@ -21520,7 +21361,7 @@
           <a:bodyPr wrap="square" lIns="0" tIns="0" rIns="0" bIns="0" rtlCol="0" anchor="ctr"/>
           <a:lstStyle/>
           <a:p>
-            <a:pPr indent="0" marL="0">
+            <a:pPr marL="0" indent="0">
               <a:buNone/>
             </a:pPr>
             <a:r>
@@ -21579,7 +21420,7 @@
           <a:bodyPr wrap="square" lIns="0" tIns="0" rIns="0" bIns="0" rtlCol="0" anchor="ctr"/>
           <a:lstStyle/>
           <a:p>
-            <a:pPr algn="ctr" indent="0" marL="0">
+            <a:pPr marL="0" indent="0" algn="ctr">
               <a:buNone/>
             </a:pPr>
             <a:r>
@@ -21618,7 +21459,7 @@
           <a:bodyPr wrap="square" lIns="0" tIns="0" rIns="0" bIns="0" rtlCol="0" anchor="ctr"/>
           <a:lstStyle/>
           <a:p>
-            <a:pPr indent="0" marL="0">
+            <a:pPr marL="0" indent="0">
               <a:buNone/>
             </a:pPr>
             <a:r>
@@ -21657,7 +21498,7 @@
           <a:bodyPr wrap="square" lIns="0" tIns="0" rIns="0" bIns="0" rtlCol="0" anchor="ctr"/>
           <a:lstStyle/>
           <a:p>
-            <a:pPr indent="0" marL="0">
+            <a:pPr marL="0" indent="0">
               <a:buNone/>
             </a:pPr>
             <a:r>
@@ -21696,7 +21537,7 @@
           <a:bodyPr wrap="square" lIns="0" tIns="0" rIns="0" bIns="0" rtlCol="0" anchor="ctr"/>
           <a:lstStyle/>
           <a:p>
-            <a:pPr indent="0" marL="0">
+            <a:pPr marL="0" indent="0">
               <a:buNone/>
             </a:pPr>
             <a:r>
@@ -21730,6 +21571,7 @@
         <a:solidFill>
           <a:srgbClr val="FFFFFF"/>
         </a:solidFill>
+        <a:effectLst/>
       </p:bgPr>
     </p:bg>
     <p:spTree>
@@ -21787,7 +21629,7 @@
           <a:bodyPr wrap="square" lIns="0" tIns="0" rIns="0" bIns="0" rtlCol="0" anchor="ctr"/>
           <a:lstStyle/>
           <a:p>
-            <a:pPr indent="0" marL="0">
+            <a:pPr marL="0" indent="0">
               <a:buNone/>
             </a:pPr>
             <a:r>
@@ -21824,7 +21666,7 @@
           </a:solidFill>
           <a:ln/>
           <a:effectLst>
-            <a:outerShdw sx="100000" sy="100000" kx="0" ky="0" algn="bl" rotWithShape="0" blurRad="76200" dist="25400" dir="8100000">
+            <a:outerShdw blurRad="76200" dist="25400" dir="8100000" algn="bl" rotWithShape="0">
               <a:srgbClr val="000000">
                 <a:alpha val="8000"/>
               </a:srgbClr>
@@ -21873,7 +21715,7 @@
           <a:bodyPr wrap="square" lIns="0" tIns="0" rIns="0" bIns="0" rtlCol="0" anchor="ctr"/>
           <a:lstStyle/>
           <a:p>
-            <a:pPr indent="0" marL="0">
+            <a:pPr marL="0" indent="0">
               <a:buNone/>
             </a:pPr>
             <a:r>
@@ -21912,7 +21754,7 @@
           <a:bodyPr wrap="square" lIns="0" tIns="0" rIns="0" bIns="0" rtlCol="0" anchor="ctr"/>
           <a:lstStyle/>
           <a:p>
-            <a:pPr indent="0" marL="0">
+            <a:pPr marL="0" indent="0">
               <a:lnSpc>
                 <a:spcPct val="150000"/>
               </a:lnSpc>
@@ -21932,7 +21774,7 @@
             <a:endParaRPr lang="en-US" sz="1200" dirty="0"/>
           </a:p>
           <a:p>
-            <a:pPr indent="0" marL="0">
+            <a:pPr marL="0" indent="0">
               <a:lnSpc>
                 <a:spcPct val="150000"/>
               </a:lnSpc>
@@ -21952,7 +21794,7 @@
             <a:endParaRPr lang="en-US" sz="1200" dirty="0"/>
           </a:p>
           <a:p>
-            <a:pPr indent="0" marL="0">
+            <a:pPr marL="0" indent="0">
               <a:lnSpc>
                 <a:spcPct val="150000"/>
               </a:lnSpc>
@@ -21961,7 +21803,7 @@
             <a:endParaRPr lang="en-US" sz="1200" dirty="0"/>
           </a:p>
           <a:p>
-            <a:pPr indent="0" marL="0">
+            <a:pPr marL="0" indent="0">
               <a:lnSpc>
                 <a:spcPct val="150000"/>
               </a:lnSpc>
@@ -21981,7 +21823,7 @@
             <a:endParaRPr lang="en-US" sz="1200" dirty="0"/>
           </a:p>
           <a:p>
-            <a:pPr indent="0" marL="0">
+            <a:pPr marL="0" indent="0">
               <a:lnSpc>
                 <a:spcPct val="150000"/>
               </a:lnSpc>
@@ -22021,7 +21863,7 @@
           </a:solidFill>
           <a:ln/>
           <a:effectLst>
-            <a:outerShdw sx="100000" sy="100000" kx="0" ky="0" algn="bl" rotWithShape="0" blurRad="76200" dist="25400" dir="8100000">
+            <a:outerShdw blurRad="76200" dist="25400" dir="8100000" algn="bl" rotWithShape="0">
               <a:srgbClr val="000000">
                 <a:alpha val="8000"/>
               </a:srgbClr>
@@ -22070,7 +21912,7 @@
           <a:bodyPr wrap="square" lIns="0" tIns="0" rIns="0" bIns="0" rtlCol="0" anchor="ctr"/>
           <a:lstStyle/>
           <a:p>
-            <a:pPr indent="0" marL="0">
+            <a:pPr marL="0" indent="0">
               <a:buNone/>
             </a:pPr>
             <a:r>
@@ -22111,7 +21953,7 @@
           <a:bodyPr wrap="square" lIns="1524" tIns="1524" rIns="1524" bIns="1524" rtlCol="0" anchor="t"/>
           <a:lstStyle/>
           <a:p>
-            <a:pPr indent="0" marL="0">
+            <a:pPr marL="0" indent="0">
               <a:buNone/>
             </a:pPr>
             <a:r>
@@ -22128,7 +21970,7 @@
             <a:endParaRPr lang="en-US" sz="1200" dirty="0"/>
           </a:p>
           <a:p>
-            <a:pPr indent="0" marL="0">
+            <a:pPr marL="0" indent="0">
               <a:buNone/>
             </a:pPr>
             <a:r>
@@ -22145,13 +21987,13 @@
             <a:endParaRPr lang="en-US" sz="1200" dirty="0"/>
           </a:p>
           <a:p>
-            <a:pPr indent="0" marL="0">
+            <a:pPr marL="0" indent="0">
               <a:buNone/>
             </a:pPr>
             <a:endParaRPr lang="en-US" sz="1200" dirty="0"/>
           </a:p>
           <a:p>
-            <a:pPr indent="0" marL="0">
+            <a:pPr marL="0" indent="0">
               <a:buNone/>
             </a:pPr>
             <a:r>
@@ -22168,7 +22010,7 @@
             <a:endParaRPr lang="en-US" sz="1200" dirty="0"/>
           </a:p>
           <a:p>
-            <a:pPr indent="0" marL="0">
+            <a:pPr marL="0" indent="0">
               <a:buNone/>
             </a:pPr>
             <a:r>
@@ -22207,7 +22049,7 @@
           <a:bodyPr wrap="square" lIns="0" tIns="0" rIns="0" bIns="0" rtlCol="0" anchor="ctr"/>
           <a:lstStyle/>
           <a:p>
-            <a:pPr indent="0" marL="0">
+            <a:pPr marL="0" indent="0">
               <a:buNone/>
             </a:pPr>
             <a:r>
@@ -22266,7 +22108,7 @@
           <a:bodyPr wrap="square" lIns="0" tIns="0" rIns="0" bIns="0" rtlCol="0" anchor="ctr"/>
           <a:lstStyle/>
           <a:p>
-            <a:pPr algn="ctr" indent="0" marL="0">
+            <a:pPr marL="0" indent="0" algn="ctr">
               <a:buNone/>
             </a:pPr>
             <a:r>
@@ -22325,7 +22167,7 @@
           <a:bodyPr wrap="square" lIns="0" tIns="0" rIns="0" bIns="0" rtlCol="0" anchor="ctr"/>
           <a:lstStyle/>
           <a:p>
-            <a:pPr algn="ctr" indent="0" marL="0">
+            <a:pPr marL="0" indent="0" algn="ctr">
               <a:buNone/>
             </a:pPr>
             <a:r>
@@ -22384,7 +22226,7 @@
           <a:bodyPr wrap="square" lIns="0" tIns="0" rIns="0" bIns="0" rtlCol="0" anchor="ctr"/>
           <a:lstStyle/>
           <a:p>
-            <a:pPr algn="ctr" indent="0" marL="0">
+            <a:pPr marL="0" indent="0" algn="ctr">
               <a:buNone/>
             </a:pPr>
             <a:r>
@@ -22443,7 +22285,7 @@
           <a:bodyPr wrap="square" lIns="0" tIns="0" rIns="0" bIns="0" rtlCol="0" anchor="ctr"/>
           <a:lstStyle/>
           <a:p>
-            <a:pPr algn="ctr" indent="0" marL="0">
+            <a:pPr marL="0" indent="0" algn="ctr">
               <a:buNone/>
             </a:pPr>
             <a:r>
@@ -22502,7 +22344,7 @@
           <a:bodyPr wrap="square" lIns="0" tIns="0" rIns="0" bIns="0" rtlCol="0" anchor="ctr"/>
           <a:lstStyle/>
           <a:p>
-            <a:pPr algn="ctr" indent="0" marL="0">
+            <a:pPr marL="0" indent="0" algn="ctr">
               <a:buNone/>
             </a:pPr>
             <a:r>
@@ -22536,6 +22378,7 @@
         <a:solidFill>
           <a:srgbClr val="F5F0EB"/>
         </a:solidFill>
+        <a:effectLst/>
       </p:bgPr>
     </p:bg>
     <p:spTree>
@@ -22593,7 +22436,7 @@
           <a:bodyPr wrap="square" lIns="0" tIns="0" rIns="0" bIns="0" rtlCol="0" anchor="ctr"/>
           <a:lstStyle/>
           <a:p>
-            <a:pPr indent="0" marL="0">
+            <a:pPr marL="0" indent="0">
               <a:buNone/>
             </a:pPr>
             <a:r>
@@ -22632,7 +22475,7 @@
           <a:bodyPr wrap="square" lIns="0" tIns="0" rIns="0" bIns="0" rtlCol="0" anchor="ctr"/>
           <a:lstStyle/>
           <a:p>
-            <a:pPr indent="0" marL="0">
+            <a:pPr marL="0" indent="0">
               <a:buNone/>
             </a:pPr>
             <a:r>
@@ -22671,7 +22514,7 @@
           <a:bodyPr wrap="square" lIns="0" tIns="0" rIns="0" bIns="0" rtlCol="0" anchor="ctr"/>
           <a:lstStyle/>
           <a:p>
-            <a:pPr indent="0" marL="0">
+            <a:pPr marL="0" indent="0">
               <a:buNone/>
             </a:pPr>
             <a:r>
@@ -22710,7 +22553,7 @@
           <a:bodyPr wrap="square" lIns="0" tIns="0" rIns="0" bIns="0" rtlCol="0" anchor="ctr"/>
           <a:lstStyle/>
           <a:p>
-            <a:pPr indent="0" marL="0">
+            <a:pPr marL="0" indent="0">
               <a:buNone/>
             </a:pPr>
             <a:r>
@@ -22749,7 +22592,7 @@
           <a:bodyPr wrap="square" lIns="0" tIns="0" rIns="0" bIns="0" rtlCol="0" anchor="ctr"/>
           <a:lstStyle/>
           <a:p>
-            <a:pPr indent="0" marL="0">
+            <a:pPr marL="0" indent="0">
               <a:buNone/>
             </a:pPr>
             <a:r>
@@ -22808,7 +22651,7 @@
           <a:bodyPr wrap="square" lIns="0" tIns="0" rIns="0" bIns="0" rtlCol="0" anchor="ctr"/>
           <a:lstStyle/>
           <a:p>
-            <a:pPr indent="0" marL="0">
+            <a:pPr marL="0" indent="0">
               <a:buNone/>
             </a:pPr>
             <a:r>
@@ -22847,7 +22690,7 @@
           <a:bodyPr wrap="square" lIns="0" tIns="0" rIns="0" bIns="0" rtlCol="0" anchor="ctr"/>
           <a:lstStyle/>
           <a:p>
-            <a:pPr indent="0" marL="0">
+            <a:pPr marL="0" indent="0">
               <a:buNone/>
             </a:pPr>
             <a:r>
@@ -22886,7 +22729,7 @@
           <a:bodyPr wrap="square" lIns="0" tIns="0" rIns="0" bIns="0" rtlCol="0" anchor="ctr"/>
           <a:lstStyle/>
           <a:p>
-            <a:pPr indent="0" marL="0">
+            <a:pPr marL="0" indent="0">
               <a:buNone/>
             </a:pPr>
             <a:r>
@@ -22945,7 +22788,7 @@
           <a:bodyPr wrap="square" lIns="0" tIns="0" rIns="0" bIns="0" rtlCol="0" anchor="ctr"/>
           <a:lstStyle/>
           <a:p>
-            <a:pPr indent="0" marL="0">
+            <a:pPr marL="0" indent="0">
               <a:buNone/>
             </a:pPr>
             <a:r>
@@ -22984,7 +22827,7 @@
           <a:bodyPr wrap="square" lIns="0" tIns="0" rIns="0" bIns="0" rtlCol="0" anchor="ctr"/>
           <a:lstStyle/>
           <a:p>
-            <a:pPr indent="0" marL="0">
+            <a:pPr marL="0" indent="0">
               <a:buNone/>
             </a:pPr>
             <a:r>
@@ -23023,7 +22866,7 @@
           <a:bodyPr wrap="square" lIns="0" tIns="0" rIns="0" bIns="0" rtlCol="0" anchor="ctr"/>
           <a:lstStyle/>
           <a:p>
-            <a:pPr indent="0" marL="0">
+            <a:pPr marL="0" indent="0">
               <a:buNone/>
             </a:pPr>
             <a:r>
@@ -23082,7 +22925,7 @@
           <a:bodyPr wrap="square" lIns="0" tIns="0" rIns="0" bIns="0" rtlCol="0" anchor="ctr"/>
           <a:lstStyle/>
           <a:p>
-            <a:pPr indent="0" marL="0">
+            <a:pPr marL="0" indent="0">
               <a:buNone/>
             </a:pPr>
             <a:r>
@@ -23121,7 +22964,7 @@
           <a:bodyPr wrap="square" lIns="0" tIns="0" rIns="0" bIns="0" rtlCol="0" anchor="ctr"/>
           <a:lstStyle/>
           <a:p>
-            <a:pPr indent="0" marL="0">
+            <a:pPr marL="0" indent="0">
               <a:buNone/>
             </a:pPr>
             <a:r>
@@ -23160,7 +23003,7 @@
           <a:bodyPr wrap="square" lIns="0" tIns="0" rIns="0" bIns="0" rtlCol="0" anchor="ctr"/>
           <a:lstStyle/>
           <a:p>
-            <a:pPr indent="0" marL="0">
+            <a:pPr marL="0" indent="0">
               <a:buNone/>
             </a:pPr>
             <a:r>
@@ -23219,7 +23062,7 @@
           <a:bodyPr wrap="square" lIns="0" tIns="0" rIns="0" bIns="0" rtlCol="0" anchor="ctr"/>
           <a:lstStyle/>
           <a:p>
-            <a:pPr indent="0" marL="0">
+            <a:pPr marL="0" indent="0">
               <a:buNone/>
             </a:pPr>
             <a:r>
@@ -23258,7 +23101,7 @@
           <a:bodyPr wrap="square" lIns="0" tIns="0" rIns="0" bIns="0" rtlCol="0" anchor="ctr"/>
           <a:lstStyle/>
           <a:p>
-            <a:pPr indent="0" marL="0">
+            <a:pPr marL="0" indent="0">
               <a:buNone/>
             </a:pPr>
             <a:r>
@@ -23297,7 +23140,7 @@
           <a:bodyPr wrap="square" lIns="0" tIns="0" rIns="0" bIns="0" rtlCol="0" anchor="ctr"/>
           <a:lstStyle/>
           <a:p>
-            <a:pPr indent="0" marL="0">
+            <a:pPr marL="0" indent="0">
               <a:buNone/>
             </a:pPr>
             <a:r>
@@ -23356,7 +23199,7 @@
           <a:bodyPr wrap="square" lIns="0" tIns="0" rIns="0" bIns="0" rtlCol="0" anchor="ctr"/>
           <a:lstStyle/>
           <a:p>
-            <a:pPr indent="0" marL="0">
+            <a:pPr marL="0" indent="0">
               <a:buNone/>
             </a:pPr>
             <a:r>
@@ -23395,7 +23238,7 @@
           <a:bodyPr wrap="square" lIns="0" tIns="0" rIns="0" bIns="0" rtlCol="0" anchor="ctr"/>
           <a:lstStyle/>
           <a:p>
-            <a:pPr indent="0" marL="0">
+            <a:pPr marL="0" indent="0">
               <a:buNone/>
             </a:pPr>
             <a:r>
@@ -23434,7 +23277,7 @@
           <a:bodyPr wrap="square" lIns="0" tIns="0" rIns="0" bIns="0" rtlCol="0" anchor="ctr"/>
           <a:lstStyle/>
           <a:p>
-            <a:pPr indent="0" marL="0">
+            <a:pPr marL="0" indent="0">
               <a:buNone/>
             </a:pPr>
             <a:r>
@@ -23493,7 +23336,7 @@
           <a:bodyPr wrap="square" lIns="0" tIns="0" rIns="0" bIns="0" rtlCol="0" anchor="ctr"/>
           <a:lstStyle/>
           <a:p>
-            <a:pPr indent="0" marL="0">
+            <a:pPr marL="0" indent="0">
               <a:buNone/>
             </a:pPr>
             <a:r>
@@ -23532,7 +23375,7 @@
           <a:bodyPr wrap="square" lIns="0" tIns="0" rIns="0" bIns="0" rtlCol="0" anchor="ctr"/>
           <a:lstStyle/>
           <a:p>
-            <a:pPr indent="0" marL="0">
+            <a:pPr marL="0" indent="0">
               <a:buNone/>
             </a:pPr>
             <a:r>
@@ -23571,7 +23414,7 @@
           <a:bodyPr wrap="square" lIns="0" tIns="0" rIns="0" bIns="0" rtlCol="0" anchor="ctr"/>
           <a:lstStyle/>
           <a:p>
-            <a:pPr indent="0" marL="0">
+            <a:pPr marL="0" indent="0">
               <a:buNone/>
             </a:pPr>
             <a:r>
@@ -23630,7 +23473,7 @@
           <a:bodyPr wrap="square" lIns="0" tIns="0" rIns="0" bIns="0" rtlCol="0" anchor="ctr"/>
           <a:lstStyle/>
           <a:p>
-            <a:pPr indent="0" marL="0">
+            <a:pPr marL="0" indent="0">
               <a:buNone/>
             </a:pPr>
             <a:r>
@@ -23669,7 +23512,7 @@
           <a:bodyPr wrap="square" lIns="0" tIns="0" rIns="0" bIns="0" rtlCol="0" anchor="ctr"/>
           <a:lstStyle/>
           <a:p>
-            <a:pPr indent="0" marL="0">
+            <a:pPr marL="0" indent="0">
               <a:buNone/>
             </a:pPr>
             <a:r>
@@ -23708,7 +23551,7 @@
           <a:bodyPr wrap="square" lIns="0" tIns="0" rIns="0" bIns="0" rtlCol="0" anchor="ctr"/>
           <a:lstStyle/>
           <a:p>
-            <a:pPr indent="0" marL="0">
+            <a:pPr marL="0" indent="0">
               <a:buNone/>
             </a:pPr>
             <a:r>
@@ -23747,7 +23590,7 @@
           <a:bodyPr wrap="square" lIns="0" tIns="0" rIns="0" bIns="0" rtlCol="0" anchor="ctr"/>
           <a:lstStyle/>
           <a:p>
-            <a:pPr indent="0" marL="0">
+            <a:pPr marL="0" indent="0">
               <a:buNone/>
             </a:pPr>
             <a:r>
@@ -23806,7 +23649,7 @@
           <a:bodyPr wrap="square" lIns="0" tIns="0" rIns="0" bIns="0" rtlCol="0" anchor="ctr"/>
           <a:lstStyle/>
           <a:p>
-            <a:pPr algn="ctr" indent="0" marL="0">
+            <a:pPr marL="0" indent="0" algn="ctr">
               <a:buNone/>
             </a:pPr>
             <a:r>
@@ -23845,7 +23688,7 @@
           <a:bodyPr wrap="square" lIns="0" tIns="0" rIns="0" bIns="0" rtlCol="0" anchor="ctr"/>
           <a:lstStyle/>
           <a:p>
-            <a:pPr indent="0" marL="0">
+            <a:pPr marL="0" indent="0">
               <a:buNone/>
             </a:pPr>
             <a:r>
@@ -23904,7 +23747,7 @@
           <a:bodyPr wrap="square" lIns="0" tIns="0" rIns="0" bIns="0" rtlCol="0" anchor="ctr"/>
           <a:lstStyle/>
           <a:p>
-            <a:pPr algn="ctr" indent="0" marL="0">
+            <a:pPr marL="0" indent="0" algn="ctr">
               <a:buNone/>
             </a:pPr>
             <a:r>
@@ -23943,7 +23786,7 @@
           <a:bodyPr wrap="square" lIns="0" tIns="0" rIns="0" bIns="0" rtlCol="0" anchor="ctr"/>
           <a:lstStyle/>
           <a:p>
-            <a:pPr indent="0" marL="0">
+            <a:pPr marL="0" indent="0">
               <a:buNone/>
             </a:pPr>
             <a:r>
@@ -24002,7 +23845,7 @@
           <a:bodyPr wrap="square" lIns="0" tIns="0" rIns="0" bIns="0" rtlCol="0" anchor="ctr"/>
           <a:lstStyle/>
           <a:p>
-            <a:pPr algn="ctr" indent="0" marL="0">
+            <a:pPr marL="0" indent="0" algn="ctr">
               <a:buNone/>
             </a:pPr>
             <a:r>
@@ -24041,7 +23884,7 @@
           <a:bodyPr wrap="square" lIns="0" tIns="0" rIns="0" bIns="0" rtlCol="0" anchor="ctr"/>
           <a:lstStyle/>
           <a:p>
-            <a:pPr indent="0" marL="0">
+            <a:pPr marL="0" indent="0">
               <a:buNone/>
             </a:pPr>
             <a:r>
@@ -24100,7 +23943,7 @@
           <a:bodyPr wrap="square" lIns="0" tIns="0" rIns="0" bIns="0" rtlCol="0" anchor="ctr"/>
           <a:lstStyle/>
           <a:p>
-            <a:pPr algn="ctr" indent="0" marL="0">
+            <a:pPr marL="0" indent="0" algn="ctr">
               <a:buNone/>
             </a:pPr>
             <a:r>
@@ -24139,7 +23982,7 @@
           <a:bodyPr wrap="square" lIns="0" tIns="0" rIns="0" bIns="0" rtlCol="0" anchor="ctr"/>
           <a:lstStyle/>
           <a:p>
-            <a:pPr indent="0" marL="0">
+            <a:pPr marL="0" indent="0">
               <a:buNone/>
             </a:pPr>
             <a:r>
@@ -24198,7 +24041,7 @@
           <a:bodyPr wrap="square" lIns="0" tIns="0" rIns="0" bIns="0" rtlCol="0" anchor="ctr"/>
           <a:lstStyle/>
           <a:p>
-            <a:pPr algn="ctr" indent="0" marL="0">
+            <a:pPr marL="0" indent="0" algn="ctr">
               <a:buNone/>
             </a:pPr>
             <a:r>
@@ -24237,7 +24080,7 @@
           <a:bodyPr wrap="square" lIns="0" tIns="0" rIns="0" bIns="0" rtlCol="0" anchor="ctr"/>
           <a:lstStyle/>
           <a:p>
-            <a:pPr indent="0" marL="0">
+            <a:pPr marL="0" indent="0">
               <a:buNone/>
             </a:pPr>
             <a:r>
@@ -24276,7 +24119,7 @@
           <a:bodyPr wrap="square" lIns="0" tIns="0" rIns="0" bIns="0" rtlCol="0" anchor="ctr"/>
           <a:lstStyle/>
           <a:p>
-            <a:pPr indent="0" marL="0">
+            <a:pPr marL="0" indent="0">
               <a:buNone/>
             </a:pPr>
             <a:r>
@@ -24315,7 +24158,7 @@
           <a:bodyPr wrap="square" lIns="0" tIns="0" rIns="0" bIns="0" rtlCol="0" anchor="ctr"/>
           <a:lstStyle/>
           <a:p>
-            <a:pPr indent="0" marL="0">
+            <a:pPr marL="0" indent="0">
               <a:buNone/>
             </a:pPr>
             <a:r>
@@ -24349,6 +24192,7 @@
         <a:solidFill>
           <a:srgbClr val="FFFFFF"/>
         </a:solidFill>
+        <a:effectLst/>
       </p:bgPr>
     </p:bg>
     <p:spTree>
@@ -24406,7 +24250,7 @@
           <a:bodyPr wrap="square" lIns="0" tIns="0" rIns="0" bIns="0" rtlCol="0" anchor="ctr"/>
           <a:lstStyle/>
           <a:p>
-            <a:pPr indent="0" marL="0">
+            <a:pPr marL="0" indent="0">
               <a:buNone/>
             </a:pPr>
             <a:r>
@@ -24443,7 +24287,7 @@
           </a:solidFill>
           <a:ln/>
           <a:effectLst>
-            <a:outerShdw sx="100000" sy="100000" kx="0" ky="0" algn="bl" rotWithShape="0" blurRad="76200" dist="25400" dir="8100000">
+            <a:outerShdw blurRad="76200" dist="25400" dir="8100000" algn="bl" rotWithShape="0">
               <a:srgbClr val="000000">
                 <a:alpha val="8000"/>
               </a:srgbClr>
@@ -24492,7 +24336,7 @@
           <a:bodyPr wrap="square" lIns="0" tIns="0" rIns="0" bIns="0" rtlCol="0" anchor="ctr"/>
           <a:lstStyle/>
           <a:p>
-            <a:pPr indent="0" marL="0">
+            <a:pPr marL="0" indent="0">
               <a:buNone/>
             </a:pPr>
             <a:r>
@@ -24531,7 +24375,7 @@
           <a:bodyPr wrap="square" lIns="0" tIns="0" rIns="0" bIns="0" rtlCol="0" anchor="ctr"/>
           <a:lstStyle/>
           <a:p>
-            <a:pPr indent="0" marL="0">
+            <a:pPr marL="0" indent="0">
               <a:lnSpc>
                 <a:spcPts val="1800"/>
               </a:lnSpc>
@@ -24549,12 +24393,6 @@
               <a:t>支持多用户，data.json 改为用户列表
 </a:t>
             </a:r>
-            <a:pPr indent="0" marL="0">
-              <a:lnSpc>
-                <a:spcPts val="1800"/>
-              </a:lnSpc>
-              <a:buNone/>
-            </a:pPr>
             <a:r>
               <a:rPr lang="en-US" sz="1100" dirty="0">
                 <a:solidFill>
@@ -24565,42 +24403,8 @@
                 <a:cs typeface="Calibri" pitchFamily="34" charset="-120"/>
               </a:rPr>
               <a:t>✦ 金额必须为 100 的倍数
-</a:t>
-            </a:r>
-            <a:pPr indent="0" marL="0">
-              <a:lnSpc>
-                <a:spcPts val="1800"/>
-              </a:lnSpc>
-              <a:buNone/>
-            </a:pPr>
-            <a:r>
-              <a:rPr lang="en-US" sz="1100" dirty="0">
-                <a:solidFill>
-                  <a:srgbClr val="2D2D2D"/>
-                </a:solidFill>
-                <a:latin typeface="Calibri" pitchFamily="34" charset="0"/>
-                <a:ea typeface="Calibri" pitchFamily="34" charset="-122"/>
-                <a:cs typeface="Calibri" pitchFamily="34" charset="-120"/>
-              </a:rPr>
-              <a:t>✦ 单笔 ≤ 5000，不可透支
-</a:t>
-            </a:r>
-            <a:pPr indent="0" marL="0">
-              <a:lnSpc>
-                <a:spcPts val="1800"/>
-              </a:lnSpc>
-              <a:buNone/>
-            </a:pPr>
-            <a:r>
-              <a:rPr lang="en-US" sz="1100" dirty="0">
-                <a:solidFill>
-                  <a:srgbClr val="2D2D2D"/>
-                </a:solidFill>
-                <a:latin typeface="Calibri" pitchFamily="34" charset="0"/>
-                <a:ea typeface="Calibri" pitchFamily="34" charset="-122"/>
-                <a:cs typeface="Calibri" pitchFamily="34" charset="-120"/>
-              </a:rPr>
-              <a:t>✦ 不可转账给自己，目标账号必须存在</a:t>
+✦ 单笔 ≤ 5000，不可透支
+✦ 不可转账给自己，目标账号必须存在</a:t>
             </a:r>
             <a:endParaRPr lang="en-US" sz="1100" dirty="0"/>
           </a:p>
@@ -24625,7 +24429,7 @@
           </a:solidFill>
           <a:ln/>
           <a:effectLst>
-            <a:outerShdw sx="100000" sy="100000" kx="0" ky="0" algn="bl" rotWithShape="0" blurRad="76200" dist="25400" dir="8100000">
+            <a:outerShdw blurRad="76200" dist="25400" dir="8100000" algn="bl" rotWithShape="0">
               <a:srgbClr val="000000">
                 <a:alpha val="8000"/>
               </a:srgbClr>
@@ -24674,7 +24478,7 @@
           <a:bodyPr wrap="square" lIns="0" tIns="0" rIns="0" bIns="0" rtlCol="0" anchor="ctr"/>
           <a:lstStyle/>
           <a:p>
-            <a:pPr indent="0" marL="0">
+            <a:pPr marL="0" indent="0">
               <a:buNone/>
             </a:pPr>
             <a:r>
@@ -24713,7 +24517,7 @@
           <a:bodyPr wrap="square" lIns="0" tIns="0" rIns="0" bIns="0" rtlCol="0" anchor="ctr"/>
           <a:lstStyle/>
           <a:p>
-            <a:pPr indent="0" marL="0">
+            <a:pPr marL="0" indent="0">
               <a:lnSpc>
                 <a:spcPts val="1800"/>
               </a:lnSpc>
@@ -24729,60 +24533,9 @@
                 <a:cs typeface="Calibri" pitchFamily="34" charset="-120"/>
               </a:rPr>
               <a:t>注册新账户：账号 ≥ 4 位字母数字
-</a:t>
-            </a:r>
-            <a:pPr indent="0" marL="0">
-              <a:lnSpc>
-                <a:spcPts val="1800"/>
-              </a:lnSpc>
-              <a:buNone/>
-            </a:pPr>
-            <a:r>
-              <a:rPr lang="en-US" sz="1100" dirty="0">
-                <a:solidFill>
-                  <a:srgbClr val="2D2D2D"/>
-                </a:solidFill>
-                <a:latin typeface="Calibri" pitchFamily="34" charset="0"/>
-                <a:ea typeface="Calibri" pitchFamily="34" charset="-122"/>
-                <a:cs typeface="Calibri" pitchFamily="34" charset="-120"/>
-              </a:rPr>
-              <a:t>密码 ≥ 6 位，注册成功自动登录
-</a:t>
-            </a:r>
-            <a:pPr indent="0" marL="0">
-              <a:lnSpc>
-                <a:spcPts val="1800"/>
-              </a:lnSpc>
-              <a:buNone/>
-            </a:pPr>
-            <a:r>
-              <a:rPr lang="en-US" sz="1100" dirty="0">
-                <a:solidFill>
-                  <a:srgbClr val="2D2D2D"/>
-                </a:solidFill>
-                <a:latin typeface="Calibri" pitchFamily="34" charset="0"/>
-                <a:ea typeface="Calibri" pitchFamily="34" charset="-122"/>
-                <a:cs typeface="Calibri" pitchFamily="34" charset="-120"/>
-              </a:rPr>
-              <a:t>登录锁定：连续 3 次错误
-</a:t>
-            </a:r>
-            <a:pPr indent="0" marL="0">
-              <a:lnSpc>
-                <a:spcPts val="1800"/>
-              </a:lnSpc>
-              <a:buNone/>
-            </a:pPr>
-            <a:r>
-              <a:rPr lang="en-US" sz="1100" dirty="0">
-                <a:solidFill>
-                  <a:srgbClr val="2D2D2D"/>
-                </a:solidFill>
-                <a:latin typeface="Calibri" pitchFamily="34" charset="0"/>
-                <a:ea typeface="Calibri" pitchFamily="34" charset="-122"/>
-                <a:cs typeface="Calibri" pitchFamily="34" charset="-120"/>
-              </a:rPr>
-              <a:t>锁定 3 分钟，防止暴力破解</a:t>
+密码 ≥ 6 位，注册成功自动登录
+登录锁定：连续 3 次错误
+锁定 3 分钟，防止暴力破解</a:t>
             </a:r>
             <a:endParaRPr lang="en-US" sz="1100" dirty="0"/>
           </a:p>
@@ -24807,7 +24560,7 @@
           </a:solidFill>
           <a:ln/>
           <a:effectLst>
-            <a:outerShdw sx="100000" sy="100000" kx="0" ky="0" algn="bl" rotWithShape="0" blurRad="76200" dist="25400" dir="8100000">
+            <a:outerShdw blurRad="76200" dist="25400" dir="8100000" algn="bl" rotWithShape="0">
               <a:srgbClr val="000000">
                 <a:alpha val="8000"/>
               </a:srgbClr>
@@ -24856,7 +24609,7 @@
           <a:bodyPr wrap="square" lIns="0" tIns="0" rIns="0" bIns="0" rtlCol="0" anchor="ctr"/>
           <a:lstStyle/>
           <a:p>
-            <a:pPr indent="0" marL="0">
+            <a:pPr marL="0" indent="0">
               <a:buNone/>
             </a:pPr>
             <a:r>
@@ -24915,7 +24668,7 @@
           <a:bodyPr wrap="square" lIns="0" tIns="0" rIns="0" bIns="0" rtlCol="0" anchor="ctr"/>
           <a:lstStyle/>
           <a:p>
-            <a:pPr indent="0" marL="0">
+            <a:pPr marL="0" indent="0">
               <a:buNone/>
             </a:pPr>
             <a:r>
@@ -24932,7 +24685,7 @@
             <a:endParaRPr lang="en-US" sz="1000" dirty="0"/>
           </a:p>
           <a:p>
-            <a:pPr indent="0" marL="0">
+            <a:pPr marL="0" indent="0">
               <a:buNone/>
             </a:pPr>
             <a:r>
@@ -24949,7 +24702,7 @@
             <a:endParaRPr lang="en-US" sz="1000" dirty="0"/>
           </a:p>
           <a:p>
-            <a:pPr indent="0" marL="0">
+            <a:pPr marL="0" indent="0">
               <a:buNone/>
             </a:pPr>
             <a:r>
@@ -24966,7 +24719,7 @@
             <a:endParaRPr lang="en-US" sz="1000" dirty="0"/>
           </a:p>
           <a:p>
-            <a:pPr indent="0" marL="0">
+            <a:pPr marL="0" indent="0">
               <a:buNone/>
             </a:pPr>
             <a:r>
@@ -25025,7 +24778,7 @@
           <a:bodyPr wrap="square" lIns="0" tIns="0" rIns="0" bIns="0" rtlCol="0" anchor="ctr"/>
           <a:lstStyle/>
           <a:p>
-            <a:pPr algn="ctr" indent="0" marL="0">
+            <a:pPr marL="0" indent="0" algn="ctr">
               <a:buNone/>
             </a:pPr>
             <a:r>
@@ -25059,6 +24812,7 @@
         <a:solidFill>
           <a:srgbClr val="FFFFFF"/>
         </a:solidFill>
+        <a:effectLst/>
       </p:bgPr>
     </p:bg>
     <p:spTree>
@@ -25116,7 +24870,7 @@
           <a:bodyPr wrap="square" lIns="0" tIns="0" rIns="0" bIns="0" rtlCol="0" anchor="ctr"/>
           <a:lstStyle/>
           <a:p>
-            <a:pPr indent="0" marL="0">
+            <a:pPr marL="0" indent="0">
               <a:buNone/>
             </a:pPr>
             <a:r>
@@ -25153,7 +24907,7 @@
           </a:solidFill>
           <a:ln/>
           <a:effectLst>
-            <a:outerShdw sx="100000" sy="100000" kx="0" ky="0" algn="bl" rotWithShape="0" blurRad="76200" dist="25400" dir="8100000">
+            <a:outerShdw blurRad="76200" dist="25400" dir="8100000" algn="bl" rotWithShape="0">
               <a:srgbClr val="000000">
                 <a:alpha val="8000"/>
               </a:srgbClr>
@@ -25202,7 +24956,7 @@
           <a:bodyPr wrap="square" lIns="0" tIns="0" rIns="0" bIns="0" rtlCol="0" anchor="ctr"/>
           <a:lstStyle/>
           <a:p>
-            <a:pPr indent="0" marL="0">
+            <a:pPr marL="0" indent="0">
               <a:buNone/>
             </a:pPr>
             <a:r>
@@ -25241,7 +24995,7 @@
           <a:bodyPr wrap="square" lIns="0" tIns="0" rIns="0" bIns="0" rtlCol="0" anchor="ctr"/>
           <a:lstStyle/>
           <a:p>
-            <a:pPr indent="0" marL="0">
+            <a:pPr marL="0" indent="0">
               <a:lnSpc>
                 <a:spcPts val="1900"/>
               </a:lnSpc>
@@ -25257,78 +25011,10 @@
                 <a:cs typeface="Calibri" pitchFamily="34" charset="-120"/>
               </a:rPr>
               <a:t>✦ 中英文双语字典，集中管理
-</a:t>
-            </a:r>
-            <a:pPr indent="0" marL="0">
-              <a:lnSpc>
-                <a:spcPts val="1900"/>
-              </a:lnSpc>
-              <a:buNone/>
-            </a:pPr>
-            <a:r>
-              <a:rPr lang="en-US" sz="1100" dirty="0">
-                <a:solidFill>
-                  <a:srgbClr val="2D2D2D"/>
-                </a:solidFill>
-                <a:latin typeface="Calibri" pitchFamily="34" charset="0"/>
-                <a:ea typeface="Calibri" pitchFamily="34" charset="-122"/>
-                <a:cs typeface="Calibri" pitchFamily="34" charset="-120"/>
-              </a:rPr>
-              <a:t>✦ tr(key) 统一访问，支持格式化
-</a:t>
-            </a:r>
-            <a:pPr indent="0" marL="0">
-              <a:lnSpc>
-                <a:spcPts val="1900"/>
-              </a:lnSpc>
-              <a:buNone/>
-            </a:pPr>
-            <a:r>
-              <a:rPr lang="en-US" sz="1100" dirty="0">
-                <a:solidFill>
-                  <a:srgbClr val="2D2D2D"/>
-                </a:solidFill>
-                <a:latin typeface="Calibri" pitchFamily="34" charset="0"/>
-                <a:ea typeface="Calibri" pitchFamily="34" charset="-122"/>
-                <a:cs typeface="Calibri" pitchFamily="34" charset="-120"/>
-              </a:rPr>
-              <a:t>✦ Python 版切换语言后重绘界面
-</a:t>
-            </a:r>
-            <a:pPr indent="0" marL="0">
-              <a:lnSpc>
-                <a:spcPts val="1900"/>
-              </a:lnSpc>
-              <a:buNone/>
-            </a:pPr>
-            <a:r>
-              <a:rPr lang="en-US" sz="1100" dirty="0">
-                <a:solidFill>
-                  <a:srgbClr val="2D2D2D"/>
-                </a:solidFill>
-                <a:latin typeface="Calibri" pitchFamily="34" charset="0"/>
-                <a:ea typeface="Calibri" pitchFamily="34" charset="-122"/>
-                <a:cs typeface="Calibri" pitchFamily="34" charset="-120"/>
-              </a:rPr>
-              <a:t>✦ Web 版 data-i18n 属性即时切换
-</a:t>
-            </a:r>
-            <a:pPr indent="0" marL="0">
-              <a:lnSpc>
-                <a:spcPts val="1900"/>
-              </a:lnSpc>
-              <a:buNone/>
-            </a:pPr>
-            <a:r>
-              <a:rPr lang="en-US" sz="1100" dirty="0">
-                <a:solidFill>
-                  <a:srgbClr val="2D2D2D"/>
-                </a:solidFill>
-                <a:latin typeface="Calibri" pitchFamily="34" charset="0"/>
-                <a:ea typeface="Calibri" pitchFamily="34" charset="-122"/>
-                <a:cs typeface="Calibri" pitchFamily="34" charset="-120"/>
-              </a:rPr>
-              <a:t>✦ 菜单一键切换，无需重启
+✦ tr(key) 统一访问，支持格式化
+✦ Python 版切换语言后重绘界面
+✦ Web 版 data-i18n 属性即时切换
+✦ 菜单一键切换，无需重启
 </a:t>
             </a:r>
             <a:endParaRPr lang="en-US" sz="1100" dirty="0"/>
@@ -25354,7 +25040,7 @@
           </a:solidFill>
           <a:ln/>
           <a:effectLst>
-            <a:outerShdw sx="100000" sy="100000" kx="0" ky="0" algn="bl" rotWithShape="0" blurRad="76200" dist="25400" dir="8100000">
+            <a:outerShdw blurRad="76200" dist="25400" dir="8100000" algn="bl" rotWithShape="0">
               <a:srgbClr val="000000">
                 <a:alpha val="8000"/>
               </a:srgbClr>
@@ -25403,7 +25089,7 @@
           <a:bodyPr wrap="square" lIns="0" tIns="0" rIns="0" bIns="0" rtlCol="0" anchor="ctr"/>
           <a:lstStyle/>
           <a:p>
-            <a:pPr indent="0" marL="0">
+            <a:pPr marL="0" indent="0">
               <a:buNone/>
             </a:pPr>
             <a:r>
@@ -25462,7 +25148,7 @@
           <a:bodyPr wrap="square" lIns="0" tIns="0" rIns="0" bIns="0" rtlCol="0" anchor="ctr"/>
           <a:lstStyle/>
           <a:p>
-            <a:pPr indent="0" marL="0">
+            <a:pPr marL="0" indent="0">
               <a:buNone/>
             </a:pPr>
             <a:r>
@@ -25479,7 +25165,7 @@
             <a:endParaRPr lang="en-US" sz="1050" dirty="0"/>
           </a:p>
           <a:p>
-            <a:pPr indent="0" marL="0">
+            <a:pPr marL="0" indent="0">
               <a:buNone/>
             </a:pPr>
             <a:r>
@@ -25496,7 +25182,7 @@
             <a:endParaRPr lang="en-US" sz="1050" dirty="0"/>
           </a:p>
           <a:p>
-            <a:pPr indent="0" marL="0">
+            <a:pPr marL="0" indent="0">
               <a:buNone/>
             </a:pPr>
             <a:r>
@@ -25513,7 +25199,7 @@
             <a:endParaRPr lang="en-US" sz="1050" dirty="0"/>
           </a:p>
           <a:p>
-            <a:pPr indent="0" marL="0">
+            <a:pPr marL="0" indent="0">
               <a:buNone/>
             </a:pPr>
             <a:r>
@@ -25530,7 +25216,7 @@
             <a:endParaRPr lang="en-US" sz="1050" dirty="0"/>
           </a:p>
           <a:p>
-            <a:pPr indent="0" marL="0">
+            <a:pPr marL="0" indent="0">
               <a:buNone/>
             </a:pPr>
             <a:r>
@@ -25547,7 +25233,7 @@
             <a:endParaRPr lang="en-US" sz="1050" dirty="0"/>
           </a:p>
           <a:p>
-            <a:pPr indent="0" marL="0">
+            <a:pPr marL="0" indent="0">
               <a:buNone/>
             </a:pPr>
             <a:r>
@@ -25584,7 +25270,7 @@
           </a:solidFill>
           <a:ln/>
           <a:effectLst>
-            <a:outerShdw sx="100000" sy="100000" kx="0" ky="0" algn="bl" rotWithShape="0" blurRad="76200" dist="25400" dir="8100000">
+            <a:outerShdw blurRad="76200" dist="25400" dir="8100000" algn="bl" rotWithShape="0">
               <a:srgbClr val="000000">
                 <a:alpha val="8000"/>
               </a:srgbClr>
@@ -25633,7 +25319,7 @@
           <a:bodyPr wrap="square" lIns="0" tIns="0" rIns="0" bIns="0" rtlCol="0" anchor="ctr"/>
           <a:lstStyle/>
           <a:p>
-            <a:pPr indent="0" marL="0">
+            <a:pPr marL="0" indent="0">
               <a:buNone/>
             </a:pPr>
             <a:r>
@@ -25672,7 +25358,7 @@
           <a:bodyPr wrap="square" lIns="0" tIns="0" rIns="0" bIns="0" rtlCol="0" anchor="ctr"/>
           <a:lstStyle/>
           <a:p>
-            <a:pPr indent="0" marL="0">
+            <a:pPr marL="0" indent="0">
               <a:buNone/>
             </a:pPr>
             <a:r>
@@ -25731,7 +25417,7 @@
           <a:bodyPr wrap="square" lIns="0" tIns="0" rIns="0" bIns="0" rtlCol="0" anchor="ctr"/>
           <a:lstStyle/>
           <a:p>
-            <a:pPr algn="ctr" indent="0" marL="0">
+            <a:pPr marL="0" indent="0" algn="ctr">
               <a:buNone/>
             </a:pPr>
             <a:r>
@@ -25765,6 +25451,7 @@
         <a:solidFill>
           <a:srgbClr val="0A0A0C"/>
         </a:solidFill>
+        <a:effectLst/>
       </p:bgPr>
     </p:bg>
     <p:spTree>
@@ -25846,7 +25533,7 @@
           <a:bodyPr wrap="square" lIns="0" tIns="0" rIns="0" bIns="0" rtlCol="0" anchor="ctr"/>
           <a:lstStyle/>
           <a:p>
-            <a:pPr algn="ctr" indent="0" marL="0">
+            <a:pPr marL="0" indent="0" algn="ctr">
               <a:buNone/>
             </a:pPr>
             <a:r>
@@ -25882,7 +25569,7 @@
           <a:bodyPr wrap="square" lIns="0" tIns="0" rIns="0" bIns="0" rtlCol="0" anchor="ctr"/>
           <a:lstStyle/>
           <a:p>
-            <a:pPr algn="ctr" indent="0" marL="0">
+            <a:pPr marL="0" indent="0" algn="ctr">
               <a:buNone/>
             </a:pPr>
             <a:r>
@@ -25941,7 +25628,7 @@
           <a:bodyPr wrap="square" lIns="0" tIns="0" rIns="0" bIns="0" rtlCol="0" anchor="ctr"/>
           <a:lstStyle/>
           <a:p>
-            <a:pPr algn="ctr" indent="0" marL="0">
+            <a:pPr marL="0" indent="0" algn="ctr">
               <a:buNone/>
             </a:pPr>
             <a:r>
@@ -25980,7 +25667,7 @@
           <a:bodyPr wrap="square" lIns="0" tIns="0" rIns="0" bIns="0" rtlCol="0" anchor="ctr"/>
           <a:lstStyle/>
           <a:p>
-            <a:pPr algn="ctr" indent="0" marL="0">
+            <a:pPr marL="0" indent="0" algn="ctr">
               <a:buNone/>
             </a:pPr>
             <a:r>
@@ -26019,7 +25706,7 @@
           <a:bodyPr wrap="square" lIns="0" tIns="0" rIns="0" bIns="0" rtlCol="0" anchor="ctr"/>
           <a:lstStyle/>
           <a:p>
-            <a:pPr algn="ctr" indent="0" marL="0">
+            <a:pPr marL="0" indent="0" algn="ctr">
               <a:buNone/>
             </a:pPr>
             <a:r>
@@ -26053,6 +25740,7 @@
         <a:solidFill>
           <a:srgbClr val="FFFFFF"/>
         </a:solidFill>
+        <a:effectLst/>
       </p:bgPr>
     </p:bg>
     <p:spTree>
@@ -26110,7 +25798,7 @@
           <a:bodyPr wrap="square" lIns="0" tIns="0" rIns="0" bIns="0" rtlCol="0" anchor="ctr"/>
           <a:lstStyle/>
           <a:p>
-            <a:pPr indent="0" marL="0">
+            <a:pPr marL="0" indent="0">
               <a:buNone/>
             </a:pPr>
             <a:r>
@@ -26149,7 +25837,7 @@
           <a:bodyPr wrap="square" lIns="0" tIns="0" rIns="0" bIns="0" rtlCol="0" anchor="ctr"/>
           <a:lstStyle/>
           <a:p>
-            <a:pPr indent="0" marL="0">
+            <a:pPr marL="0" indent="0">
               <a:lnSpc>
                 <a:spcPct val="160000"/>
               </a:lnSpc>
@@ -26191,7 +25879,7 @@
           <a:bodyPr wrap="square" lIns="0" tIns="0" rIns="0" bIns="0" rtlCol="0" anchor="ctr"/>
           <a:lstStyle/>
           <a:p>
-            <a:pPr indent="0" marL="0">
+            <a:pPr marL="0" indent="0">
               <a:buNone/>
             </a:pPr>
             <a:r>
@@ -26465,7 +26153,7 @@
           <a:bodyPr wrap="square" lIns="0" tIns="0" rIns="0" bIns="0" rtlCol="0" anchor="ctr"/>
           <a:lstStyle/>
           <a:p>
-            <a:pPr algn="ctr" indent="0" marL="0">
+            <a:pPr marL="0" indent="0" algn="ctr">
               <a:buNone/>
             </a:pPr>
             <a:r>
@@ -26499,6 +26187,7 @@
         <a:solidFill>
           <a:srgbClr val="F5F0EB"/>
         </a:solidFill>
+        <a:effectLst/>
       </p:bgPr>
     </p:bg>
     <p:spTree>
@@ -26556,7 +26245,7 @@
           <a:bodyPr wrap="square" lIns="0" tIns="0" rIns="0" bIns="0" rtlCol="0" anchor="ctr"/>
           <a:lstStyle/>
           <a:p>
-            <a:pPr indent="0" marL="0">
+            <a:pPr marL="0" indent="0">
               <a:buNone/>
             </a:pPr>
             <a:r>
@@ -26595,7 +26284,7 @@
           <a:bodyPr wrap="square" lIns="0" tIns="0" rIns="0" bIns="0" rtlCol="0" anchor="ctr"/>
           <a:lstStyle/>
           <a:p>
-            <a:pPr indent="0" marL="0">
+            <a:pPr marL="0" indent="0">
               <a:lnSpc>
                 <a:spcPct val="150000"/>
               </a:lnSpc>
@@ -26635,7 +26324,7 @@
           </a:solidFill>
           <a:ln/>
           <a:effectLst>
-            <a:outerShdw sx="100000" sy="100000" kx="0" ky="0" algn="bl" rotWithShape="0" blurRad="76200" dist="25400" dir="8100000">
+            <a:outerShdw blurRad="76200" dist="25400" dir="8100000" algn="bl" rotWithShape="0">
               <a:srgbClr val="000000">
                 <a:alpha val="8000"/>
               </a:srgbClr>
@@ -26684,7 +26373,7 @@
           <a:bodyPr wrap="square" lIns="0" tIns="0" rIns="0" bIns="0" rtlCol="0" anchor="ctr"/>
           <a:lstStyle/>
           <a:p>
-            <a:pPr indent="0" marL="0">
+            <a:pPr marL="0" indent="0">
               <a:buNone/>
             </a:pPr>
             <a:r>
@@ -26723,7 +26412,7 @@
           <a:bodyPr wrap="square" lIns="0" tIns="0" rIns="0" bIns="0" rtlCol="0" anchor="ctr"/>
           <a:lstStyle/>
           <a:p>
-            <a:pPr indent="0" marL="0">
+            <a:pPr marL="0" indent="0">
               <a:buNone/>
             </a:pPr>
             <a:r>
@@ -26762,7 +26451,7 @@
           <a:bodyPr wrap="square" lIns="0" tIns="0" rIns="0" bIns="0" rtlCol="0" anchor="ctr"/>
           <a:lstStyle/>
           <a:p>
-            <a:pPr indent="0" marL="0">
+            <a:pPr marL="0" indent="0">
               <a:buNone/>
             </a:pPr>
             <a:r>
@@ -26799,7 +26488,7 @@
           </a:solidFill>
           <a:ln/>
           <a:effectLst>
-            <a:outerShdw sx="100000" sy="100000" kx="0" ky="0" algn="bl" rotWithShape="0" blurRad="76200" dist="25400" dir="8100000">
+            <a:outerShdw blurRad="76200" dist="25400" dir="8100000" algn="bl" rotWithShape="0">
               <a:srgbClr val="000000">
                 <a:alpha val="8000"/>
               </a:srgbClr>
@@ -26848,7 +26537,7 @@
           <a:bodyPr wrap="square" lIns="0" tIns="0" rIns="0" bIns="0" rtlCol="0" anchor="ctr"/>
           <a:lstStyle/>
           <a:p>
-            <a:pPr indent="0" marL="0">
+            <a:pPr marL="0" indent="0">
               <a:buNone/>
             </a:pPr>
             <a:r>
@@ -26887,7 +26576,7 @@
           <a:bodyPr wrap="square" lIns="0" tIns="0" rIns="0" bIns="0" rtlCol="0" anchor="ctr"/>
           <a:lstStyle/>
           <a:p>
-            <a:pPr indent="0" marL="0">
+            <a:pPr marL="0" indent="0">
               <a:buNone/>
             </a:pPr>
             <a:r>
@@ -26926,7 +26615,7 @@
           <a:bodyPr wrap="square" lIns="0" tIns="0" rIns="0" bIns="0" rtlCol="0" anchor="ctr"/>
           <a:lstStyle/>
           <a:p>
-            <a:pPr indent="0" marL="0">
+            <a:pPr marL="0" indent="0">
               <a:buNone/>
             </a:pPr>
             <a:r>
@@ -26963,7 +26652,7 @@
           </a:solidFill>
           <a:ln/>
           <a:effectLst>
-            <a:outerShdw sx="100000" sy="100000" kx="0" ky="0" algn="bl" rotWithShape="0" blurRad="76200" dist="25400" dir="8100000">
+            <a:outerShdw blurRad="76200" dist="25400" dir="8100000" algn="bl" rotWithShape="0">
               <a:srgbClr val="000000">
                 <a:alpha val="8000"/>
               </a:srgbClr>
@@ -27012,7 +26701,7 @@
           <a:bodyPr wrap="square" lIns="0" tIns="0" rIns="0" bIns="0" rtlCol="0" anchor="ctr"/>
           <a:lstStyle/>
           <a:p>
-            <a:pPr indent="0" marL="0">
+            <a:pPr marL="0" indent="0">
               <a:buNone/>
             </a:pPr>
             <a:r>
@@ -27051,7 +26740,7 @@
           <a:bodyPr wrap="square" lIns="0" tIns="0" rIns="0" bIns="0" rtlCol="0" anchor="ctr"/>
           <a:lstStyle/>
           <a:p>
-            <a:pPr indent="0" marL="0">
+            <a:pPr marL="0" indent="0">
               <a:buNone/>
             </a:pPr>
             <a:r>
@@ -27090,7 +26779,7 @@
           <a:bodyPr wrap="square" lIns="0" tIns="0" rIns="0" bIns="0" rtlCol="0" anchor="ctr"/>
           <a:lstStyle/>
           <a:p>
-            <a:pPr indent="0" marL="0">
+            <a:pPr marL="0" indent="0">
               <a:buNone/>
             </a:pPr>
             <a:r>
@@ -27149,7 +26838,7 @@
           <a:bodyPr wrap="square" lIns="0" tIns="0" rIns="0" bIns="0" rtlCol="0" anchor="ctr"/>
           <a:lstStyle/>
           <a:p>
-            <a:pPr algn="ctr" indent="0" marL="0">
+            <a:pPr marL="0" indent="0" algn="ctr">
               <a:buNone/>
             </a:pPr>
             <a:r>
@@ -27183,6 +26872,7 @@
         <a:solidFill>
           <a:srgbClr val="FFFFFF"/>
         </a:solidFill>
+        <a:effectLst/>
       </p:bgPr>
     </p:bg>
     <p:spTree>
@@ -27240,7 +26930,7 @@
           <a:bodyPr wrap="square" lIns="0" tIns="0" rIns="0" bIns="0" rtlCol="0" anchor="ctr"/>
           <a:lstStyle/>
           <a:p>
-            <a:pPr indent="0" marL="0">
+            <a:pPr marL="0" indent="0">
               <a:buNone/>
             </a:pPr>
             <a:r>
@@ -27279,7 +26969,7 @@
           <a:bodyPr wrap="square" lIns="0" tIns="0" rIns="0" bIns="0" rtlCol="0" anchor="ctr"/>
           <a:lstStyle/>
           <a:p>
-            <a:pPr indent="0" marL="0">
+            <a:pPr marL="0" indent="0">
               <a:buNone/>
             </a:pPr>
             <a:r>
@@ -27576,7 +27266,7 @@
           <a:bodyPr wrap="square" lIns="0" tIns="0" rIns="0" bIns="0" rtlCol="0" anchor="ctr"/>
           <a:lstStyle/>
           <a:p>
-            <a:pPr indent="0" marL="0">
+            <a:pPr marL="0" indent="0">
               <a:buNone/>
             </a:pPr>
             <a:r>
@@ -27615,7 +27305,7 @@
           <a:bodyPr wrap="square" lIns="0" tIns="0" rIns="0" bIns="0" rtlCol="0" anchor="ctr"/>
           <a:lstStyle/>
           <a:p>
-            <a:pPr indent="0" marL="0">
+            <a:pPr marL="0" indent="0">
               <a:buNone/>
             </a:pPr>
             <a:r>
@@ -27654,7 +27344,7 @@
           <a:bodyPr wrap="square" lIns="0" tIns="0" rIns="0" bIns="0" rtlCol="0" anchor="ctr"/>
           <a:lstStyle/>
           <a:p>
-            <a:pPr indent="0" marL="0">
+            <a:pPr marL="0" indent="0">
               <a:buNone/>
             </a:pPr>
             <a:r>
@@ -27713,7 +27403,7 @@
           <a:bodyPr wrap="square" lIns="0" tIns="0" rIns="0" bIns="0" rtlCol="0" anchor="ctr"/>
           <a:lstStyle/>
           <a:p>
-            <a:pPr indent="0" marL="0">
+            <a:pPr marL="0" indent="0">
               <a:buNone/>
             </a:pPr>
             <a:r>
@@ -27752,7 +27442,7 @@
           <a:bodyPr wrap="square" lIns="0" tIns="0" rIns="0" bIns="0" rtlCol="0" anchor="ctr"/>
           <a:lstStyle/>
           <a:p>
-            <a:pPr indent="0" marL="0">
+            <a:pPr marL="0" indent="0">
               <a:buNone/>
             </a:pPr>
             <a:r>
@@ -27811,7 +27501,7 @@
           <a:bodyPr wrap="square" lIns="0" tIns="0" rIns="0" bIns="0" rtlCol="0" anchor="ctr"/>
           <a:lstStyle/>
           <a:p>
-            <a:pPr indent="0" marL="0">
+            <a:pPr marL="0" indent="0">
               <a:buNone/>
             </a:pPr>
             <a:r>
@@ -27850,7 +27540,7 @@
           <a:bodyPr wrap="square" lIns="0" tIns="0" rIns="0" bIns="0" rtlCol="0" anchor="ctr"/>
           <a:lstStyle/>
           <a:p>
-            <a:pPr indent="0" marL="0">
+            <a:pPr marL="0" indent="0">
               <a:buNone/>
             </a:pPr>
             <a:r>
@@ -27909,7 +27599,7 @@
           <a:bodyPr wrap="square" lIns="0" tIns="0" rIns="0" bIns="0" rtlCol="0" anchor="ctr"/>
           <a:lstStyle/>
           <a:p>
-            <a:pPr indent="0" marL="0">
+            <a:pPr marL="0" indent="0">
               <a:buNone/>
             </a:pPr>
             <a:r>
@@ -27948,7 +27638,7 @@
           <a:bodyPr wrap="square" lIns="0" tIns="0" rIns="0" bIns="0" rtlCol="0" anchor="ctr"/>
           <a:lstStyle/>
           <a:p>
-            <a:pPr indent="0" marL="0">
+            <a:pPr marL="0" indent="0">
               <a:buNone/>
             </a:pPr>
             <a:r>
@@ -28007,7 +27697,7 @@
           <a:bodyPr wrap="square" lIns="0" tIns="0" rIns="0" bIns="0" rtlCol="0" anchor="ctr"/>
           <a:lstStyle/>
           <a:p>
-            <a:pPr indent="0" marL="0">
+            <a:pPr marL="0" indent="0">
               <a:buNone/>
             </a:pPr>
             <a:r>
@@ -28046,7 +27736,7 @@
           <a:bodyPr wrap="square" lIns="0" tIns="0" rIns="0" bIns="0" rtlCol="0" anchor="ctr"/>
           <a:lstStyle/>
           <a:p>
-            <a:pPr indent="0" marL="0">
+            <a:pPr marL="0" indent="0">
               <a:buNone/>
             </a:pPr>
             <a:r>
@@ -28105,7 +27795,7 @@
           <a:bodyPr wrap="square" lIns="0" tIns="0" rIns="0" bIns="0" rtlCol="0" anchor="ctr"/>
           <a:lstStyle/>
           <a:p>
-            <a:pPr indent="0" marL="0">
+            <a:pPr marL="0" indent="0">
               <a:buNone/>
             </a:pPr>
             <a:r>
@@ -28144,7 +27834,7 @@
           <a:bodyPr wrap="square" lIns="0" tIns="0" rIns="0" bIns="0" rtlCol="0" anchor="ctr"/>
           <a:lstStyle/>
           <a:p>
-            <a:pPr indent="0" marL="0">
+            <a:pPr marL="0" indent="0">
               <a:buNone/>
             </a:pPr>
             <a:r>
@@ -28198,6 +27888,7 @@
         <a:solidFill>
           <a:srgbClr val="F5F0EB"/>
         </a:solidFill>
+        <a:effectLst/>
       </p:bgPr>
     </p:bg>
     <p:spTree>
@@ -28255,7 +27946,7 @@
           <a:bodyPr wrap="square" lIns="0" tIns="0" rIns="0" bIns="0" rtlCol="0" anchor="ctr"/>
           <a:lstStyle/>
           <a:p>
-            <a:pPr indent="0" marL="0">
+            <a:pPr marL="0" indent="0">
               <a:buNone/>
             </a:pPr>
             <a:r>
@@ -28292,7 +27983,7 @@
           </a:solidFill>
           <a:ln/>
           <a:effectLst>
-            <a:outerShdw sx="100000" sy="100000" kx="0" ky="0" algn="bl" rotWithShape="0" blurRad="76200" dist="25400" dir="8100000">
+            <a:outerShdw blurRad="76200" dist="25400" dir="8100000" algn="bl" rotWithShape="0">
               <a:srgbClr val="000000">
                 <a:alpha val="8000"/>
               </a:srgbClr>
@@ -28341,7 +28032,7 @@
           <a:bodyPr wrap="square" lIns="0" tIns="0" rIns="0" bIns="0" rtlCol="0" anchor="ctr"/>
           <a:lstStyle/>
           <a:p>
-            <a:pPr indent="0" marL="0">
+            <a:pPr marL="0" indent="0">
               <a:buNone/>
             </a:pPr>
             <a:r>
@@ -28380,7 +28071,7 @@
           <a:bodyPr wrap="square" lIns="0" tIns="0" rIns="0" bIns="0" rtlCol="0" anchor="ctr"/>
           <a:lstStyle/>
           <a:p>
-            <a:pPr indent="0" marL="0">
+            <a:pPr marL="0" indent="0">
               <a:buNone/>
             </a:pPr>
             <a:r>
@@ -28419,7 +28110,7 @@
           <a:bodyPr wrap="square" lIns="0" tIns="0" rIns="0" bIns="0" rtlCol="0" anchor="ctr"/>
           <a:lstStyle/>
           <a:p>
-            <a:pPr indent="0" marL="0">
+            <a:pPr marL="0" indent="0">
               <a:buNone/>
             </a:pPr>
             <a:r>
@@ -28458,7 +28149,7 @@
           <a:bodyPr wrap="square" lIns="0" tIns="0" rIns="0" bIns="0" rtlCol="0" anchor="ctr"/>
           <a:lstStyle/>
           <a:p>
-            <a:pPr indent="0" marL="0">
+            <a:pPr marL="0" indent="0">
               <a:buNone/>
             </a:pPr>
             <a:r>
@@ -28644,7 +28335,7 @@
           </a:solidFill>
           <a:ln/>
           <a:effectLst>
-            <a:outerShdw sx="100000" sy="100000" kx="0" ky="0" algn="bl" rotWithShape="0" blurRad="76200" dist="25400" dir="8100000">
+            <a:outerShdw blurRad="76200" dist="25400" dir="8100000" algn="bl" rotWithShape="0">
               <a:srgbClr val="000000">
                 <a:alpha val="8000"/>
               </a:srgbClr>
@@ -28693,7 +28384,7 @@
           <a:bodyPr wrap="square" lIns="0" tIns="0" rIns="0" bIns="0" rtlCol="0" anchor="ctr"/>
           <a:lstStyle/>
           <a:p>
-            <a:pPr indent="0" marL="0">
+            <a:pPr marL="0" indent="0">
               <a:buNone/>
             </a:pPr>
             <a:r>
@@ -28732,7 +28423,7 @@
           <a:bodyPr wrap="square" lIns="0" tIns="0" rIns="0" bIns="0" rtlCol="0" anchor="ctr"/>
           <a:lstStyle/>
           <a:p>
-            <a:pPr indent="0" marL="0">
+            <a:pPr marL="0" indent="0">
               <a:buNone/>
             </a:pPr>
             <a:r>
@@ -28771,7 +28462,7 @@
           <a:bodyPr wrap="square" lIns="0" tIns="0" rIns="0" bIns="0" rtlCol="0" anchor="ctr"/>
           <a:lstStyle/>
           <a:p>
-            <a:pPr indent="0" marL="0">
+            <a:pPr marL="0" indent="0">
               <a:buNone/>
             </a:pPr>
             <a:r>
@@ -28810,7 +28501,7 @@
           <a:bodyPr wrap="square" lIns="0" tIns="0" rIns="0" bIns="0" rtlCol="0" anchor="ctr"/>
           <a:lstStyle/>
           <a:p>
-            <a:pPr indent="0" marL="0">
+            <a:pPr marL="0" indent="0">
               <a:buNone/>
             </a:pPr>
             <a:r>
@@ -28996,7 +28687,7 @@
           </a:solidFill>
           <a:ln/>
           <a:effectLst>
-            <a:outerShdw sx="100000" sy="100000" kx="0" ky="0" algn="bl" rotWithShape="0" blurRad="76200" dist="25400" dir="8100000">
+            <a:outerShdw blurRad="76200" dist="25400" dir="8100000" algn="bl" rotWithShape="0">
               <a:srgbClr val="000000">
                 <a:alpha val="8000"/>
               </a:srgbClr>
@@ -29045,7 +28736,7 @@
           <a:bodyPr wrap="square" lIns="0" tIns="0" rIns="0" bIns="0" rtlCol="0" anchor="ctr"/>
           <a:lstStyle/>
           <a:p>
-            <a:pPr indent="0" marL="0">
+            <a:pPr marL="0" indent="0">
               <a:buNone/>
             </a:pPr>
             <a:r>
@@ -29084,7 +28775,7 @@
           <a:bodyPr wrap="square" lIns="0" tIns="0" rIns="0" bIns="0" rtlCol="0" anchor="ctr"/>
           <a:lstStyle/>
           <a:p>
-            <a:pPr indent="0" marL="0">
+            <a:pPr marL="0" indent="0">
               <a:buNone/>
             </a:pPr>
             <a:r>
@@ -29123,7 +28814,7 @@
           <a:bodyPr wrap="square" lIns="0" tIns="0" rIns="0" bIns="0" rtlCol="0" anchor="ctr"/>
           <a:lstStyle/>
           <a:p>
-            <a:pPr indent="0" marL="0">
+            <a:pPr marL="0" indent="0">
               <a:buNone/>
             </a:pPr>
             <a:r>
@@ -29162,7 +28853,7 @@
           <a:bodyPr wrap="square" lIns="0" tIns="0" rIns="0" bIns="0" rtlCol="0" anchor="ctr"/>
           <a:lstStyle/>
           <a:p>
-            <a:pPr indent="0" marL="0">
+            <a:pPr marL="0" indent="0">
               <a:buNone/>
             </a:pPr>
             <a:r>
@@ -29350,7 +29041,7 @@
           <a:bodyPr wrap="square" lIns="0" tIns="0" rIns="0" bIns="0" rtlCol="0" anchor="ctr"/>
           <a:lstStyle/>
           <a:p>
-            <a:pPr algn="ctr" indent="0" marL="0">
+            <a:pPr marL="0" indent="0" algn="ctr">
               <a:buNone/>
             </a:pPr>
             <a:r>
@@ -29386,7 +29077,7 @@
           <a:bodyPr wrap="square" lIns="0" tIns="0" rIns="0" bIns="0" rtlCol="0" anchor="ctr"/>
           <a:lstStyle/>
           <a:p>
-            <a:pPr algn="ctr" indent="0" marL="0">
+            <a:pPr marL="0" indent="0" algn="ctr">
               <a:buNone/>
             </a:pPr>
             <a:r>
@@ -29417,6 +29108,7 @@
         <a:solidFill>
           <a:srgbClr val="FFFFFF"/>
         </a:solidFill>
+        <a:effectLst/>
       </p:bgPr>
     </p:bg>
     <p:spTree>
@@ -29474,7 +29166,7 @@
           <a:bodyPr wrap="square" lIns="0" tIns="0" rIns="0" bIns="0" rtlCol="0" anchor="ctr"/>
           <a:lstStyle/>
           <a:p>
-            <a:pPr indent="0" marL="0">
+            <a:pPr marL="0" indent="0">
               <a:buNone/>
             </a:pPr>
             <a:r>
@@ -29513,7 +29205,7 @@
           <a:bodyPr wrap="square" lIns="0" tIns="0" rIns="0" bIns="0" rtlCol="0" anchor="ctr"/>
           <a:lstStyle/>
           <a:p>
-            <a:pPr indent="0" marL="0">
+            <a:pPr marL="0" indent="0">
               <a:buNone/>
             </a:pPr>
             <a:r>
@@ -29808,7 +29500,7 @@
           </a:solidFill>
           <a:ln/>
           <a:effectLst>
-            <a:outerShdw sx="100000" sy="100000" kx="0" ky="0" algn="bl" rotWithShape="0" blurRad="76200" dist="25400" dir="8100000">
+            <a:outerShdw blurRad="76200" dist="25400" dir="8100000" algn="bl" rotWithShape="0">
               <a:srgbClr val="000000">
                 <a:alpha val="8000"/>
               </a:srgbClr>
@@ -29857,7 +29549,7 @@
           <a:bodyPr wrap="square" lIns="0" tIns="0" rIns="0" bIns="0" rtlCol="0" anchor="ctr"/>
           <a:lstStyle/>
           <a:p>
-            <a:pPr indent="0" marL="0">
+            <a:pPr marL="0" indent="0">
               <a:buNone/>
             </a:pPr>
             <a:r>
@@ -29898,7 +29590,7 @@
           <a:bodyPr wrap="square" lIns="1270" tIns="1270" rIns="1270" bIns="1270" rtlCol="0" anchor="t"/>
           <a:lstStyle/>
           <a:p>
-            <a:pPr indent="0" marL="0">
+            <a:pPr marL="0" indent="0">
               <a:lnSpc>
                 <a:spcPct val="115000"/>
               </a:lnSpc>
@@ -29918,7 +29610,7 @@
             <a:endParaRPr lang="en-US" sz="850" dirty="0"/>
           </a:p>
           <a:p>
-            <a:pPr indent="0" marL="0">
+            <a:pPr marL="0" indent="0">
               <a:lnSpc>
                 <a:spcPct val="115000"/>
               </a:lnSpc>
@@ -29938,7 +29630,7 @@
             <a:endParaRPr lang="en-US" sz="850" dirty="0"/>
           </a:p>
           <a:p>
-            <a:pPr indent="0" marL="0">
+            <a:pPr marL="0" indent="0">
               <a:lnSpc>
                 <a:spcPct val="115000"/>
               </a:lnSpc>
@@ -29958,7 +29650,7 @@
             <a:endParaRPr lang="en-US" sz="850" dirty="0"/>
           </a:p>
           <a:p>
-            <a:pPr indent="0" marL="0">
+            <a:pPr marL="0" indent="0">
               <a:lnSpc>
                 <a:spcPct val="115000"/>
               </a:lnSpc>
@@ -29978,7 +29670,7 @@
             <a:endParaRPr lang="en-US" sz="850" dirty="0"/>
           </a:p>
           <a:p>
-            <a:pPr indent="0" marL="0">
+            <a:pPr marL="0" indent="0">
               <a:lnSpc>
                 <a:spcPct val="115000"/>
               </a:lnSpc>
@@ -29998,7 +29690,7 @@
             <a:endParaRPr lang="en-US" sz="850" dirty="0"/>
           </a:p>
           <a:p>
-            <a:pPr indent="0" marL="0">
+            <a:pPr marL="0" indent="0">
               <a:lnSpc>
                 <a:spcPct val="115000"/>
               </a:lnSpc>
@@ -30018,7 +29710,7 @@
             <a:endParaRPr lang="en-US" sz="850" dirty="0"/>
           </a:p>
           <a:p>
-            <a:pPr indent="0" marL="0">
+            <a:pPr marL="0" indent="0">
               <a:lnSpc>
                 <a:spcPct val="115000"/>
               </a:lnSpc>
@@ -30038,7 +29730,7 @@
             <a:endParaRPr lang="en-US" sz="850" dirty="0"/>
           </a:p>
           <a:p>
-            <a:pPr indent="0" marL="0">
+            <a:pPr marL="0" indent="0">
               <a:lnSpc>
                 <a:spcPct val="115000"/>
               </a:lnSpc>
@@ -30058,7 +29750,7 @@
             <a:endParaRPr lang="en-US" sz="850" dirty="0"/>
           </a:p>
           <a:p>
-            <a:pPr indent="0" marL="0">
+            <a:pPr marL="0" indent="0">
               <a:lnSpc>
                 <a:spcPct val="115000"/>
               </a:lnSpc>
@@ -30078,7 +29770,7 @@
             <a:endParaRPr lang="en-US" sz="850" dirty="0"/>
           </a:p>
           <a:p>
-            <a:pPr indent="0" marL="0">
+            <a:pPr marL="0" indent="0">
               <a:lnSpc>
                 <a:spcPct val="115000"/>
               </a:lnSpc>
@@ -30098,7 +29790,7 @@
             <a:endParaRPr lang="en-US" sz="850" dirty="0"/>
           </a:p>
           <a:p>
-            <a:pPr indent="0" marL="0">
+            <a:pPr marL="0" indent="0">
               <a:lnSpc>
                 <a:spcPct val="115000"/>
               </a:lnSpc>
@@ -30118,7 +29810,7 @@
             <a:endParaRPr lang="en-US" sz="850" dirty="0"/>
           </a:p>
           <a:p>
-            <a:pPr indent="0" marL="0">
+            <a:pPr marL="0" indent="0">
               <a:lnSpc>
                 <a:spcPct val="115000"/>
               </a:lnSpc>
@@ -30180,7 +29872,7 @@
           <a:bodyPr wrap="square" lIns="0" tIns="0" rIns="0" bIns="0" rtlCol="0" anchor="ctr"/>
           <a:lstStyle/>
           <a:p>
-            <a:pPr algn="ctr" indent="0" marL="0">
+            <a:pPr marL="0" indent="0" algn="ctr">
               <a:buNone/>
             </a:pPr>
             <a:r>
@@ -30214,6 +29906,7 @@
         <a:solidFill>
           <a:srgbClr val="F5F0EB"/>
         </a:solidFill>
+        <a:effectLst/>
       </p:bgPr>
     </p:bg>
     <p:spTree>
@@ -30271,7 +29964,7 @@
           <a:bodyPr wrap="square" lIns="0" tIns="0" rIns="0" bIns="0" rtlCol="0" anchor="ctr"/>
           <a:lstStyle/>
           <a:p>
-            <a:pPr indent="0" marL="0">
+            <a:pPr marL="0" indent="0">
               <a:buNone/>
             </a:pPr>
             <a:r>
@@ -30308,7 +30001,7 @@
           </a:solidFill>
           <a:ln/>
           <a:effectLst>
-            <a:outerShdw sx="100000" sy="100000" kx="0" ky="0" algn="bl" rotWithShape="0" blurRad="76200" dist="25400" dir="8100000">
+            <a:outerShdw blurRad="76200" dist="25400" dir="8100000" algn="bl" rotWithShape="0">
               <a:srgbClr val="000000">
                 <a:alpha val="8000"/>
               </a:srgbClr>
@@ -30357,7 +30050,7 @@
           <a:bodyPr wrap="square" lIns="0" tIns="0" rIns="0" bIns="0" rtlCol="0" anchor="ctr"/>
           <a:lstStyle/>
           <a:p>
-            <a:pPr indent="0" marL="0">
+            <a:pPr marL="0" indent="0">
               <a:buNone/>
             </a:pPr>
             <a:r>
@@ -30394,7 +30087,7 @@
           </a:solidFill>
           <a:ln/>
           <a:effectLst>
-            <a:outerShdw sx="100000" sy="100000" kx="0" ky="0" algn="bl" rotWithShape="0" blurRad="76200" dist="25400" dir="8100000">
+            <a:outerShdw blurRad="76200" dist="25400" dir="8100000" algn="bl" rotWithShape="0">
               <a:srgbClr val="000000">
                 <a:alpha val="8000"/>
               </a:srgbClr>
@@ -30443,7 +30136,7 @@
           <a:bodyPr wrap="square" lIns="0" tIns="0" rIns="0" bIns="0" rtlCol="0" anchor="ctr"/>
           <a:lstStyle/>
           <a:p>
-            <a:pPr indent="0" marL="0">
+            <a:pPr marL="0" indent="0">
               <a:buNone/>
             </a:pPr>
             <a:r>
@@ -30482,7 +30175,7 @@
           <a:bodyPr wrap="square" lIns="0" tIns="0" rIns="0" bIns="0" rtlCol="0" anchor="ctr"/>
           <a:lstStyle/>
           <a:p>
-            <a:pPr indent="0" marL="0">
+            <a:pPr marL="0" indent="0">
               <a:buNone/>
             </a:pPr>
             <a:r>
@@ -30521,7 +30214,7 @@
           <a:bodyPr wrap="square" lIns="0" tIns="0" rIns="0" bIns="0" rtlCol="0" anchor="ctr"/>
           <a:lstStyle/>
           <a:p>
-            <a:pPr indent="0" marL="0">
+            <a:pPr marL="0" indent="0">
               <a:buNone/>
             </a:pPr>
             <a:r>
@@ -30558,7 +30251,7 @@
           </a:solidFill>
           <a:ln/>
           <a:effectLst>
-            <a:outerShdw sx="100000" sy="100000" kx="0" ky="0" algn="bl" rotWithShape="0" blurRad="76200" dist="25400" dir="8100000">
+            <a:outerShdw blurRad="76200" dist="25400" dir="8100000" algn="bl" rotWithShape="0">
               <a:srgbClr val="000000">
                 <a:alpha val="8000"/>
               </a:srgbClr>
@@ -30607,7 +30300,7 @@
           <a:bodyPr wrap="square" lIns="0" tIns="0" rIns="0" bIns="0" rtlCol="0" anchor="ctr"/>
           <a:lstStyle/>
           <a:p>
-            <a:pPr indent="0" marL="0">
+            <a:pPr marL="0" indent="0">
               <a:buNone/>
             </a:pPr>
             <a:r>
@@ -30646,7 +30339,7 @@
           <a:bodyPr wrap="square" lIns="0" tIns="0" rIns="0" bIns="0" rtlCol="0" anchor="ctr"/>
           <a:lstStyle/>
           <a:p>
-            <a:pPr indent="0" marL="0">
+            <a:pPr marL="0" indent="0">
               <a:buNone/>
             </a:pPr>
             <a:r>
@@ -30685,7 +30378,7 @@
           <a:bodyPr wrap="square" lIns="0" tIns="0" rIns="0" bIns="0" rtlCol="0" anchor="ctr"/>
           <a:lstStyle/>
           <a:p>
-            <a:pPr indent="0" marL="0">
+            <a:pPr marL="0" indent="0">
               <a:buNone/>
             </a:pPr>
             <a:r>
@@ -30722,7 +30415,7 @@
           </a:solidFill>
           <a:ln/>
           <a:effectLst>
-            <a:outerShdw sx="100000" sy="100000" kx="0" ky="0" algn="bl" rotWithShape="0" blurRad="76200" dist="25400" dir="8100000">
+            <a:outerShdw blurRad="76200" dist="25400" dir="8100000" algn="bl" rotWithShape="0">
               <a:srgbClr val="000000">
                 <a:alpha val="8000"/>
               </a:srgbClr>
@@ -30771,7 +30464,7 @@
           <a:bodyPr wrap="square" lIns="0" tIns="0" rIns="0" bIns="0" rtlCol="0" anchor="ctr"/>
           <a:lstStyle/>
           <a:p>
-            <a:pPr indent="0" marL="0">
+            <a:pPr marL="0" indent="0">
               <a:buNone/>
             </a:pPr>
             <a:r>
@@ -30810,7 +30503,7 @@
           <a:bodyPr wrap="square" lIns="0" tIns="0" rIns="0" bIns="0" rtlCol="0" anchor="ctr"/>
           <a:lstStyle/>
           <a:p>
-            <a:pPr indent="0" marL="0">
+            <a:pPr marL="0" indent="0">
               <a:buNone/>
             </a:pPr>
             <a:r>
@@ -30849,7 +30542,7 @@
           <a:bodyPr wrap="square" lIns="0" tIns="0" rIns="0" bIns="0" rtlCol="0" anchor="ctr"/>
           <a:lstStyle/>
           <a:p>
-            <a:pPr indent="0" marL="0">
+            <a:pPr marL="0" indent="0">
               <a:buNone/>
             </a:pPr>
             <a:r>
@@ -30886,7 +30579,7 @@
           </a:solidFill>
           <a:ln/>
           <a:effectLst>
-            <a:outerShdw sx="100000" sy="100000" kx="0" ky="0" algn="bl" rotWithShape="0" blurRad="76200" dist="25400" dir="8100000">
+            <a:outerShdw blurRad="76200" dist="25400" dir="8100000" algn="bl" rotWithShape="0">
               <a:srgbClr val="000000">
                 <a:alpha val="8000"/>
               </a:srgbClr>
@@ -30935,7 +30628,7 @@
           <a:bodyPr wrap="square" lIns="0" tIns="0" rIns="0" bIns="0" rtlCol="0" anchor="ctr"/>
           <a:lstStyle/>
           <a:p>
-            <a:pPr indent="0" marL="0">
+            <a:pPr marL="0" indent="0">
               <a:buNone/>
             </a:pPr>
             <a:r>
@@ -30974,7 +30667,7 @@
           <a:bodyPr wrap="square" lIns="0" tIns="0" rIns="0" bIns="0" rtlCol="0" anchor="ctr"/>
           <a:lstStyle/>
           <a:p>
-            <a:pPr indent="0" marL="0">
+            <a:pPr marL="0" indent="0">
               <a:buNone/>
             </a:pPr>
             <a:r>
@@ -31013,7 +30706,7 @@
           <a:bodyPr wrap="square" lIns="0" tIns="0" rIns="0" bIns="0" rtlCol="0" anchor="ctr"/>
           <a:lstStyle/>
           <a:p>
-            <a:pPr indent="0" marL="0">
+            <a:pPr marL="0" indent="0">
               <a:buNone/>
             </a:pPr>
             <a:r>
@@ -31050,7 +30743,7 @@
           </a:solidFill>
           <a:ln/>
           <a:effectLst>
-            <a:outerShdw sx="100000" sy="100000" kx="0" ky="0" algn="bl" rotWithShape="0" blurRad="76200" dist="25400" dir="8100000">
+            <a:outerShdw blurRad="76200" dist="25400" dir="8100000" algn="bl" rotWithShape="0">
               <a:srgbClr val="000000">
                 <a:alpha val="8000"/>
               </a:srgbClr>
@@ -31099,7 +30792,7 @@
           <a:bodyPr wrap="square" lIns="0" tIns="0" rIns="0" bIns="0" rtlCol="0" anchor="ctr"/>
           <a:lstStyle/>
           <a:p>
-            <a:pPr indent="0" marL="0">
+            <a:pPr marL="0" indent="0">
               <a:buNone/>
             </a:pPr>
             <a:r>
@@ -31138,7 +30831,7 @@
           <a:bodyPr wrap="square" lIns="0" tIns="0" rIns="0" bIns="0" rtlCol="0" anchor="ctr"/>
           <a:lstStyle/>
           <a:p>
-            <a:pPr indent="0" marL="0">
+            <a:pPr marL="0" indent="0">
               <a:buNone/>
             </a:pPr>
             <a:r>
@@ -31177,7 +30870,7 @@
           <a:bodyPr wrap="square" lIns="0" tIns="0" rIns="0" bIns="0" rtlCol="0" anchor="ctr"/>
           <a:lstStyle/>
           <a:p>
-            <a:pPr indent="0" marL="0">
+            <a:pPr marL="0" indent="0">
               <a:buNone/>
             </a:pPr>
             <a:r>
@@ -31236,7 +30929,7 @@
           <a:bodyPr wrap="square" lIns="0" tIns="0" rIns="0" bIns="0" rtlCol="0" anchor="ctr"/>
           <a:lstStyle/>
           <a:p>
-            <a:pPr algn="ctr" indent="0" marL="0">
+            <a:pPr marL="0" indent="0" algn="ctr">
               <a:buNone/>
             </a:pPr>
             <a:r>
@@ -31270,6 +30963,7 @@
         <a:solidFill>
           <a:srgbClr val="F5F0EB"/>
         </a:solidFill>
+        <a:effectLst/>
       </p:bgPr>
     </p:bg>
     <p:spTree>
@@ -31327,7 +31021,7 @@
           <a:bodyPr wrap="square" lIns="0" tIns="0" rIns="0" bIns="0" rtlCol="0" anchor="ctr"/>
           <a:lstStyle/>
           <a:p>
-            <a:pPr indent="0" marL="0">
+            <a:pPr marL="0" indent="0">
               <a:buNone/>
             </a:pPr>
             <a:r>
@@ -31364,7 +31058,7 @@
           </a:solidFill>
           <a:ln/>
           <a:effectLst>
-            <a:outerShdw sx="100000" sy="100000" kx="0" ky="0" algn="bl" rotWithShape="0" blurRad="76200" dist="25400" dir="8100000">
+            <a:outerShdw blurRad="76200" dist="25400" dir="8100000" algn="bl" rotWithShape="0">
               <a:srgbClr val="000000">
                 <a:alpha val="8000"/>
               </a:srgbClr>
@@ -31413,7 +31107,7 @@
           <a:bodyPr wrap="square" lIns="0" tIns="0" rIns="0" bIns="0" rtlCol="0" anchor="ctr"/>
           <a:lstStyle/>
           <a:p>
-            <a:pPr indent="0" marL="0">
+            <a:pPr marL="0" indent="0">
               <a:buNone/>
             </a:pPr>
             <a:r>
@@ -31450,7 +31144,7 @@
           </a:solidFill>
           <a:ln/>
           <a:effectLst>
-            <a:outerShdw sx="100000" sy="100000" kx="0" ky="0" algn="bl" rotWithShape="0" blurRad="76200" dist="25400" dir="8100000">
+            <a:outerShdw blurRad="76200" dist="25400" dir="8100000" algn="bl" rotWithShape="0">
               <a:srgbClr val="000000">
                 <a:alpha val="8000"/>
               </a:srgbClr>
@@ -31499,7 +31193,7 @@
           <a:bodyPr wrap="square" lIns="0" tIns="0" rIns="0" bIns="0" rtlCol="0" anchor="ctr"/>
           <a:lstStyle/>
           <a:p>
-            <a:pPr indent="0" marL="0">
+            <a:pPr marL="0" indent="0">
               <a:buNone/>
             </a:pPr>
             <a:r>
@@ -31538,7 +31232,7 @@
           <a:bodyPr wrap="square" lIns="0" tIns="0" rIns="0" bIns="0" rtlCol="0" anchor="ctr"/>
           <a:lstStyle/>
           <a:p>
-            <a:pPr indent="0" marL="0">
+            <a:pPr marL="0" indent="0">
               <a:buNone/>
             </a:pPr>
             <a:r>
@@ -31577,7 +31271,7 @@
           <a:bodyPr wrap="square" lIns="0" tIns="0" rIns="0" bIns="0" rtlCol="0" anchor="ctr"/>
           <a:lstStyle/>
           <a:p>
-            <a:pPr indent="0" marL="0">
+            <a:pPr marL="0" indent="0">
               <a:buNone/>
             </a:pPr>
             <a:r>
@@ -31614,7 +31308,7 @@
           </a:solidFill>
           <a:ln/>
           <a:effectLst>
-            <a:outerShdw sx="100000" sy="100000" kx="0" ky="0" algn="bl" rotWithShape="0" blurRad="76200" dist="25400" dir="8100000">
+            <a:outerShdw blurRad="76200" dist="25400" dir="8100000" algn="bl" rotWithShape="0">
               <a:srgbClr val="000000">
                 <a:alpha val="8000"/>
               </a:srgbClr>
@@ -31663,7 +31357,7 @@
           <a:bodyPr wrap="square" lIns="0" tIns="0" rIns="0" bIns="0" rtlCol="0" anchor="ctr"/>
           <a:lstStyle/>
           <a:p>
-            <a:pPr indent="0" marL="0">
+            <a:pPr marL="0" indent="0">
               <a:buNone/>
             </a:pPr>
             <a:r>
@@ -31702,7 +31396,7 @@
           <a:bodyPr wrap="square" lIns="0" tIns="0" rIns="0" bIns="0" rtlCol="0" anchor="ctr"/>
           <a:lstStyle/>
           <a:p>
-            <a:pPr indent="0" marL="0">
+            <a:pPr marL="0" indent="0">
               <a:buNone/>
             </a:pPr>
             <a:r>
@@ -31741,7 +31435,7 @@
           <a:bodyPr wrap="square" lIns="0" tIns="0" rIns="0" bIns="0" rtlCol="0" anchor="ctr"/>
           <a:lstStyle/>
           <a:p>
-            <a:pPr indent="0" marL="0">
+            <a:pPr marL="0" indent="0">
               <a:buNone/>
             </a:pPr>
             <a:r>
@@ -31778,7 +31472,7 @@
           </a:solidFill>
           <a:ln/>
           <a:effectLst>
-            <a:outerShdw sx="100000" sy="100000" kx="0" ky="0" algn="bl" rotWithShape="0" blurRad="76200" dist="25400" dir="8100000">
+            <a:outerShdw blurRad="76200" dist="25400" dir="8100000" algn="bl" rotWithShape="0">
               <a:srgbClr val="000000">
                 <a:alpha val="8000"/>
               </a:srgbClr>
@@ -31827,7 +31521,7 @@
           <a:bodyPr wrap="square" lIns="0" tIns="0" rIns="0" bIns="0" rtlCol="0" anchor="ctr"/>
           <a:lstStyle/>
           <a:p>
-            <a:pPr indent="0" marL="0">
+            <a:pPr marL="0" indent="0">
               <a:buNone/>
             </a:pPr>
             <a:r>
@@ -31866,7 +31560,7 @@
           <a:bodyPr wrap="square" lIns="0" tIns="0" rIns="0" bIns="0" rtlCol="0" anchor="ctr"/>
           <a:lstStyle/>
           <a:p>
-            <a:pPr indent="0" marL="0">
+            <a:pPr marL="0" indent="0">
               <a:buNone/>
             </a:pPr>
             <a:r>
@@ -31905,7 +31599,7 @@
           <a:bodyPr wrap="square" lIns="0" tIns="0" rIns="0" bIns="0" rtlCol="0" anchor="ctr"/>
           <a:lstStyle/>
           <a:p>
-            <a:pPr indent="0" marL="0">
+            <a:pPr marL="0" indent="0">
               <a:buNone/>
             </a:pPr>
             <a:r>
@@ -31942,7 +31636,7 @@
           </a:solidFill>
           <a:ln/>
           <a:effectLst>
-            <a:outerShdw sx="100000" sy="100000" kx="0" ky="0" algn="bl" rotWithShape="0" blurRad="76200" dist="25400" dir="8100000">
+            <a:outerShdw blurRad="76200" dist="25400" dir="8100000" algn="bl" rotWithShape="0">
               <a:srgbClr val="000000">
                 <a:alpha val="8000"/>
               </a:srgbClr>
@@ -31991,7 +31685,7 @@
           <a:bodyPr wrap="square" lIns="0" tIns="0" rIns="0" bIns="0" rtlCol="0" anchor="ctr"/>
           <a:lstStyle/>
           <a:p>
-            <a:pPr indent="0" marL="0">
+            <a:pPr marL="0" indent="0">
               <a:buNone/>
             </a:pPr>
             <a:r>
@@ -32030,7 +31724,7 @@
           <a:bodyPr wrap="square" lIns="0" tIns="0" rIns="0" bIns="0" rtlCol="0" anchor="ctr"/>
           <a:lstStyle/>
           <a:p>
-            <a:pPr indent="0" marL="0">
+            <a:pPr marL="0" indent="0">
               <a:buNone/>
             </a:pPr>
             <a:r>
@@ -32069,7 +31763,7 @@
           <a:bodyPr wrap="square" lIns="0" tIns="0" rIns="0" bIns="0" rtlCol="0" anchor="ctr"/>
           <a:lstStyle/>
           <a:p>
-            <a:pPr indent="0" marL="0">
+            <a:pPr marL="0" indent="0">
               <a:buNone/>
             </a:pPr>
             <a:r>
@@ -32106,7 +31800,7 @@
           </a:solidFill>
           <a:ln/>
           <a:effectLst>
-            <a:outerShdw sx="100000" sy="100000" kx="0" ky="0" algn="bl" rotWithShape="0" blurRad="76200" dist="25400" dir="8100000">
+            <a:outerShdw blurRad="76200" dist="25400" dir="8100000" algn="bl" rotWithShape="0">
               <a:srgbClr val="000000">
                 <a:alpha val="8000"/>
               </a:srgbClr>
@@ -32155,7 +31849,7 @@
           <a:bodyPr wrap="square" lIns="0" tIns="0" rIns="0" bIns="0" rtlCol="0" anchor="ctr"/>
           <a:lstStyle/>
           <a:p>
-            <a:pPr indent="0" marL="0">
+            <a:pPr marL="0" indent="0">
               <a:buNone/>
             </a:pPr>
             <a:r>
@@ -32194,7 +31888,7 @@
           <a:bodyPr wrap="square" lIns="0" tIns="0" rIns="0" bIns="0" rtlCol="0" anchor="ctr"/>
           <a:lstStyle/>
           <a:p>
-            <a:pPr indent="0" marL="0">
+            <a:pPr marL="0" indent="0">
               <a:buNone/>
             </a:pPr>
             <a:r>
@@ -32233,7 +31927,7 @@
           <a:bodyPr wrap="square" lIns="0" tIns="0" rIns="0" bIns="0" rtlCol="0" anchor="ctr"/>
           <a:lstStyle/>
           <a:p>
-            <a:pPr indent="0" marL="0">
+            <a:pPr marL="0" indent="0">
               <a:buNone/>
             </a:pPr>
             <a:r>
@@ -32270,7 +31964,7 @@
           </a:solidFill>
           <a:ln/>
           <a:effectLst>
-            <a:outerShdw sx="100000" sy="100000" kx="0" ky="0" algn="bl" rotWithShape="0" blurRad="76200" dist="25400" dir="8100000">
+            <a:outerShdw blurRad="76200" dist="25400" dir="8100000" algn="bl" rotWithShape="0">
               <a:srgbClr val="000000">
                 <a:alpha val="8000"/>
               </a:srgbClr>
@@ -32319,7 +32013,7 @@
           <a:bodyPr wrap="square" lIns="0" tIns="0" rIns="0" bIns="0" rtlCol="0" anchor="ctr"/>
           <a:lstStyle/>
           <a:p>
-            <a:pPr indent="0" marL="0">
+            <a:pPr marL="0" indent="0">
               <a:buNone/>
             </a:pPr>
             <a:r>
@@ -32358,7 +32052,7 @@
           <a:bodyPr wrap="square" lIns="0" tIns="0" rIns="0" bIns="0" rtlCol="0" anchor="ctr"/>
           <a:lstStyle/>
           <a:p>
-            <a:pPr indent="0" marL="0">
+            <a:pPr marL="0" indent="0">
               <a:buNone/>
             </a:pPr>
             <a:r>
@@ -32397,7 +32091,7 @@
           <a:bodyPr wrap="square" lIns="0" tIns="0" rIns="0" bIns="0" rtlCol="0" anchor="ctr"/>
           <a:lstStyle/>
           <a:p>
-            <a:pPr indent="0" marL="0">
+            <a:pPr marL="0" indent="0">
               <a:buNone/>
             </a:pPr>
             <a:r>
@@ -32716,4 +32410,299 @@
     </a:ext>
   </a:extLst>
 </a:theme>
+</file>
+
+<file path=ppt/theme/theme2.xml><?xml version="1.0" encoding="utf-8"?>
+<a:theme xmlns:a="http://schemas.openxmlformats.org/drawingml/2006/main" name="Office 主题​​">
+  <a:themeElements>
+    <a:clrScheme name="Office">
+      <a:dk1>
+        <a:sysClr val="windowText" lastClr="000000"/>
+      </a:dk1>
+      <a:lt1>
+        <a:sysClr val="window" lastClr="FFFFFF"/>
+      </a:lt1>
+      <a:dk2>
+        <a:srgbClr val="44546A"/>
+      </a:dk2>
+      <a:lt2>
+        <a:srgbClr val="E7E6E6"/>
+      </a:lt2>
+      <a:accent1>
+        <a:srgbClr val="4472C4"/>
+      </a:accent1>
+      <a:accent2>
+        <a:srgbClr val="ED7D31"/>
+      </a:accent2>
+      <a:accent3>
+        <a:srgbClr val="A5A5A5"/>
+      </a:accent3>
+      <a:accent4>
+        <a:srgbClr val="FFC000"/>
+      </a:accent4>
+      <a:accent5>
+        <a:srgbClr val="5B9BD5"/>
+      </a:accent5>
+      <a:accent6>
+        <a:srgbClr val="70AD47"/>
+      </a:accent6>
+      <a:hlink>
+        <a:srgbClr val="0563C1"/>
+      </a:hlink>
+      <a:folHlink>
+        <a:srgbClr val="954F72"/>
+      </a:folHlink>
+    </a:clrScheme>
+    <a:fontScheme name="Office">
+      <a:majorFont>
+        <a:latin typeface="等线 Light" panose="020F0302020204030204"/>
+        <a:ea typeface=""/>
+        <a:cs typeface=""/>
+        <a:font script="Jpan" typeface="游ゴシック Light"/>
+        <a:font script="Hang" typeface="맑은 고딕"/>
+        <a:font script="Hans" typeface="等线 Light"/>
+        <a:font script="Hant" typeface="新細明體"/>
+        <a:font script="Arab" typeface="Times New Roman"/>
+        <a:font script="Hebr" typeface="Times New Roman"/>
+        <a:font script="Thai" typeface="Angsana New"/>
+        <a:font script="Ethi" typeface="Nyala"/>
+        <a:font script="Beng" typeface="Vrinda"/>
+        <a:font script="Gujr" typeface="Shruti"/>
+        <a:font script="Khmr" typeface="MoolBoran"/>
+        <a:font script="Knda" typeface="Tunga"/>
+        <a:font script="Guru" typeface="Raavi"/>
+        <a:font script="Cans" typeface="Euphemia"/>
+        <a:font script="Cher" typeface="Plantagenet Cherokee"/>
+        <a:font script="Yiii" typeface="Microsoft Yi Baiti"/>
+        <a:font script="Tibt" typeface="Microsoft Himalaya"/>
+        <a:font script="Thaa" typeface="MV Boli"/>
+        <a:font script="Deva" typeface="Mangal"/>
+        <a:font script="Telu" typeface="Gautami"/>
+        <a:font script="Taml" typeface="Latha"/>
+        <a:font script="Syrc" typeface="Estrangelo Edessa"/>
+        <a:font script="Orya" typeface="Kalinga"/>
+        <a:font script="Mlym" typeface="Kartika"/>
+        <a:font script="Laoo" typeface="DokChampa"/>
+        <a:font script="Sinh" typeface="Iskoola Pota"/>
+        <a:font script="Mong" typeface="Mongolian Baiti"/>
+        <a:font script="Viet" typeface="Times New Roman"/>
+        <a:font script="Uigh" typeface="Microsoft Uighur"/>
+        <a:font script="Geor" typeface="Sylfaen"/>
+        <a:font script="Armn" typeface="Arial"/>
+        <a:font script="Bugi" typeface="Leelawadee UI"/>
+        <a:font script="Bopo" typeface="Microsoft JhengHei"/>
+        <a:font script="Java" typeface="Javanese Text"/>
+        <a:font script="Lisu" typeface="Segoe UI"/>
+        <a:font script="Mymr" typeface="Myanmar Text"/>
+        <a:font script="Nkoo" typeface="Ebrima"/>
+        <a:font script="Olck" typeface="Nirmala UI"/>
+        <a:font script="Osma" typeface="Ebrima"/>
+        <a:font script="Phag" typeface="Phagspa"/>
+        <a:font script="Syrn" typeface="Estrangelo Edessa"/>
+        <a:font script="Syrj" typeface="Estrangelo Edessa"/>
+        <a:font script="Syre" typeface="Estrangelo Edessa"/>
+        <a:font script="Sora" typeface="Nirmala UI"/>
+        <a:font script="Tale" typeface="Microsoft Tai Le"/>
+        <a:font script="Talu" typeface="Microsoft New Tai Lue"/>
+        <a:font script="Tfng" typeface="Ebrima"/>
+      </a:majorFont>
+      <a:minorFont>
+        <a:latin typeface="等线" panose="020F0502020204030204"/>
+        <a:ea typeface=""/>
+        <a:cs typeface=""/>
+        <a:font script="Jpan" typeface="游ゴシック"/>
+        <a:font script="Hang" typeface="맑은 고딕"/>
+        <a:font script="Hans" typeface="等线"/>
+        <a:font script="Hant" typeface="新細明體"/>
+        <a:font script="Arab" typeface="Arial"/>
+        <a:font script="Hebr" typeface="Arial"/>
+        <a:font script="Thai" typeface="Cordia New"/>
+        <a:font script="Ethi" typeface="Nyala"/>
+        <a:font script="Beng" typeface="Vrinda"/>
+        <a:font script="Gujr" typeface="Shruti"/>
+        <a:font script="Khmr" typeface="DaunPenh"/>
+        <a:font script="Knda" typeface="Tunga"/>
+        <a:font script="Guru" typeface="Raavi"/>
+        <a:font script="Cans" typeface="Euphemia"/>
+        <a:font script="Cher" typeface="Plantagenet Cherokee"/>
+        <a:font script="Yiii" typeface="Microsoft Yi Baiti"/>
+        <a:font script="Tibt" typeface="Microsoft Himalaya"/>
+        <a:font script="Thaa" typeface="MV Boli"/>
+        <a:font script="Deva" typeface="Mangal"/>
+        <a:font script="Telu" typeface="Gautami"/>
+        <a:font script="Taml" typeface="Latha"/>
+        <a:font script="Syrc" typeface="Estrangelo Edessa"/>
+        <a:font script="Orya" typeface="Kalinga"/>
+        <a:font script="Mlym" typeface="Kartika"/>
+        <a:font script="Laoo" typeface="DokChampa"/>
+        <a:font script="Sinh" typeface="Iskoola Pota"/>
+        <a:font script="Mong" typeface="Mongolian Baiti"/>
+        <a:font script="Viet" typeface="Arial"/>
+        <a:font script="Uigh" typeface="Microsoft Uighur"/>
+        <a:font script="Geor" typeface="Sylfaen"/>
+        <a:font script="Armn" typeface="Arial"/>
+        <a:font script="Bugi" typeface="Leelawadee UI"/>
+        <a:font script="Bopo" typeface="Microsoft JhengHei"/>
+        <a:font script="Java" typeface="Javanese Text"/>
+        <a:font script="Lisu" typeface="Segoe UI"/>
+        <a:font script="Mymr" typeface="Myanmar Text"/>
+        <a:font script="Nkoo" typeface="Ebrima"/>
+        <a:font script="Olck" typeface="Nirmala UI"/>
+        <a:font script="Osma" typeface="Ebrima"/>
+        <a:font script="Phag" typeface="Phagspa"/>
+        <a:font script="Syrn" typeface="Estrangelo Edessa"/>
+        <a:font script="Syrj" typeface="Estrangelo Edessa"/>
+        <a:font script="Syre" typeface="Estrangelo Edessa"/>
+        <a:font script="Sora" typeface="Nirmala UI"/>
+        <a:font script="Tale" typeface="Microsoft Tai Le"/>
+        <a:font script="Talu" typeface="Microsoft New Tai Lue"/>
+        <a:font script="Tfng" typeface="Ebrima"/>
+      </a:minorFont>
+    </a:fontScheme>
+    <a:fmtScheme name="Office">
+      <a:fillStyleLst>
+        <a:solidFill>
+          <a:schemeClr val="phClr"/>
+        </a:solidFill>
+        <a:gradFill rotWithShape="1">
+          <a:gsLst>
+            <a:gs pos="0">
+              <a:schemeClr val="phClr">
+                <a:lumMod val="110000"/>
+                <a:satMod val="105000"/>
+                <a:tint val="67000"/>
+              </a:schemeClr>
+            </a:gs>
+            <a:gs pos="50000">
+              <a:schemeClr val="phClr">
+                <a:lumMod val="105000"/>
+                <a:satMod val="103000"/>
+                <a:tint val="73000"/>
+              </a:schemeClr>
+            </a:gs>
+            <a:gs pos="100000">
+              <a:schemeClr val="phClr">
+                <a:lumMod val="105000"/>
+                <a:satMod val="109000"/>
+                <a:tint val="81000"/>
+              </a:schemeClr>
+            </a:gs>
+          </a:gsLst>
+          <a:lin ang="5400000" scaled="0"/>
+        </a:gradFill>
+        <a:gradFill rotWithShape="1">
+          <a:gsLst>
+            <a:gs pos="0">
+              <a:schemeClr val="phClr">
+                <a:satMod val="103000"/>
+                <a:lumMod val="102000"/>
+                <a:tint val="94000"/>
+              </a:schemeClr>
+            </a:gs>
+            <a:gs pos="50000">
+              <a:schemeClr val="phClr">
+                <a:satMod val="110000"/>
+                <a:lumMod val="100000"/>
+                <a:shade val="100000"/>
+              </a:schemeClr>
+            </a:gs>
+            <a:gs pos="100000">
+              <a:schemeClr val="phClr">
+                <a:lumMod val="99000"/>
+                <a:satMod val="120000"/>
+                <a:shade val="78000"/>
+              </a:schemeClr>
+            </a:gs>
+          </a:gsLst>
+          <a:lin ang="5400000" scaled="0"/>
+        </a:gradFill>
+      </a:fillStyleLst>
+      <a:lnStyleLst>
+        <a:ln w="6350" cap="flat" cmpd="sng" algn="ctr">
+          <a:solidFill>
+            <a:schemeClr val="phClr"/>
+          </a:solidFill>
+          <a:prstDash val="solid"/>
+          <a:miter lim="800000"/>
+        </a:ln>
+        <a:ln w="12700" cap="flat" cmpd="sng" algn="ctr">
+          <a:solidFill>
+            <a:schemeClr val="phClr"/>
+          </a:solidFill>
+          <a:prstDash val="solid"/>
+          <a:miter lim="800000"/>
+        </a:ln>
+        <a:ln w="19050" cap="flat" cmpd="sng" algn="ctr">
+          <a:solidFill>
+            <a:schemeClr val="phClr"/>
+          </a:solidFill>
+          <a:prstDash val="solid"/>
+          <a:miter lim="800000"/>
+        </a:ln>
+      </a:lnStyleLst>
+      <a:effectStyleLst>
+        <a:effectStyle>
+          <a:effectLst/>
+        </a:effectStyle>
+        <a:effectStyle>
+          <a:effectLst/>
+        </a:effectStyle>
+        <a:effectStyle>
+          <a:effectLst>
+            <a:outerShdw blurRad="57150" dist="19050" dir="5400000" algn="ctr" rotWithShape="0">
+              <a:srgbClr val="000000">
+                <a:alpha val="63000"/>
+              </a:srgbClr>
+            </a:outerShdw>
+          </a:effectLst>
+        </a:effectStyle>
+      </a:effectStyleLst>
+      <a:bgFillStyleLst>
+        <a:solidFill>
+          <a:schemeClr val="phClr"/>
+        </a:solidFill>
+        <a:solidFill>
+          <a:schemeClr val="phClr">
+            <a:tint val="95000"/>
+            <a:satMod val="170000"/>
+          </a:schemeClr>
+        </a:solidFill>
+        <a:gradFill rotWithShape="1">
+          <a:gsLst>
+            <a:gs pos="0">
+              <a:schemeClr val="phClr">
+                <a:tint val="93000"/>
+                <a:satMod val="150000"/>
+                <a:shade val="98000"/>
+                <a:lumMod val="102000"/>
+              </a:schemeClr>
+            </a:gs>
+            <a:gs pos="50000">
+              <a:schemeClr val="phClr">
+                <a:tint val="98000"/>
+                <a:satMod val="130000"/>
+                <a:shade val="90000"/>
+                <a:lumMod val="103000"/>
+              </a:schemeClr>
+            </a:gs>
+            <a:gs pos="100000">
+              <a:schemeClr val="phClr">
+                <a:shade val="63000"/>
+                <a:satMod val="120000"/>
+              </a:schemeClr>
+            </a:gs>
+          </a:gsLst>
+          <a:lin ang="5400000" scaled="0"/>
+        </a:gradFill>
+      </a:bgFillStyleLst>
+    </a:fmtScheme>
+  </a:themeElements>
+  <a:objectDefaults/>
+  <a:extraClrSchemeLst/>
+  <a:extLst>
+    <a:ext uri="{05A4C25C-085E-4340-85A3-A5531E510DB2}">
+      <thm15:themeFamily xmlns:thm15="http://schemas.microsoft.com/office/thememl/2012/main" name="Office Theme" id="{62F939B6-93AF-4DB8-9C6B-D6C7DFDC589F}" vid="{4A3C46E8-61CC-4603-A589-7422A47A8E4A}"/>
+    </a:ext>
+  </a:extLst>
+</a:theme>
 </file>